--- a/misc/presentation/Viper_Intro_Revised.pptx
+++ b/misc/presentation/Viper_Intro_Revised.pptx
@@ -5,16 +5,16 @@
     <p:sldMasterId id="2147483648" r:id="rId1"/>
   </p:sldMasterIdLst>
   <p:sldIdLst>
-    <p:sldId id="256" r:id="rId7"/>
-    <p:sldId id="257" r:id="rId8"/>
-    <p:sldId id="258" r:id="rId9"/>
-    <p:sldId id="259" r:id="rId10"/>
-    <p:sldId id="260" r:id="rId11"/>
-    <p:sldId id="261" r:id="rId12"/>
-    <p:sldId id="262" r:id="rId13"/>
-    <p:sldId id="263" r:id="rId14"/>
+    <p:sldId id="256" r:id="rId2"/>
+    <p:sldId id="257" r:id="rId3"/>
+    <p:sldId id="258" r:id="rId4"/>
+    <p:sldId id="259" r:id="rId5"/>
+    <p:sldId id="260" r:id="rId6"/>
+    <p:sldId id="261" r:id="rId7"/>
+    <p:sldId id="262" r:id="rId8"/>
+    <p:sldId id="263" r:id="rId9"/>
   </p:sldIdLst>
-  <p:sldSz cx="12191695" cy="6858000" type="screen4x3"/>
+  <p:sldSz cx="12192000" cy="6858000"/>
   <p:notesSz cx="6858000" cy="9144000"/>
   <p:defaultTextStyle>
     <a:defPPr>
@@ -111,6 +111,22 @@
       </a:defRPr>
     </a:lvl9pPr>
   </p:defaultTextStyle>
+  <p:extLst>
+    <p:ext uri="{EFAFB233-063F-42B5-8137-9DF3F51BA10A}">
+      <p15:sldGuideLst xmlns:p15="http://schemas.microsoft.com/office/powerpoint/2012/main">
+        <p15:guide id="1" orient="horz" pos="2160">
+          <p15:clr>
+            <a:srgbClr val="A4A3A4"/>
+          </p15:clr>
+        </p15:guide>
+        <p15:guide id="2" pos="2880">
+          <p15:clr>
+            <a:srgbClr val="A4A3A4"/>
+          </p15:clr>
+        </p15:guide>
+      </p15:sldGuideLst>
+    </p:ext>
+  </p:extLst>
 </p:presentation>
 </file>
 
@@ -152,10 +168,9 @@
           <a:lstStyle/>
           <a:p>
             <a:r>
-              <a:rPr lang="en-US" smtClean="0"/>
+              <a:rPr lang="en-US"/>
               <a:t>Click to edit Master title style</a:t>
             </a:r>
-            <a:endParaRPr lang="en-US"/>
           </a:p>
         </p:txBody>
       </p:sp>
@@ -271,10 +286,9 @@
           </a:lstStyle>
           <a:p>
             <a:r>
-              <a:rPr lang="en-US" smtClean="0"/>
+              <a:rPr lang="en-US"/>
               <a:t>Click to edit Master subtitle style</a:t>
             </a:r>
-            <a:endParaRPr lang="en-US"/>
           </a:p>
         </p:txBody>
       </p:sp>
@@ -295,7 +309,7 @@
           <a:p>
             <a:fld id="{5BCAD085-E8A6-8845-BD4E-CB4CCA059FC4}" type="datetimeFigureOut">
               <a:rPr lang="en-US" smtClean="0"/>
-              <a:t>1/27/13</a:t>
+              <a:t>6/14/26</a:t>
             </a:fld>
             <a:endParaRPr lang="en-US"/>
           </a:p>
@@ -389,10 +403,9 @@
           <a:lstStyle/>
           <a:p>
             <a:r>
-              <a:rPr lang="en-US" smtClean="0"/>
+              <a:rPr lang="en-US"/>
               <a:t>Click to edit Master title style</a:t>
             </a:r>
-            <a:endParaRPr lang="en-US"/>
           </a:p>
         </p:txBody>
       </p:sp>
@@ -413,38 +426,37 @@
           <a:p>
             <a:pPr lvl="0"/>
             <a:r>
-              <a:rPr lang="en-US" smtClean="0"/>
+              <a:rPr lang="en-US"/>
               <a:t>Click to edit Master text styles</a:t>
             </a:r>
           </a:p>
           <a:p>
             <a:pPr lvl="1"/>
             <a:r>
-              <a:rPr lang="en-US" smtClean="0"/>
+              <a:rPr lang="en-US"/>
               <a:t>Second level</a:t>
             </a:r>
           </a:p>
           <a:p>
             <a:pPr lvl="2"/>
             <a:r>
-              <a:rPr lang="en-US" smtClean="0"/>
+              <a:rPr lang="en-US"/>
               <a:t>Third level</a:t>
             </a:r>
           </a:p>
           <a:p>
             <a:pPr lvl="3"/>
             <a:r>
-              <a:rPr lang="en-US" smtClean="0"/>
+              <a:rPr lang="en-US"/>
               <a:t>Fourth level</a:t>
             </a:r>
           </a:p>
           <a:p>
             <a:pPr lvl="4"/>
             <a:r>
-              <a:rPr lang="en-US" smtClean="0"/>
+              <a:rPr lang="en-US"/>
               <a:t>Fifth level</a:t>
             </a:r>
-            <a:endParaRPr lang="en-US"/>
           </a:p>
         </p:txBody>
       </p:sp>
@@ -465,7 +477,7 @@
           <a:p>
             <a:fld id="{5BCAD085-E8A6-8845-BD4E-CB4CCA059FC4}" type="datetimeFigureOut">
               <a:rPr lang="en-US" smtClean="0"/>
-              <a:t>1/27/13</a:t>
+              <a:t>6/14/26</a:t>
             </a:fld>
             <a:endParaRPr lang="en-US"/>
           </a:p>
@@ -564,10 +576,9 @@
           <a:lstStyle/>
           <a:p>
             <a:r>
-              <a:rPr lang="en-US" smtClean="0"/>
+              <a:rPr lang="en-US"/>
               <a:t>Click to edit Master title style</a:t>
             </a:r>
-            <a:endParaRPr lang="en-US"/>
           </a:p>
         </p:txBody>
       </p:sp>
@@ -593,38 +604,37 @@
           <a:p>
             <a:pPr lvl="0"/>
             <a:r>
-              <a:rPr lang="en-US" smtClean="0"/>
+              <a:rPr lang="en-US"/>
               <a:t>Click to edit Master text styles</a:t>
             </a:r>
           </a:p>
           <a:p>
             <a:pPr lvl="1"/>
             <a:r>
-              <a:rPr lang="en-US" smtClean="0"/>
+              <a:rPr lang="en-US"/>
               <a:t>Second level</a:t>
             </a:r>
           </a:p>
           <a:p>
             <a:pPr lvl="2"/>
             <a:r>
-              <a:rPr lang="en-US" smtClean="0"/>
+              <a:rPr lang="en-US"/>
               <a:t>Third level</a:t>
             </a:r>
           </a:p>
           <a:p>
             <a:pPr lvl="3"/>
             <a:r>
-              <a:rPr lang="en-US" smtClean="0"/>
+              <a:rPr lang="en-US"/>
               <a:t>Fourth level</a:t>
             </a:r>
           </a:p>
           <a:p>
             <a:pPr lvl="4"/>
             <a:r>
-              <a:rPr lang="en-US" smtClean="0"/>
+              <a:rPr lang="en-US"/>
               <a:t>Fifth level</a:t>
             </a:r>
-            <a:endParaRPr lang="en-US"/>
           </a:p>
         </p:txBody>
       </p:sp>
@@ -645,7 +655,7 @@
           <a:p>
             <a:fld id="{5BCAD085-E8A6-8845-BD4E-CB4CCA059FC4}" type="datetimeFigureOut">
               <a:rPr lang="en-US" smtClean="0"/>
-              <a:t>1/27/13</a:t>
+              <a:t>6/14/26</a:t>
             </a:fld>
             <a:endParaRPr lang="en-US"/>
           </a:p>
@@ -739,10 +749,9 @@
           <a:lstStyle/>
           <a:p>
             <a:r>
-              <a:rPr lang="en-US" smtClean="0"/>
+              <a:rPr lang="en-US"/>
               <a:t>Click to edit Master title style</a:t>
             </a:r>
-            <a:endParaRPr lang="en-US"/>
           </a:p>
         </p:txBody>
       </p:sp>
@@ -763,38 +772,37 @@
           <a:p>
             <a:pPr lvl="0"/>
             <a:r>
-              <a:rPr lang="en-US" smtClean="0"/>
+              <a:rPr lang="en-US"/>
               <a:t>Click to edit Master text styles</a:t>
             </a:r>
           </a:p>
           <a:p>
             <a:pPr lvl="1"/>
             <a:r>
-              <a:rPr lang="en-US" smtClean="0"/>
+              <a:rPr lang="en-US"/>
               <a:t>Second level</a:t>
             </a:r>
           </a:p>
           <a:p>
             <a:pPr lvl="2"/>
             <a:r>
-              <a:rPr lang="en-US" smtClean="0"/>
+              <a:rPr lang="en-US"/>
               <a:t>Third level</a:t>
             </a:r>
           </a:p>
           <a:p>
             <a:pPr lvl="3"/>
             <a:r>
-              <a:rPr lang="en-US" smtClean="0"/>
+              <a:rPr lang="en-US"/>
               <a:t>Fourth level</a:t>
             </a:r>
           </a:p>
           <a:p>
             <a:pPr lvl="4"/>
             <a:r>
-              <a:rPr lang="en-US" smtClean="0"/>
+              <a:rPr lang="en-US"/>
               <a:t>Fifth level</a:t>
             </a:r>
-            <a:endParaRPr lang="en-US"/>
           </a:p>
         </p:txBody>
       </p:sp>
@@ -815,7 +823,7 @@
           <a:p>
             <a:fld id="{5BCAD085-E8A6-8845-BD4E-CB4CCA059FC4}" type="datetimeFigureOut">
               <a:rPr lang="en-US" smtClean="0"/>
-              <a:t>1/27/13</a:t>
+              <a:t>6/14/26</a:t>
             </a:fld>
             <a:endParaRPr lang="en-US"/>
           </a:p>
@@ -918,10 +926,9 @@
           </a:lstStyle>
           <a:p>
             <a:r>
-              <a:rPr lang="en-US" smtClean="0"/>
+              <a:rPr lang="en-US"/>
               <a:t>Click to edit Master title style</a:t>
             </a:r>
-            <a:endParaRPr lang="en-US"/>
           </a:p>
         </p:txBody>
       </p:sp>
@@ -1038,7 +1045,7 @@
           <a:p>
             <a:pPr lvl="0"/>
             <a:r>
-              <a:rPr lang="en-US" smtClean="0"/>
+              <a:rPr lang="en-US"/>
               <a:t>Click to edit Master text styles</a:t>
             </a:r>
           </a:p>
@@ -1061,7 +1068,7 @@
           <a:p>
             <a:fld id="{5BCAD085-E8A6-8845-BD4E-CB4CCA059FC4}" type="datetimeFigureOut">
               <a:rPr lang="en-US" smtClean="0"/>
-              <a:t>1/27/13</a:t>
+              <a:t>6/14/26</a:t>
             </a:fld>
             <a:endParaRPr lang="en-US"/>
           </a:p>
@@ -1155,10 +1162,9 @@
           <a:lstStyle/>
           <a:p>
             <a:r>
-              <a:rPr lang="en-US" smtClean="0"/>
+              <a:rPr lang="en-US"/>
               <a:t>Click to edit Master title style</a:t>
             </a:r>
-            <a:endParaRPr lang="en-US"/>
           </a:p>
         </p:txBody>
       </p:sp>
@@ -1212,38 +1218,37 @@
           <a:p>
             <a:pPr lvl="0"/>
             <a:r>
-              <a:rPr lang="en-US" smtClean="0"/>
+              <a:rPr lang="en-US"/>
               <a:t>Click to edit Master text styles</a:t>
             </a:r>
           </a:p>
           <a:p>
             <a:pPr lvl="1"/>
             <a:r>
-              <a:rPr lang="en-US" smtClean="0"/>
+              <a:rPr lang="en-US"/>
               <a:t>Second level</a:t>
             </a:r>
           </a:p>
           <a:p>
             <a:pPr lvl="2"/>
             <a:r>
-              <a:rPr lang="en-US" smtClean="0"/>
+              <a:rPr lang="en-US"/>
               <a:t>Third level</a:t>
             </a:r>
           </a:p>
           <a:p>
             <a:pPr lvl="3"/>
             <a:r>
-              <a:rPr lang="en-US" smtClean="0"/>
+              <a:rPr lang="en-US"/>
               <a:t>Fourth level</a:t>
             </a:r>
           </a:p>
           <a:p>
             <a:pPr lvl="4"/>
             <a:r>
-              <a:rPr lang="en-US" smtClean="0"/>
+              <a:rPr lang="en-US"/>
               <a:t>Fifth level</a:t>
             </a:r>
-            <a:endParaRPr lang="en-US"/>
           </a:p>
         </p:txBody>
       </p:sp>
@@ -1297,38 +1302,37 @@
           <a:p>
             <a:pPr lvl="0"/>
             <a:r>
-              <a:rPr lang="en-US" smtClean="0"/>
+              <a:rPr lang="en-US"/>
               <a:t>Click to edit Master text styles</a:t>
             </a:r>
           </a:p>
           <a:p>
             <a:pPr lvl="1"/>
             <a:r>
-              <a:rPr lang="en-US" smtClean="0"/>
+              <a:rPr lang="en-US"/>
               <a:t>Second level</a:t>
             </a:r>
           </a:p>
           <a:p>
             <a:pPr lvl="2"/>
             <a:r>
-              <a:rPr lang="en-US" smtClean="0"/>
+              <a:rPr lang="en-US"/>
               <a:t>Third level</a:t>
             </a:r>
           </a:p>
           <a:p>
             <a:pPr lvl="3"/>
             <a:r>
-              <a:rPr lang="en-US" smtClean="0"/>
+              <a:rPr lang="en-US"/>
               <a:t>Fourth level</a:t>
             </a:r>
           </a:p>
           <a:p>
             <a:pPr lvl="4"/>
             <a:r>
-              <a:rPr lang="en-US" smtClean="0"/>
+              <a:rPr lang="en-US"/>
               <a:t>Fifth level</a:t>
             </a:r>
-            <a:endParaRPr lang="en-US"/>
           </a:p>
         </p:txBody>
       </p:sp>
@@ -1349,7 +1353,7 @@
           <a:p>
             <a:fld id="{5BCAD085-E8A6-8845-BD4E-CB4CCA059FC4}" type="datetimeFigureOut">
               <a:rPr lang="en-US" smtClean="0"/>
-              <a:t>1/27/13</a:t>
+              <a:t>6/14/26</a:t>
             </a:fld>
             <a:endParaRPr lang="en-US"/>
           </a:p>
@@ -1447,10 +1451,9 @@
           </a:lstStyle>
           <a:p>
             <a:r>
-              <a:rPr lang="en-US" smtClean="0"/>
+              <a:rPr lang="en-US"/>
               <a:t>Click to edit Master title style</a:t>
             </a:r>
-            <a:endParaRPr lang="en-US"/>
           </a:p>
         </p:txBody>
       </p:sp>
@@ -1513,7 +1516,7 @@
           <a:p>
             <a:pPr lvl="0"/>
             <a:r>
-              <a:rPr lang="en-US" smtClean="0"/>
+              <a:rPr lang="en-US"/>
               <a:t>Click to edit Master text styles</a:t>
             </a:r>
           </a:p>
@@ -1569,38 +1572,37 @@
           <a:p>
             <a:pPr lvl="0"/>
             <a:r>
-              <a:rPr lang="en-US" smtClean="0"/>
+              <a:rPr lang="en-US"/>
               <a:t>Click to edit Master text styles</a:t>
             </a:r>
           </a:p>
           <a:p>
             <a:pPr lvl="1"/>
             <a:r>
-              <a:rPr lang="en-US" smtClean="0"/>
+              <a:rPr lang="en-US"/>
               <a:t>Second level</a:t>
             </a:r>
           </a:p>
           <a:p>
             <a:pPr lvl="2"/>
             <a:r>
-              <a:rPr lang="en-US" smtClean="0"/>
+              <a:rPr lang="en-US"/>
               <a:t>Third level</a:t>
             </a:r>
           </a:p>
           <a:p>
             <a:pPr lvl="3"/>
             <a:r>
-              <a:rPr lang="en-US" smtClean="0"/>
+              <a:rPr lang="en-US"/>
               <a:t>Fourth level</a:t>
             </a:r>
           </a:p>
           <a:p>
             <a:pPr lvl="4"/>
             <a:r>
-              <a:rPr lang="en-US" smtClean="0"/>
+              <a:rPr lang="en-US"/>
               <a:t>Fifth level</a:t>
             </a:r>
-            <a:endParaRPr lang="en-US"/>
           </a:p>
         </p:txBody>
       </p:sp>
@@ -1663,7 +1665,7 @@
           <a:p>
             <a:pPr lvl="0"/>
             <a:r>
-              <a:rPr lang="en-US" smtClean="0"/>
+              <a:rPr lang="en-US"/>
               <a:t>Click to edit Master text styles</a:t>
             </a:r>
           </a:p>
@@ -1719,38 +1721,37 @@
           <a:p>
             <a:pPr lvl="0"/>
             <a:r>
-              <a:rPr lang="en-US" smtClean="0"/>
+              <a:rPr lang="en-US"/>
               <a:t>Click to edit Master text styles</a:t>
             </a:r>
           </a:p>
           <a:p>
             <a:pPr lvl="1"/>
             <a:r>
-              <a:rPr lang="en-US" smtClean="0"/>
+              <a:rPr lang="en-US"/>
               <a:t>Second level</a:t>
             </a:r>
           </a:p>
           <a:p>
             <a:pPr lvl="2"/>
             <a:r>
-              <a:rPr lang="en-US" smtClean="0"/>
+              <a:rPr lang="en-US"/>
               <a:t>Third level</a:t>
             </a:r>
           </a:p>
           <a:p>
             <a:pPr lvl="3"/>
             <a:r>
-              <a:rPr lang="en-US" smtClean="0"/>
+              <a:rPr lang="en-US"/>
               <a:t>Fourth level</a:t>
             </a:r>
           </a:p>
           <a:p>
             <a:pPr lvl="4"/>
             <a:r>
-              <a:rPr lang="en-US" smtClean="0"/>
+              <a:rPr lang="en-US"/>
               <a:t>Fifth level</a:t>
             </a:r>
-            <a:endParaRPr lang="en-US"/>
           </a:p>
         </p:txBody>
       </p:sp>
@@ -1771,7 +1772,7 @@
           <a:p>
             <a:fld id="{5BCAD085-E8A6-8845-BD4E-CB4CCA059FC4}" type="datetimeFigureOut">
               <a:rPr lang="en-US" smtClean="0"/>
-              <a:t>1/27/13</a:t>
+              <a:t>6/14/26</a:t>
             </a:fld>
             <a:endParaRPr lang="en-US"/>
           </a:p>
@@ -1865,10 +1866,9 @@
           <a:lstStyle/>
           <a:p>
             <a:r>
-              <a:rPr lang="en-US" smtClean="0"/>
+              <a:rPr lang="en-US"/>
               <a:t>Click to edit Master title style</a:t>
             </a:r>
-            <a:endParaRPr lang="en-US"/>
           </a:p>
         </p:txBody>
       </p:sp>
@@ -1889,7 +1889,7 @@
           <a:p>
             <a:fld id="{5BCAD085-E8A6-8845-BD4E-CB4CCA059FC4}" type="datetimeFigureOut">
               <a:rPr lang="en-US" smtClean="0"/>
-              <a:t>1/27/13</a:t>
+              <a:t>6/14/26</a:t>
             </a:fld>
             <a:endParaRPr lang="en-US"/>
           </a:p>
@@ -1984,7 +1984,7 @@
           <a:p>
             <a:fld id="{5BCAD085-E8A6-8845-BD4E-CB4CCA059FC4}" type="datetimeFigureOut">
               <a:rPr lang="en-US" smtClean="0"/>
-              <a:t>1/27/13</a:t>
+              <a:t>6/14/26</a:t>
             </a:fld>
             <a:endParaRPr lang="en-US"/>
           </a:p>
@@ -2087,10 +2087,9 @@
           </a:lstStyle>
           <a:p>
             <a:r>
-              <a:rPr lang="en-US" smtClean="0"/>
+              <a:rPr lang="en-US"/>
               <a:t>Click to edit Master title style</a:t>
             </a:r>
-            <a:endParaRPr lang="en-US"/>
           </a:p>
         </p:txBody>
       </p:sp>
@@ -2144,38 +2143,37 @@
           <a:p>
             <a:pPr lvl="0"/>
             <a:r>
-              <a:rPr lang="en-US" smtClean="0"/>
+              <a:rPr lang="en-US"/>
               <a:t>Click to edit Master text styles</a:t>
             </a:r>
           </a:p>
           <a:p>
             <a:pPr lvl="1"/>
             <a:r>
-              <a:rPr lang="en-US" smtClean="0"/>
+              <a:rPr lang="en-US"/>
               <a:t>Second level</a:t>
             </a:r>
           </a:p>
           <a:p>
             <a:pPr lvl="2"/>
             <a:r>
-              <a:rPr lang="en-US" smtClean="0"/>
+              <a:rPr lang="en-US"/>
               <a:t>Third level</a:t>
             </a:r>
           </a:p>
           <a:p>
             <a:pPr lvl="3"/>
             <a:r>
-              <a:rPr lang="en-US" smtClean="0"/>
+              <a:rPr lang="en-US"/>
               <a:t>Fourth level</a:t>
             </a:r>
           </a:p>
           <a:p>
             <a:pPr lvl="4"/>
             <a:r>
-              <a:rPr lang="en-US" smtClean="0"/>
+              <a:rPr lang="en-US"/>
               <a:t>Fifth level</a:t>
             </a:r>
-            <a:endParaRPr lang="en-US"/>
           </a:p>
         </p:txBody>
       </p:sp>
@@ -2238,7 +2236,7 @@
           <a:p>
             <a:pPr lvl="0"/>
             <a:r>
-              <a:rPr lang="en-US" smtClean="0"/>
+              <a:rPr lang="en-US"/>
               <a:t>Click to edit Master text styles</a:t>
             </a:r>
           </a:p>
@@ -2261,7 +2259,7 @@
           <a:p>
             <a:fld id="{5BCAD085-E8A6-8845-BD4E-CB4CCA059FC4}" type="datetimeFigureOut">
               <a:rPr lang="en-US" smtClean="0"/>
-              <a:t>1/27/13</a:t>
+              <a:t>6/14/26</a:t>
             </a:fld>
             <a:endParaRPr lang="en-US"/>
           </a:p>
@@ -2364,10 +2362,9 @@
           </a:lstStyle>
           <a:p>
             <a:r>
-              <a:rPr lang="en-US" smtClean="0"/>
+              <a:rPr lang="en-US"/>
               <a:t>Click to edit Master title style</a:t>
             </a:r>
-            <a:endParaRPr lang="en-US"/>
           </a:p>
         </p:txBody>
       </p:sp>
@@ -2491,7 +2488,7 @@
           <a:p>
             <a:pPr lvl="0"/>
             <a:r>
-              <a:rPr lang="en-US" smtClean="0"/>
+              <a:rPr lang="en-US"/>
               <a:t>Click to edit Master text styles</a:t>
             </a:r>
           </a:p>
@@ -2514,7 +2511,7 @@
           <a:p>
             <a:fld id="{5BCAD085-E8A6-8845-BD4E-CB4CCA059FC4}" type="datetimeFigureOut">
               <a:rPr lang="en-US" smtClean="0"/>
-              <a:t>1/27/13</a:t>
+              <a:t>6/14/26</a:t>
             </a:fld>
             <a:endParaRPr lang="en-US"/>
           </a:p>
@@ -2623,10 +2620,9 @@
           <a:lstStyle/>
           <a:p>
             <a:r>
-              <a:rPr lang="en-US" smtClean="0"/>
+              <a:rPr lang="en-US"/>
               <a:t>Click to edit Master title style</a:t>
             </a:r>
-            <a:endParaRPr lang="en-US"/>
           </a:p>
         </p:txBody>
       </p:sp>
@@ -2657,38 +2653,37 @@
           <a:p>
             <a:pPr lvl="0"/>
             <a:r>
-              <a:rPr lang="en-US" smtClean="0"/>
+              <a:rPr lang="en-US"/>
               <a:t>Click to edit Master text styles</a:t>
             </a:r>
           </a:p>
           <a:p>
             <a:pPr lvl="1"/>
             <a:r>
-              <a:rPr lang="en-US" smtClean="0"/>
+              <a:rPr lang="en-US"/>
               <a:t>Second level</a:t>
             </a:r>
           </a:p>
           <a:p>
             <a:pPr lvl="2"/>
             <a:r>
-              <a:rPr lang="en-US" smtClean="0"/>
+              <a:rPr lang="en-US"/>
               <a:t>Third level</a:t>
             </a:r>
           </a:p>
           <a:p>
             <a:pPr lvl="3"/>
             <a:r>
-              <a:rPr lang="en-US" smtClean="0"/>
+              <a:rPr lang="en-US"/>
               <a:t>Fourth level</a:t>
             </a:r>
           </a:p>
           <a:p>
             <a:pPr lvl="4"/>
             <a:r>
-              <a:rPr lang="en-US" smtClean="0"/>
+              <a:rPr lang="en-US"/>
               <a:t>Fifth level</a:t>
             </a:r>
-            <a:endParaRPr lang="en-US"/>
           </a:p>
         </p:txBody>
       </p:sp>
@@ -2727,7 +2722,7 @@
           <a:p>
             <a:fld id="{5BCAD085-E8A6-8845-BD4E-CB4CCA059FC4}" type="datetimeFigureOut">
               <a:rPr lang="en-US" smtClean="0"/>
-              <a:t>1/27/13</a:t>
+              <a:t>6/14/26</a:t>
             </a:fld>
             <a:endParaRPr lang="en-US"/>
           </a:p>
@@ -3086,7 +3081,7 @@
 </file>
 
 <file path=ppt/slides/slide1.xml><?xml version="1.0" encoding="utf-8"?>
-<p:sld xmlns:a="http://schemas.openxmlformats.org/drawingml/2006/main" xmlns:p="http://schemas.openxmlformats.org/presentationml/2006/main" xmlns:r="http://schemas.openxmlformats.org/officeDocument/2006/relationships">
+<p:sld xmlns:a="http://schemas.openxmlformats.org/drawingml/2006/main" xmlns:r="http://schemas.openxmlformats.org/officeDocument/2006/relationships" xmlns:p="http://schemas.openxmlformats.org/presentationml/2006/main">
   <p:cSld>
     <p:spTree>
       <p:nvGrpSpPr>
@@ -3094,7 +3089,14 @@
         <p:cNvGrpSpPr/>
         <p:nvPr/>
       </p:nvGrpSpPr>
-      <p:grpSpPr/>
+      <p:grpSpPr>
+        <a:xfrm>
+          <a:off x="0" y="0"/>
+          <a:ext cx="0" cy="0"/>
+          <a:chOff x="0" y="0"/>
+          <a:chExt cx="0" cy="0"/>
+        </a:xfrm>
+      </p:grpSpPr>
       <p:sp>
         <p:nvSpPr>
           <p:cNvPr id="2" name="Rectangle 1"/>
@@ -3136,6 +3138,7 @@
           <a:lstStyle/>
           <a:p>
             <a:pPr algn="ctr"/>
+            <a:endParaRPr/>
           </a:p>
         </p:txBody>
       </p:sp>
@@ -3180,6 +3183,7 @@
           <a:lstStyle/>
           <a:p>
             <a:pPr algn="ctr"/>
+            <a:endParaRPr/>
           </a:p>
         </p:txBody>
       </p:sp>
@@ -3224,7 +3228,7 @@
           <a:noFill/>
         </p:spPr>
         <p:txBody>
-          <a:bodyPr wrap="square" anchor="t" lIns="0" rIns="0" tIns="0" bIns="0">
+          <a:bodyPr wrap="square" lIns="0" tIns="0" rIns="0" bIns="0" anchor="t">
             <a:spAutoFit/>
           </a:bodyPr>
           <a:lstStyle/>
@@ -3313,7 +3317,7 @@
           <a:noFill/>
         </p:spPr>
         <p:txBody>
-          <a:bodyPr wrap="square" anchor="ctr" lIns="0" rIns="0" tIns="0" bIns="0">
+          <a:bodyPr wrap="square" lIns="0" tIns="0" rIns="0" bIns="0" anchor="ctr">
             <a:spAutoFit/>
           </a:bodyPr>
           <a:lstStyle/>
@@ -3372,7 +3376,7 @@
                 </a:solidFill>
                 <a:latin typeface="Avenir Next"/>
               </a:rPr>
-              <a:t>macOS · Linux · Windows</a:t>
+              <a:t>Linux · macOS · Windows</a:t>
             </a:r>
             <a:r>
               <a:rPr sz="1400" b="0">
@@ -3404,7 +3408,7 @@
 </file>
 
 <file path=ppt/slides/slide2.xml><?xml version="1.0" encoding="utf-8"?>
-<p:sld xmlns:a="http://schemas.openxmlformats.org/drawingml/2006/main" xmlns:p="http://schemas.openxmlformats.org/presentationml/2006/main" xmlns:r="http://schemas.openxmlformats.org/officeDocument/2006/relationships">
+<p:sld xmlns:a="http://schemas.openxmlformats.org/drawingml/2006/main" xmlns:r="http://schemas.openxmlformats.org/officeDocument/2006/relationships" xmlns:p="http://schemas.openxmlformats.org/presentationml/2006/main">
   <p:cSld>
     <p:spTree>
       <p:nvGrpSpPr>
@@ -3412,7 +3416,14 @@
         <p:cNvGrpSpPr/>
         <p:nvPr/>
       </p:nvGrpSpPr>
-      <p:grpSpPr/>
+      <p:grpSpPr>
+        <a:xfrm>
+          <a:off x="0" y="0"/>
+          <a:ext cx="0" cy="0"/>
+          <a:chOff x="0" y="0"/>
+          <a:chExt cx="0" cy="0"/>
+        </a:xfrm>
+      </p:grpSpPr>
       <p:sp>
         <p:nvSpPr>
           <p:cNvPr id="2" name="Rectangle 1"/>
@@ -3454,6 +3465,7 @@
           <a:lstStyle/>
           <a:p>
             <a:pPr algn="ctr"/>
+            <a:endParaRPr/>
           </a:p>
         </p:txBody>
       </p:sp>
@@ -3474,7 +3486,7 @@
           <a:noFill/>
         </p:spPr>
         <p:txBody>
-          <a:bodyPr wrap="square" anchor="t" lIns="0" rIns="0" tIns="0" bIns="0">
+          <a:bodyPr wrap="square" lIns="0" tIns="0" rIns="0" bIns="0" anchor="t">
             <a:spAutoFit/>
           </a:bodyPr>
           <a:lstStyle/>
@@ -3543,6 +3555,7 @@
           <a:lstStyle/>
           <a:p>
             <a:pPr algn="ctr"/>
+            <a:endParaRPr/>
           </a:p>
         </p:txBody>
       </p:sp>
@@ -3563,7 +3576,7 @@
           <a:noFill/>
         </p:spPr>
         <p:txBody>
-          <a:bodyPr wrap="square" anchor="t" lIns="0" rIns="0" tIns="0" bIns="0">
+          <a:bodyPr wrap="square" lIns="0" tIns="0" rIns="0" bIns="0" anchor="t">
             <a:spAutoFit/>
           </a:bodyPr>
           <a:lstStyle/>
@@ -3608,7 +3621,7 @@
           <a:noFill/>
         </p:spPr>
         <p:txBody>
-          <a:bodyPr wrap="square" anchor="t" lIns="0" rIns="0" tIns="0" bIns="0">
+          <a:bodyPr wrap="square" lIns="0" tIns="0" rIns="0" bIns="0" anchor="t">
             <a:spAutoFit/>
           </a:bodyPr>
           <a:lstStyle/>
@@ -3905,7 +3918,7 @@
           </a:fontRef>
         </p:style>
         <p:txBody>
-          <a:bodyPr rtlCol="0" anchor="ctr" lIns="256032" tIns="91440"/>
+          <a:bodyPr lIns="256032" tIns="91440" rtlCol="0" anchor="ctr"/>
           <a:lstStyle/>
           <a:p>
             <a:pPr algn="l">
@@ -3994,6 +4007,7 @@
           <a:lstStyle/>
           <a:p>
             <a:pPr algn="ctr"/>
+            <a:endParaRPr/>
           </a:p>
         </p:txBody>
       </p:sp>
@@ -4038,7 +4052,7 @@
           </a:fontRef>
         </p:style>
         <p:txBody>
-          <a:bodyPr rtlCol="0" anchor="ctr" lIns="256032" tIns="91440"/>
+          <a:bodyPr lIns="256032" tIns="91440" rtlCol="0" anchor="ctr"/>
           <a:lstStyle/>
           <a:p>
             <a:pPr algn="l">
@@ -4127,6 +4141,7 @@
           <a:lstStyle/>
           <a:p>
             <a:pPr algn="ctr"/>
+            <a:endParaRPr/>
           </a:p>
         </p:txBody>
       </p:sp>
@@ -4171,7 +4186,7 @@
           </a:fontRef>
         </p:style>
         <p:txBody>
-          <a:bodyPr rtlCol="0" anchor="ctr" lIns="219456"/>
+          <a:bodyPr lIns="219456" rtlCol="0" anchor="ctr"/>
           <a:lstStyle/>
           <a:p>
             <a:pPr algn="l">
@@ -4260,7 +4275,7 @@
           </a:fontRef>
         </p:style>
         <p:txBody>
-          <a:bodyPr rtlCol="0" anchor="ctr" lIns="219456"/>
+          <a:bodyPr lIns="219456" rtlCol="0" anchor="ctr"/>
           <a:lstStyle/>
           <a:p>
             <a:pPr algn="l">
@@ -4349,6 +4364,7 @@
           <a:lstStyle/>
           <a:p>
             <a:pPr algn="ctr"/>
+            <a:endParaRPr/>
           </a:p>
         </p:txBody>
       </p:sp>
@@ -4393,7 +4409,7 @@
           </a:fontRef>
         </p:style>
         <p:txBody>
-          <a:bodyPr rtlCol="0" anchor="ctr" lIns="256032" tIns="91440"/>
+          <a:bodyPr lIns="256032" tIns="91440" rtlCol="0" anchor="ctr"/>
           <a:lstStyle/>
           <a:p>
             <a:pPr algn="l">
@@ -4450,7 +4466,7 @@
 </file>
 
 <file path=ppt/slides/slide3.xml><?xml version="1.0" encoding="utf-8"?>
-<p:sld xmlns:a="http://schemas.openxmlformats.org/drawingml/2006/main" xmlns:p="http://schemas.openxmlformats.org/presentationml/2006/main" xmlns:r="http://schemas.openxmlformats.org/officeDocument/2006/relationships">
+<p:sld xmlns:a="http://schemas.openxmlformats.org/drawingml/2006/main" xmlns:r="http://schemas.openxmlformats.org/officeDocument/2006/relationships" xmlns:p="http://schemas.openxmlformats.org/presentationml/2006/main">
   <p:cSld>
     <p:spTree>
       <p:nvGrpSpPr>
@@ -4458,7 +4474,14 @@
         <p:cNvGrpSpPr/>
         <p:nvPr/>
       </p:nvGrpSpPr>
-      <p:grpSpPr/>
+      <p:grpSpPr>
+        <a:xfrm>
+          <a:off x="0" y="0"/>
+          <a:ext cx="0" cy="0"/>
+          <a:chOff x="0" y="0"/>
+          <a:chExt cx="0" cy="0"/>
+        </a:xfrm>
+      </p:grpSpPr>
       <p:sp>
         <p:nvSpPr>
           <p:cNvPr id="2" name="Rectangle 1"/>
@@ -4500,6 +4523,7 @@
           <a:lstStyle/>
           <a:p>
             <a:pPr algn="ctr"/>
+            <a:endParaRPr/>
           </a:p>
         </p:txBody>
       </p:sp>
@@ -4520,7 +4544,7 @@
           <a:noFill/>
         </p:spPr>
         <p:txBody>
-          <a:bodyPr wrap="square" anchor="t" lIns="0" rIns="0" tIns="0" bIns="0">
+          <a:bodyPr wrap="square" lIns="0" tIns="0" rIns="0" bIns="0" anchor="t">
             <a:spAutoFit/>
           </a:bodyPr>
           <a:lstStyle/>
@@ -4589,6 +4613,7 @@
           <a:lstStyle/>
           <a:p>
             <a:pPr algn="ctr"/>
+            <a:endParaRPr/>
           </a:p>
         </p:txBody>
       </p:sp>
@@ -4609,7 +4634,7 @@
           <a:noFill/>
         </p:spPr>
         <p:txBody>
-          <a:bodyPr wrap="square" anchor="t" lIns="0" rIns="0" tIns="0" bIns="0">
+          <a:bodyPr wrap="square" lIns="0" tIns="0" rIns="0" bIns="0" anchor="t">
             <a:spAutoFit/>
           </a:bodyPr>
           <a:lstStyle/>
@@ -4678,7 +4703,7 @@
           </a:fontRef>
         </p:style>
         <p:txBody>
-          <a:bodyPr rtlCol="0" anchor="t" wrap="square" lIns="274320" rIns="256032" tIns="246888" bIns="182880"/>
+          <a:bodyPr wrap="square" lIns="274320" tIns="246888" rIns="256032" bIns="182880" rtlCol="0" anchor="t"/>
           <a:lstStyle/>
           <a:p>
             <a:pPr algn="l">
@@ -4900,7 +4925,7 @@
           </a:fontRef>
         </p:style>
         <p:txBody>
-          <a:bodyPr rtlCol="0" anchor="t" wrap="square" lIns="274320" rIns="256032" tIns="246888" bIns="182880"/>
+          <a:bodyPr wrap="square" lIns="274320" tIns="246888" rIns="256032" bIns="182880" rtlCol="0" anchor="t"/>
           <a:lstStyle/>
           <a:p>
             <a:pPr algn="l">
@@ -5098,7 +5123,7 @@
           <a:noFill/>
         </p:spPr>
         <p:txBody>
-          <a:bodyPr wrap="square" anchor="t" lIns="0" rIns="0" tIns="0" bIns="0">
+          <a:bodyPr wrap="square" lIns="0" tIns="0" rIns="0" bIns="0" anchor="t">
             <a:spAutoFit/>
           </a:bodyPr>
           <a:lstStyle/>
@@ -5144,7 +5169,7 @@
 </file>
 
 <file path=ppt/slides/slide4.xml><?xml version="1.0" encoding="utf-8"?>
-<p:sld xmlns:a="http://schemas.openxmlformats.org/drawingml/2006/main" xmlns:p="http://schemas.openxmlformats.org/presentationml/2006/main" xmlns:r="http://schemas.openxmlformats.org/officeDocument/2006/relationships">
+<p:sld xmlns:a="http://schemas.openxmlformats.org/drawingml/2006/main" xmlns:r="http://schemas.openxmlformats.org/officeDocument/2006/relationships" xmlns:p="http://schemas.openxmlformats.org/presentationml/2006/main">
   <p:cSld>
     <p:spTree>
       <p:nvGrpSpPr>
@@ -5152,7 +5177,14 @@
         <p:cNvGrpSpPr/>
         <p:nvPr/>
       </p:nvGrpSpPr>
-      <p:grpSpPr/>
+      <p:grpSpPr>
+        <a:xfrm>
+          <a:off x="0" y="0"/>
+          <a:ext cx="0" cy="0"/>
+          <a:chOff x="0" y="0"/>
+          <a:chExt cx="0" cy="0"/>
+        </a:xfrm>
+      </p:grpSpPr>
       <p:sp>
         <p:nvSpPr>
           <p:cNvPr id="2" name="Rectangle 1"/>
@@ -5194,6 +5226,7 @@
           <a:lstStyle/>
           <a:p>
             <a:pPr algn="ctr"/>
+            <a:endParaRPr/>
           </a:p>
         </p:txBody>
       </p:sp>
@@ -5214,7 +5247,7 @@
           <a:noFill/>
         </p:spPr>
         <p:txBody>
-          <a:bodyPr wrap="square" anchor="t" lIns="0" rIns="0" tIns="0" bIns="0">
+          <a:bodyPr wrap="square" lIns="0" tIns="0" rIns="0" bIns="0" anchor="t">
             <a:spAutoFit/>
           </a:bodyPr>
           <a:lstStyle/>
@@ -5283,6 +5316,7 @@
           <a:lstStyle/>
           <a:p>
             <a:pPr algn="ctr"/>
+            <a:endParaRPr/>
           </a:p>
         </p:txBody>
       </p:sp>
@@ -5303,7 +5337,7 @@
           <a:noFill/>
         </p:spPr>
         <p:txBody>
-          <a:bodyPr wrap="square" anchor="t" lIns="0" rIns="0" tIns="0" bIns="0">
+          <a:bodyPr wrap="square" lIns="0" tIns="0" rIns="0" bIns="0" anchor="t">
             <a:spAutoFit/>
           </a:bodyPr>
           <a:lstStyle/>
@@ -5348,7 +5382,7 @@
           <a:noFill/>
         </p:spPr>
         <p:txBody>
-          <a:bodyPr wrap="square" anchor="t" lIns="0" rIns="0" tIns="0" bIns="0">
+          <a:bodyPr wrap="square" lIns="0" tIns="0" rIns="0" bIns="0" anchor="t">
             <a:spAutoFit/>
           </a:bodyPr>
           <a:lstStyle/>
@@ -5417,7 +5451,7 @@
           </a:fontRef>
         </p:style>
         <p:txBody>
-          <a:bodyPr rtlCol="0" anchor="t" wrap="none" lIns="164592" rIns="109728" tIns="128016" bIns="91440"/>
+          <a:bodyPr wrap="none" lIns="164592" tIns="128016" rIns="109728" bIns="91440" rtlCol="0" anchor="t"/>
           <a:lstStyle/>
           <a:p>
             <a:pPr algn="l">
@@ -5660,6 +5694,7 @@
           <a:lstStyle/>
           <a:p>
             <a:pPr algn="ctr"/>
+            <a:endParaRPr/>
           </a:p>
         </p:txBody>
       </p:sp>
@@ -5680,7 +5715,7 @@
           <a:noFill/>
         </p:spPr>
         <p:txBody>
-          <a:bodyPr wrap="square" anchor="t" lIns="0" rIns="0" tIns="0" bIns="0">
+          <a:bodyPr wrap="square" lIns="0" tIns="0" rIns="0" bIns="0" anchor="t">
             <a:spAutoFit/>
           </a:bodyPr>
           <a:lstStyle/>
@@ -5749,7 +5784,7 @@
           </a:fontRef>
         </p:style>
         <p:txBody>
-          <a:bodyPr rtlCol="0" anchor="t" wrap="none" lIns="164592" rIns="109728" tIns="128016" bIns="91440"/>
+          <a:bodyPr wrap="none" lIns="164592" tIns="128016" rIns="109728" bIns="91440" rtlCol="0" anchor="t"/>
           <a:lstStyle/>
           <a:p>
             <a:pPr algn="l">
@@ -6034,7 +6069,7 @@
           <a:noFill/>
         </p:spPr>
         <p:txBody>
-          <a:bodyPr wrap="square" anchor="t" lIns="0" rIns="0" tIns="0" bIns="0">
+          <a:bodyPr wrap="square" lIns="0" tIns="0" rIns="0" bIns="0" anchor="t">
             <a:spAutoFit/>
           </a:bodyPr>
           <a:lstStyle/>
@@ -6098,7 +6133,7 @@
 </file>
 
 <file path=ppt/slides/slide5.xml><?xml version="1.0" encoding="utf-8"?>
-<p:sld xmlns:a="http://schemas.openxmlformats.org/drawingml/2006/main" xmlns:p="http://schemas.openxmlformats.org/presentationml/2006/main" xmlns:r="http://schemas.openxmlformats.org/officeDocument/2006/relationships">
+<p:sld xmlns:a="http://schemas.openxmlformats.org/drawingml/2006/main" xmlns:r="http://schemas.openxmlformats.org/officeDocument/2006/relationships" xmlns:p="http://schemas.openxmlformats.org/presentationml/2006/main">
   <p:cSld>
     <p:spTree>
       <p:nvGrpSpPr>
@@ -6106,7 +6141,14 @@
         <p:cNvGrpSpPr/>
         <p:nvPr/>
       </p:nvGrpSpPr>
-      <p:grpSpPr/>
+      <p:grpSpPr>
+        <a:xfrm>
+          <a:off x="0" y="0"/>
+          <a:ext cx="0" cy="0"/>
+          <a:chOff x="0" y="0"/>
+          <a:chExt cx="0" cy="0"/>
+        </a:xfrm>
+      </p:grpSpPr>
       <p:sp>
         <p:nvSpPr>
           <p:cNvPr id="2" name="Rectangle 1"/>
@@ -6148,6 +6190,7 @@
           <a:lstStyle/>
           <a:p>
             <a:pPr algn="ctr"/>
+            <a:endParaRPr/>
           </a:p>
         </p:txBody>
       </p:sp>
@@ -6168,7 +6211,7 @@
           <a:noFill/>
         </p:spPr>
         <p:txBody>
-          <a:bodyPr wrap="square" anchor="t" lIns="0" rIns="0" tIns="0" bIns="0">
+          <a:bodyPr wrap="square" lIns="0" tIns="0" rIns="0" bIns="0" anchor="t">
             <a:spAutoFit/>
           </a:bodyPr>
           <a:lstStyle/>
@@ -6237,6 +6280,7 @@
           <a:lstStyle/>
           <a:p>
             <a:pPr algn="ctr"/>
+            <a:endParaRPr/>
           </a:p>
         </p:txBody>
       </p:sp>
@@ -6257,7 +6301,7 @@
           <a:noFill/>
         </p:spPr>
         <p:txBody>
-          <a:bodyPr wrap="square" anchor="t" lIns="0" rIns="0" tIns="0" bIns="0">
+          <a:bodyPr wrap="square" lIns="0" tIns="0" rIns="0" bIns="0" anchor="t">
             <a:spAutoFit/>
           </a:bodyPr>
           <a:lstStyle/>
@@ -6326,7 +6370,7 @@
           </a:fontRef>
         </p:style>
         <p:txBody>
-          <a:bodyPr rtlCol="0" anchor="t" wrap="square" lIns="274320" rIns="256032" tIns="246888" bIns="182880"/>
+          <a:bodyPr wrap="square" lIns="274320" tIns="246888" rIns="256032" bIns="182880" rtlCol="0" anchor="t"/>
           <a:lstStyle/>
           <a:p>
             <a:pPr algn="l">
@@ -6570,7 +6614,7 @@
           </a:fontRef>
         </p:style>
         <p:txBody>
-          <a:bodyPr rtlCol="0" anchor="t" wrap="square" lIns="274320" rIns="256032" tIns="246888" bIns="182880"/>
+          <a:bodyPr wrap="square" lIns="274320" tIns="246888" rIns="256032" bIns="182880" rtlCol="0" anchor="t"/>
           <a:lstStyle/>
           <a:p>
             <a:pPr algn="l">
@@ -6591,7 +6635,7 @@
                 </a:solidFill>
                 <a:latin typeface="Avenir Next"/>
               </a:rPr>
-              <a:t>Native backends</a:t>
+              <a:t>Native path</a:t>
             </a:r>
           </a:p>
           <a:p>
@@ -6731,7 +6775,7 @@
               <a:t>▸  </a:t>
             </a:r>
             <a:r>
-              <a:rPr sz="1550" b="0">
+              <a:rPr sz="1550" b="1">
                 <a:solidFill>
                   <a:srgbClr val="E6EDF3"/>
                 </a:solidFill>
@@ -6790,7 +6834,7 @@
           <a:noFill/>
         </p:spPr>
         <p:txBody>
-          <a:bodyPr wrap="square" anchor="t" lIns="0" rIns="0" tIns="0" bIns="0">
+          <a:bodyPr wrap="square" lIns="0" tIns="0" rIns="0" bIns="0" anchor="t">
             <a:spAutoFit/>
           </a:bodyPr>
           <a:lstStyle/>
@@ -6836,7 +6880,7 @@
 </file>
 
 <file path=ppt/slides/slide6.xml><?xml version="1.0" encoding="utf-8"?>
-<p:sld xmlns:a="http://schemas.openxmlformats.org/drawingml/2006/main" xmlns:p="http://schemas.openxmlformats.org/presentationml/2006/main" xmlns:r="http://schemas.openxmlformats.org/officeDocument/2006/relationships">
+<p:sld xmlns:a="http://schemas.openxmlformats.org/drawingml/2006/main" xmlns:r="http://schemas.openxmlformats.org/officeDocument/2006/relationships" xmlns:p="http://schemas.openxmlformats.org/presentationml/2006/main">
   <p:cSld>
     <p:spTree>
       <p:nvGrpSpPr>
@@ -6844,7 +6888,14 @@
         <p:cNvGrpSpPr/>
         <p:nvPr/>
       </p:nvGrpSpPr>
-      <p:grpSpPr/>
+      <p:grpSpPr>
+        <a:xfrm>
+          <a:off x="0" y="0"/>
+          <a:ext cx="0" cy="0"/>
+          <a:chOff x="0" y="0"/>
+          <a:chExt cx="0" cy="0"/>
+        </a:xfrm>
+      </p:grpSpPr>
       <p:sp>
         <p:nvSpPr>
           <p:cNvPr id="2" name="Rectangle 1"/>
@@ -6886,6 +6937,7 @@
           <a:lstStyle/>
           <a:p>
             <a:pPr algn="ctr"/>
+            <a:endParaRPr/>
           </a:p>
         </p:txBody>
       </p:sp>
@@ -6906,7 +6958,7 @@
           <a:noFill/>
         </p:spPr>
         <p:txBody>
-          <a:bodyPr wrap="square" anchor="t" lIns="0" rIns="0" tIns="0" bIns="0">
+          <a:bodyPr wrap="square" lIns="0" tIns="0" rIns="0" bIns="0" anchor="t">
             <a:spAutoFit/>
           </a:bodyPr>
           <a:lstStyle/>
@@ -6975,6 +7027,7 @@
           <a:lstStyle/>
           <a:p>
             <a:pPr algn="ctr"/>
+            <a:endParaRPr/>
           </a:p>
         </p:txBody>
       </p:sp>
@@ -6995,7 +7048,7 @@
           <a:noFill/>
         </p:spPr>
         <p:txBody>
-          <a:bodyPr wrap="square" anchor="t" lIns="0" rIns="0" tIns="0" bIns="0">
+          <a:bodyPr wrap="square" lIns="0" tIns="0" rIns="0" bIns="0" anchor="t">
             <a:spAutoFit/>
           </a:bodyPr>
           <a:lstStyle/>
@@ -7086,7 +7139,7 @@
           </a:fontRef>
         </p:style>
         <p:txBody>
-          <a:bodyPr rtlCol="0" anchor="ctr" lIns="146304" tIns="54864"/>
+          <a:bodyPr lIns="146304" tIns="54864" rtlCol="0" anchor="ctr"/>
           <a:lstStyle/>
           <a:p>
             <a:pPr algn="l">
@@ -7184,7 +7237,7 @@
           </a:fontRef>
         </p:style>
         <p:txBody>
-          <a:bodyPr rtlCol="0" anchor="ctr" lIns="146304" tIns="54864"/>
+          <a:bodyPr lIns="146304" tIns="54864" rtlCol="0" anchor="ctr"/>
           <a:lstStyle/>
           <a:p>
             <a:pPr algn="l">
@@ -7282,7 +7335,7 @@
           </a:fontRef>
         </p:style>
         <p:txBody>
-          <a:bodyPr rtlCol="0" anchor="ctr" lIns="146304" tIns="54864"/>
+          <a:bodyPr lIns="146304" tIns="54864" rtlCol="0" anchor="ctr"/>
           <a:lstStyle/>
           <a:p>
             <a:pPr algn="l">
@@ -7380,7 +7433,7 @@
           </a:fontRef>
         </p:style>
         <p:txBody>
-          <a:bodyPr rtlCol="0" anchor="ctr" lIns="146304" tIns="54864"/>
+          <a:bodyPr lIns="146304" tIns="54864" rtlCol="0" anchor="ctr"/>
           <a:lstStyle/>
           <a:p>
             <a:pPr algn="l">
@@ -7478,7 +7531,7 @@
           </a:fontRef>
         </p:style>
         <p:txBody>
-          <a:bodyPr rtlCol="0" anchor="ctr" lIns="146304" tIns="54864"/>
+          <a:bodyPr lIns="146304" tIns="54864" rtlCol="0" anchor="ctr"/>
           <a:lstStyle/>
           <a:p>
             <a:pPr algn="l">
@@ -7576,7 +7629,7 @@
           </a:fontRef>
         </p:style>
         <p:txBody>
-          <a:bodyPr rtlCol="0" anchor="ctr" lIns="146304" tIns="54864"/>
+          <a:bodyPr lIns="146304" tIns="54864" rtlCol="0" anchor="ctr"/>
           <a:lstStyle/>
           <a:p>
             <a:pPr algn="l">
@@ -7674,7 +7727,7 @@
           </a:fontRef>
         </p:style>
         <p:txBody>
-          <a:bodyPr rtlCol="0" anchor="ctr" lIns="146304" tIns="54864"/>
+          <a:bodyPr lIns="146304" tIns="54864" rtlCol="0" anchor="ctr"/>
           <a:lstStyle/>
           <a:p>
             <a:pPr algn="l">
@@ -7772,7 +7825,7 @@
           </a:fontRef>
         </p:style>
         <p:txBody>
-          <a:bodyPr rtlCol="0" anchor="ctr" lIns="146304" tIns="54864"/>
+          <a:bodyPr lIns="146304" tIns="54864" rtlCol="0" anchor="ctr"/>
           <a:lstStyle/>
           <a:p>
             <a:pPr algn="l">
@@ -7870,7 +7923,7 @@
           </a:fontRef>
         </p:style>
         <p:txBody>
-          <a:bodyPr rtlCol="0" anchor="ctr" lIns="146304" tIns="54864"/>
+          <a:bodyPr lIns="146304" tIns="54864" rtlCol="0" anchor="ctr"/>
           <a:lstStyle/>
           <a:p>
             <a:pPr algn="l">
@@ -7968,7 +8021,7 @@
           </a:fontRef>
         </p:style>
         <p:txBody>
-          <a:bodyPr rtlCol="0" anchor="ctr" lIns="146304" tIns="54864"/>
+          <a:bodyPr lIns="146304" tIns="54864" rtlCol="0" anchor="ctr"/>
           <a:lstStyle/>
           <a:p>
             <a:pPr algn="l">
@@ -8066,7 +8119,7 @@
           </a:fontRef>
         </p:style>
         <p:txBody>
-          <a:bodyPr rtlCol="0" anchor="ctr" lIns="146304" tIns="54864"/>
+          <a:bodyPr lIns="146304" tIns="54864" rtlCol="0" anchor="ctr"/>
           <a:lstStyle/>
           <a:p>
             <a:pPr algn="l">
@@ -8164,7 +8217,7 @@
           </a:fontRef>
         </p:style>
         <p:txBody>
-          <a:bodyPr rtlCol="0" anchor="ctr" lIns="146304" tIns="54864"/>
+          <a:bodyPr lIns="146304" tIns="54864" rtlCol="0" anchor="ctr"/>
           <a:lstStyle/>
           <a:p>
             <a:pPr algn="l">
@@ -8262,7 +8315,7 @@
           </a:fontRef>
         </p:style>
         <p:txBody>
-          <a:bodyPr rtlCol="0" anchor="ctr" lIns="146304" tIns="54864"/>
+          <a:bodyPr lIns="146304" tIns="54864" rtlCol="0" anchor="ctr"/>
           <a:lstStyle/>
           <a:p>
             <a:pPr algn="l">
@@ -8360,7 +8413,7 @@
           </a:fontRef>
         </p:style>
         <p:txBody>
-          <a:bodyPr rtlCol="0" anchor="ctr" lIns="146304" tIns="54864"/>
+          <a:bodyPr lIns="146304" tIns="54864" rtlCol="0" anchor="ctr"/>
           <a:lstStyle/>
           <a:p>
             <a:pPr algn="l">
@@ -8458,7 +8511,7 @@
           </a:fontRef>
         </p:style>
         <p:txBody>
-          <a:bodyPr rtlCol="0" anchor="ctr" lIns="146304" tIns="54864"/>
+          <a:bodyPr lIns="146304" tIns="54864" rtlCol="0" anchor="ctr"/>
           <a:lstStyle/>
           <a:p>
             <a:pPr algn="l">
@@ -8556,7 +8609,7 @@
           </a:fontRef>
         </p:style>
         <p:txBody>
-          <a:bodyPr rtlCol="0" anchor="ctr" lIns="146304" tIns="54864"/>
+          <a:bodyPr lIns="146304" tIns="54864" rtlCol="0" anchor="ctr"/>
           <a:lstStyle/>
           <a:p>
             <a:pPr algn="l">
@@ -8630,7 +8683,7 @@
           <a:noFill/>
         </p:spPr>
         <p:txBody>
-          <a:bodyPr wrap="square" anchor="t" lIns="0" rIns="0" tIns="0" bIns="0">
+          <a:bodyPr wrap="square" lIns="0" tIns="0" rIns="0" bIns="0" anchor="t">
             <a:spAutoFit/>
           </a:bodyPr>
           <a:lstStyle/>
@@ -8662,7 +8715,7 @@
                 </a:solidFill>
                 <a:latin typeface="Avenir Next"/>
               </a:rPr>
-              <a:t> Core, Data, Input, Memory, Compression, Game.Physics2D, Game.UI</a:t>
+              <a:t> Core, Data, Input, Memory, Compress, Game.Physics2D, Game.UI</a:t>
             </a:r>
             <a:r>
               <a:rPr sz="1400" b="0">
@@ -8685,7 +8738,7 @@
 </file>
 
 <file path=ppt/slides/slide7.xml><?xml version="1.0" encoding="utf-8"?>
-<p:sld xmlns:a="http://schemas.openxmlformats.org/drawingml/2006/main" xmlns:p="http://schemas.openxmlformats.org/presentationml/2006/main" xmlns:r="http://schemas.openxmlformats.org/officeDocument/2006/relationships">
+<p:sld xmlns:a="http://schemas.openxmlformats.org/drawingml/2006/main" xmlns:r="http://schemas.openxmlformats.org/officeDocument/2006/relationships" xmlns:p="http://schemas.openxmlformats.org/presentationml/2006/main">
   <p:cSld>
     <p:spTree>
       <p:nvGrpSpPr>
@@ -8693,7 +8746,14 @@
         <p:cNvGrpSpPr/>
         <p:nvPr/>
       </p:nvGrpSpPr>
-      <p:grpSpPr/>
+      <p:grpSpPr>
+        <a:xfrm>
+          <a:off x="0" y="0"/>
+          <a:ext cx="0" cy="0"/>
+          <a:chOff x="0" y="0"/>
+          <a:chExt cx="0" cy="0"/>
+        </a:xfrm>
+      </p:grpSpPr>
       <p:sp>
         <p:nvSpPr>
           <p:cNvPr id="2" name="Rectangle 1"/>
@@ -8735,6 +8795,7 @@
           <a:lstStyle/>
           <a:p>
             <a:pPr algn="ctr"/>
+            <a:endParaRPr/>
           </a:p>
         </p:txBody>
       </p:sp>
@@ -8755,7 +8816,7 @@
           <a:noFill/>
         </p:spPr>
         <p:txBody>
-          <a:bodyPr wrap="square" anchor="t" lIns="0" rIns="0" tIns="0" bIns="0">
+          <a:bodyPr wrap="square" lIns="0" tIns="0" rIns="0" bIns="0" anchor="t">
             <a:spAutoFit/>
           </a:bodyPr>
           <a:lstStyle/>
@@ -8824,6 +8885,7 @@
           <a:lstStyle/>
           <a:p>
             <a:pPr algn="ctr"/>
+            <a:endParaRPr/>
           </a:p>
         </p:txBody>
       </p:sp>
@@ -8844,7 +8906,7 @@
           <a:noFill/>
         </p:spPr>
         <p:txBody>
-          <a:bodyPr wrap="square" anchor="t" lIns="0" rIns="0" tIns="0" bIns="0">
+          <a:bodyPr wrap="square" lIns="0" tIns="0" rIns="0" bIns="0" anchor="t">
             <a:spAutoFit/>
           </a:bodyPr>
           <a:lstStyle/>
@@ -8880,7 +8942,7 @@
         </p:nvSpPr>
         <p:spPr>
           <a:xfrm>
-            <a:off x="3535984" y="1371600"/>
+            <a:off x="3535984" y="1589322"/>
             <a:ext cx="5120640" cy="749808"/>
           </a:xfrm>
           <a:prstGeom prst="roundRect">
@@ -8913,7 +8975,7 @@
           </a:fontRef>
         </p:style>
         <p:txBody>
-          <a:bodyPr rtlCol="0" anchor="ctr" tIns="36576" bIns="36576"/>
+          <a:bodyPr tIns="36576" bIns="36576" rtlCol="0" anchor="ctr"/>
           <a:lstStyle/>
           <a:p>
             <a:pPr algn="ctr">
@@ -9002,6 +9064,7 @@
           <a:lstStyle/>
           <a:p>
             <a:pPr algn="ctr"/>
+            <a:endParaRPr/>
           </a:p>
         </p:txBody>
       </p:sp>
@@ -9046,7 +9109,7 @@
           </a:fontRef>
         </p:style>
         <p:txBody>
-          <a:bodyPr rtlCol="0" anchor="ctr" tIns="36576" bIns="36576"/>
+          <a:bodyPr tIns="36576" bIns="36576" rtlCol="0" anchor="ctr"/>
           <a:lstStyle/>
           <a:p>
             <a:pPr algn="ctr">
@@ -9135,6 +9198,7 @@
           <a:lstStyle/>
           <a:p>
             <a:pPr algn="ctr"/>
+            <a:endParaRPr/>
           </a:p>
         </p:txBody>
       </p:sp>
@@ -9179,7 +9243,7 @@
           </a:fontRef>
         </p:style>
         <p:txBody>
-          <a:bodyPr rtlCol="0" anchor="ctr" tIns="36576" bIns="36576"/>
+          <a:bodyPr tIns="36576" bIns="36576" rtlCol="0" anchor="ctr"/>
           <a:lstStyle/>
           <a:p>
             <a:pPr algn="ctr">
@@ -9268,6 +9332,7 @@
           <a:lstStyle/>
           <a:p>
             <a:pPr algn="ctr"/>
+            <a:endParaRPr/>
           </a:p>
         </p:txBody>
       </p:sp>
@@ -9312,6 +9377,7 @@
           <a:lstStyle/>
           <a:p>
             <a:pPr algn="ctr"/>
+            <a:endParaRPr/>
           </a:p>
         </p:txBody>
       </p:sp>
@@ -9356,7 +9422,7 @@
           </a:fontRef>
         </p:style>
         <p:txBody>
-          <a:bodyPr rtlCol="0" anchor="ctr" tIns="36576" bIns="36576"/>
+          <a:bodyPr tIns="36576" bIns="36576" rtlCol="0" anchor="ctr"/>
           <a:lstStyle/>
           <a:p>
             <a:pPr algn="ctr">
@@ -9445,7 +9511,7 @@
           </a:fontRef>
         </p:style>
         <p:txBody>
-          <a:bodyPr rtlCol="0" anchor="ctr" tIns="36576" bIns="36576"/>
+          <a:bodyPr tIns="36576" bIns="36576" rtlCol="0" anchor="ctr"/>
           <a:lstStyle/>
           <a:p>
             <a:pPr algn="ctr">
@@ -9534,6 +9600,7 @@
           <a:lstStyle/>
           <a:p>
             <a:pPr algn="ctr"/>
+            <a:endParaRPr/>
           </a:p>
         </p:txBody>
       </p:sp>
@@ -9578,6 +9645,7 @@
           <a:lstStyle/>
           <a:p>
             <a:pPr algn="ctr"/>
+            <a:endParaRPr/>
           </a:p>
         </p:txBody>
       </p:sp>
@@ -9622,7 +9690,7 @@
           </a:fontRef>
         </p:style>
         <p:txBody>
-          <a:bodyPr rtlCol="0" anchor="ctr" tIns="36576" bIns="36576"/>
+          <a:bodyPr tIns="36576" bIns="36576" rtlCol="0" anchor="ctr"/>
           <a:lstStyle/>
           <a:p>
             <a:pPr algn="ctr">
@@ -9679,7 +9747,7 @@
 </file>
 
 <file path=ppt/slides/slide8.xml><?xml version="1.0" encoding="utf-8"?>
-<p:sld xmlns:a="http://schemas.openxmlformats.org/drawingml/2006/main" xmlns:p="http://schemas.openxmlformats.org/presentationml/2006/main" xmlns:r="http://schemas.openxmlformats.org/officeDocument/2006/relationships">
+<p:sld xmlns:a="http://schemas.openxmlformats.org/drawingml/2006/main" xmlns:r="http://schemas.openxmlformats.org/officeDocument/2006/relationships" xmlns:p="http://schemas.openxmlformats.org/presentationml/2006/main">
   <p:cSld>
     <p:spTree>
       <p:nvGrpSpPr>
@@ -9687,7 +9755,14 @@
         <p:cNvGrpSpPr/>
         <p:nvPr/>
       </p:nvGrpSpPr>
-      <p:grpSpPr/>
+      <p:grpSpPr>
+        <a:xfrm>
+          <a:off x="0" y="0"/>
+          <a:ext cx="0" cy="0"/>
+          <a:chOff x="0" y="0"/>
+          <a:chExt cx="0" cy="0"/>
+        </a:xfrm>
+      </p:grpSpPr>
       <p:sp>
         <p:nvSpPr>
           <p:cNvPr id="2" name="Rectangle 1"/>
@@ -9729,6 +9804,7 @@
           <a:lstStyle/>
           <a:p>
             <a:pPr algn="ctr"/>
+            <a:endParaRPr/>
           </a:p>
         </p:txBody>
       </p:sp>
@@ -9749,7 +9825,7 @@
           <a:noFill/>
         </p:spPr>
         <p:txBody>
-          <a:bodyPr wrap="square" anchor="t" lIns="0" rIns="0" tIns="0" bIns="0">
+          <a:bodyPr wrap="square" lIns="0" tIns="0" rIns="0" bIns="0" anchor="t">
             <a:spAutoFit/>
           </a:bodyPr>
           <a:lstStyle/>
@@ -9818,6 +9894,7 @@
           <a:lstStyle/>
           <a:p>
             <a:pPr algn="ctr"/>
+            <a:endParaRPr/>
           </a:p>
         </p:txBody>
       </p:sp>
@@ -9838,7 +9915,7 @@
           <a:noFill/>
         </p:spPr>
         <p:txBody>
-          <a:bodyPr wrap="square" anchor="t" lIns="0" rIns="0" tIns="0" bIns="0">
+          <a:bodyPr wrap="square" lIns="0" tIns="0" rIns="0" bIns="0" anchor="t">
             <a:spAutoFit/>
           </a:bodyPr>
           <a:lstStyle/>
@@ -9883,7 +9960,7 @@
           <a:noFill/>
         </p:spPr>
         <p:txBody>
-          <a:bodyPr wrap="square" anchor="t" lIns="0" rIns="0" tIns="0" bIns="0">
+          <a:bodyPr wrap="square" lIns="0" tIns="0" rIns="0" bIns="0" anchor="t">
             <a:spAutoFit/>
           </a:bodyPr>
           <a:lstStyle/>
@@ -9952,7 +10029,7 @@
           </a:fontRef>
         </p:style>
         <p:txBody>
-          <a:bodyPr rtlCol="0" anchor="t" wrap="none" lIns="164592" rIns="109728" tIns="128016" bIns="91440"/>
+          <a:bodyPr wrap="none" lIns="164592" tIns="128016" rIns="109728" bIns="91440" rtlCol="0" anchor="t"/>
           <a:lstStyle/>
           <a:p>
             <a:pPr algn="l">
@@ -10189,7 +10266,7 @@
           <a:noFill/>
         </p:spPr>
         <p:txBody>
-          <a:bodyPr wrap="square" anchor="t" lIns="0" rIns="0" tIns="0" bIns="0">
+          <a:bodyPr wrap="square" lIns="0" tIns="0" rIns="0" bIns="0" anchor="t">
             <a:spAutoFit/>
           </a:bodyPr>
           <a:lstStyle/>
@@ -10267,7 +10344,7 @@
           </a:fontRef>
         </p:style>
         <p:txBody>
-          <a:bodyPr rtlCol="0" anchor="t" wrap="square" lIns="274320" rIns="256032" tIns="219456" bIns="182880"/>
+          <a:bodyPr wrap="square" lIns="274320" tIns="219456" rIns="256032" bIns="182880" rtlCol="0" anchor="t"/>
           <a:lstStyle/>
           <a:p>
             <a:pPr algn="l">
@@ -10520,7 +10597,7 @@
           </a:fontRef>
         </p:style>
         <p:txBody>
-          <a:bodyPr rtlCol="0" anchor="t" wrap="square" lIns="274320" rIns="256032" tIns="137160" bIns="182880"/>
+          <a:bodyPr wrap="square" lIns="274320" tIns="137160" rIns="256032" bIns="182880" rtlCol="0" anchor="t"/>
           <a:lstStyle/>
           <a:p>
             <a:pPr algn="l">
@@ -10607,7 +10684,7 @@
           <a:noFill/>
         </p:spPr>
         <p:txBody>
-          <a:bodyPr wrap="square" anchor="ctr" lIns="0" rIns="0" tIns="0" bIns="0">
+          <a:bodyPr wrap="square" lIns="0" tIns="0" rIns="0" bIns="0" anchor="ctr">
             <a:spAutoFit/>
           </a:bodyPr>
           <a:lstStyle/>

--- a/misc/presentation/Viper_Intro_Revised.pptx
+++ b/misc/presentation/Viper_Intro_Revised.pptx
@@ -6,17 +6,22 @@
   </p:sldMasterIdLst>
   <p:sldIdLst>
     <p:sldId id="256" r:id="rId7"/>
+    <p:sldId id="269" r:id="rId20"/>
+    <p:sldId id="272" r:id="rId23"/>
     <p:sldId id="257" r:id="rId8"/>
     <p:sldId id="258" r:id="rId9"/>
     <p:sldId id="259" r:id="rId10"/>
+    <p:sldId id="268" r:id="rId19"/>
     <p:sldId id="260" r:id="rId11"/>
     <p:sldId id="261" r:id="rId12"/>
     <p:sldId id="262" r:id="rId13"/>
     <p:sldId id="263" r:id="rId14"/>
     <p:sldId id="264" r:id="rId15"/>
     <p:sldId id="265" r:id="rId16"/>
+    <p:sldId id="270" r:id="rId21"/>
     <p:sldId id="266" r:id="rId17"/>
     <p:sldId id="267" r:id="rId18"/>
+    <p:sldId id="271" r:id="rId22"/>
   </p:sldIdLst>
   <p:sldSz cx="12191695" cy="6858000" type="screen4x3"/>
   <p:notesSz cx="6858000" cy="9144000"/>
@@ -3619,13 +3624,112 @@
       </p:sp>
       <p:sp>
         <p:nvSpPr>
-          <p:cNvPr id="6" name="Rounded Rectangle 5"/>
+          <p:cNvPr id="14" name="TextBox 13"/>
+          <p:cNvSpPr txBox="1"/>
+          <p:nvPr/>
+        </p:nvSpPr>
+        <p:spPr>
+          <a:xfrm>
+            <a:off x="640080" y="6144768"/>
+            <a:ext cx="10881360" cy="457200"/>
+          </a:xfrm>
+          <a:prstGeom prst="rect">
+            <a:avLst/>
+          </a:prstGeom>
+          <a:noFill/>
+        </p:spPr>
+        <p:txBody>
+          <a:bodyPr wrap="square" anchor="t" lIns="0" rIns="0" tIns="0" bIns="0">
+            <a:spAutoFit/>
+          </a:bodyPr>
+          <a:lstStyle/>
+          <a:p>
+            <a:pPr algn="l">
+              <a:lnSpc>
+                <a:spcPct val="105000"/>
+              </a:lnSpc>
+              <a:spcBef>
+                <a:spcPts val="0"/>
+              </a:spcBef>
+              <a:spcAft>
+                <a:spcPts val="0"/>
+              </a:spcAft>
+            </a:pPr>
+            <a:r>
+              <a:rPr sz="1450" b="1">
+                <a:solidFill>
+                  <a:srgbClr val="E6EDF3"/>
+                </a:solidFill>
+                <a:latin typeface="Avenir Next"/>
+              </a:rPr>
+              <a:t>Pre-Alpha, under active development</a:t>
+            </a:r>
+            <a:r>
+              <a:rPr sz="1450" b="0">
+                <a:solidFill>
+                  <a:srgbClr val="8B949E"/>
+                </a:solidFill>
+                <a:latin typeface="Avenir Next"/>
+              </a:rPr>
+              <a:t> — measures of scope, not maturity.</a:t>
+            </a:r>
+          </a:p>
+        </p:txBody>
+      </p:sp>
+      <p:sp>
+        <p:nvSpPr>
+          <p:cNvPr id="15" name="TextBox 14"/>
+          <p:cNvSpPr txBox="1"/>
+          <p:nvPr/>
+        </p:nvSpPr>
+        <p:spPr>
+          <a:xfrm>
+            <a:off x="10637215" y="420624"/>
+            <a:ext cx="914400" cy="274320"/>
+          </a:xfrm>
+          <a:prstGeom prst="rect">
+            <a:avLst/>
+          </a:prstGeom>
+          <a:noFill/>
+        </p:spPr>
+        <p:txBody>
+          <a:bodyPr wrap="square" anchor="t" lIns="0" rIns="0" tIns="0" bIns="0">
+            <a:spAutoFit/>
+          </a:bodyPr>
+          <a:lstStyle/>
+          <a:p>
+            <a:pPr algn="r">
+              <a:lnSpc>
+                <a:spcPct val="105000"/>
+              </a:lnSpc>
+              <a:spcBef>
+                <a:spcPts val="0"/>
+              </a:spcBef>
+              <a:spcAft>
+                <a:spcPts val="0"/>
+              </a:spcAft>
+            </a:pPr>
+            <a:r>
+              <a:rPr sz="1050" b="0">
+                <a:solidFill>
+                  <a:srgbClr val="8B949E"/>
+                </a:solidFill>
+                <a:latin typeface="Avenir Next"/>
+              </a:rPr>
+              <a:t>13 / 17</a:t>
+            </a:r>
+          </a:p>
+        </p:txBody>
+      </p:sp>
+      <p:sp>
+        <p:nvSpPr>
+          <p:cNvPr id="60" name="Stat 60"/>
           <p:cNvSpPr/>
           <p:nvPr/>
         </p:nvSpPr>
         <p:spPr>
           <a:xfrm>
-            <a:off x="640080" y="2468880"/>
+            <a:off x="640080" y="3000000"/>
             <a:ext cx="2576322" cy="1463040"/>
           </a:xfrm>
           <a:prstGeom prst="roundRect">
@@ -3658,22 +3762,22 @@
           </a:fontRef>
         </p:style>
         <p:txBody>
-          <a:bodyPr rtlCol="0" anchor="ctr" wrap="square" lIns="201168" tIns="128016" rIns="146304"/>
-          <a:lstStyle/>
-          <a:p>
-            <a:pPr algn="l">
-              <a:lnSpc>
-                <a:spcPct val="105000"/>
-              </a:lnSpc>
-              <a:spcBef>
-                <a:spcPts val="0"/>
-              </a:spcBef>
-              <a:spcAft>
-                <a:spcPts val="300"/>
-              </a:spcAft>
-            </a:pPr>
-            <a:r>
-              <a:rPr sz="4000" b="1">
+          <a:bodyPr rtlCol="0" anchor="ctr" wrap="square" lIns="146304" tIns="128016" rIns="146304" bIns="91440"/>
+          <a:lstStyle/>
+          <a:p>
+            <a:pPr algn="ctr">
+              <a:lnSpc>
+                <a:spcPct val="100000"/>
+              </a:lnSpc>
+              <a:spcBef>
+                <a:spcPts val="0"/>
+              </a:spcBef>
+              <a:spcAft>
+                <a:spcPts val="400"/>
+              </a:spcAft>
+            </a:pPr>
+            <a:r>
+              <a:rPr sz="3600" b="1">
                 <a:solidFill>
                   <a:srgbClr val="3FB950"/>
                 </a:solidFill>
@@ -3683,9 +3787,9 @@
             </a:r>
           </a:p>
           <a:p>
-            <a:pPr algn="l">
-              <a:lnSpc>
-                <a:spcPct val="110000"/>
+            <a:pPr algn="ctr">
+              <a:lnSpc>
+                <a:spcPct val="108000"/>
               </a:lnSpc>
               <a:spcBef>
                 <a:spcPts val="0"/>
@@ -3701,20 +3805,20 @@
                 </a:solidFill>
                 <a:latin typeface="Avenir Next"/>
               </a:rPr>
-              <a:t>lines of production code</a:t>
-            </a:r>
-          </a:p>
-        </p:txBody>
-      </p:sp>
-      <p:sp>
-        <p:nvSpPr>
-          <p:cNvPr id="7" name="Rounded Rectangle 6"/>
+              <a:t>lines of code</a:t>
+            </a:r>
+          </a:p>
+        </p:txBody>
+      </p:sp>
+      <p:sp>
+        <p:nvSpPr>
+          <p:cNvPr id="61" name="Stat 61"/>
           <p:cNvSpPr/>
           <p:nvPr/>
         </p:nvSpPr>
         <p:spPr>
           <a:xfrm>
-            <a:off x="3417570" y="2468880"/>
+            <a:off x="3417570" y="3000000"/>
             <a:ext cx="2576322" cy="1463040"/>
           </a:xfrm>
           <a:prstGeom prst="roundRect">
@@ -3747,34 +3851,34 @@
           </a:fontRef>
         </p:style>
         <p:txBody>
-          <a:bodyPr rtlCol="0" anchor="ctr" wrap="square" lIns="201168" tIns="128016" rIns="146304"/>
-          <a:lstStyle/>
-          <a:p>
-            <a:pPr algn="l">
-              <a:lnSpc>
-                <a:spcPct val="105000"/>
-              </a:lnSpc>
-              <a:spcBef>
-                <a:spcPts val="0"/>
-              </a:spcBef>
-              <a:spcAft>
-                <a:spcPts val="300"/>
-              </a:spcAft>
-            </a:pPr>
-            <a:r>
-              <a:rPr sz="4000" b="1">
+          <a:bodyPr rtlCol="0" anchor="ctr" wrap="square" lIns="146304" tIns="128016" rIns="146304" bIns="91440"/>
+          <a:lstStyle/>
+          <a:p>
+            <a:pPr algn="ctr">
+              <a:lnSpc>
+                <a:spcPct val="100000"/>
+              </a:lnSpc>
+              <a:spcBef>
+                <a:spcPts val="0"/>
+              </a:spcBef>
+              <a:spcAft>
+                <a:spcPts val="400"/>
+              </a:spcAft>
+            </a:pPr>
+            <a:r>
+              <a:rPr sz="3600" b="1">
                 <a:solidFill>
                   <a:srgbClr val="3FB950"/>
                 </a:solidFill>
                 <a:latin typeface="Avenir Next"/>
               </a:rPr>
-              <a:t>~547</a:t>
-            </a:r>
-          </a:p>
-          <a:p>
-            <a:pPr algn="l">
-              <a:lnSpc>
-                <a:spcPct val="110000"/>
+              <a:t>1,700+</a:t>
+            </a:r>
+          </a:p>
+          <a:p>
+            <a:pPr algn="ctr">
+              <a:lnSpc>
+                <a:spcPct val="108000"/>
               </a:lnSpc>
               <a:spcBef>
                 <a:spcPts val="0"/>
@@ -3790,20 +3894,20 @@
                 </a:solidFill>
                 <a:latin typeface="Avenir Next"/>
               </a:rPr>
-              <a:t>test files</a:t>
-            </a:r>
-          </a:p>
-        </p:txBody>
-      </p:sp>
-      <p:sp>
-        <p:nvSpPr>
-          <p:cNvPr id="8" name="Rounded Rectangle 7"/>
+              <a:t>tests</a:t>
+            </a:r>
+          </a:p>
+        </p:txBody>
+      </p:sp>
+      <p:sp>
+        <p:nvSpPr>
+          <p:cNvPr id="62" name="Stat 62"/>
           <p:cNvSpPr/>
           <p:nvPr/>
         </p:nvSpPr>
         <p:spPr>
           <a:xfrm>
-            <a:off x="6195060" y="2468880"/>
+            <a:off x="6195060" y="3000000"/>
             <a:ext cx="2576322" cy="1463040"/>
           </a:xfrm>
           <a:prstGeom prst="roundRect">
@@ -3836,22 +3940,22 @@
           </a:fontRef>
         </p:style>
         <p:txBody>
-          <a:bodyPr rtlCol="0" anchor="ctr" wrap="square" lIns="201168" tIns="128016" rIns="146304"/>
-          <a:lstStyle/>
-          <a:p>
-            <a:pPr algn="l">
-              <a:lnSpc>
-                <a:spcPct val="105000"/>
-              </a:lnSpc>
-              <a:spcBef>
-                <a:spcPts val="0"/>
-              </a:spcBef>
-              <a:spcAft>
-                <a:spcPts val="300"/>
-              </a:spcAft>
-            </a:pPr>
-            <a:r>
-              <a:rPr sz="4000" b="1">
+          <a:bodyPr rtlCol="0" anchor="ctr" wrap="square" lIns="146304" tIns="128016" rIns="146304" bIns="91440"/>
+          <a:lstStyle/>
+          <a:p>
+            <a:pPr algn="ctr">
+              <a:lnSpc>
+                <a:spcPct val="100000"/>
+              </a:lnSpc>
+              <a:spcBef>
+                <a:spcPts val="0"/>
+              </a:spcBef>
+              <a:spcAft>
+                <a:spcPts val="400"/>
+              </a:spcAft>
+            </a:pPr>
+            <a:r>
+              <a:rPr sz="3600" b="1">
                 <a:solidFill>
                   <a:srgbClr val="3FB950"/>
                 </a:solidFill>
@@ -3861,9 +3965,9 @@
             </a:r>
           </a:p>
           <a:p>
-            <a:pPr algn="l">
-              <a:lnSpc>
-                <a:spcPct val="110000"/>
+            <a:pPr algn="ctr">
+              <a:lnSpc>
+                <a:spcPct val="108000"/>
               </a:lnSpc>
               <a:spcBef>
                 <a:spcPts val="0"/>
@@ -3879,20 +3983,20 @@
                 </a:solidFill>
                 <a:latin typeface="Avenir Next"/>
               </a:rPr>
-              <a:t>runtime classes · 22 modules</a:t>
-            </a:r>
-          </a:p>
-        </p:txBody>
-      </p:sp>
-      <p:sp>
-        <p:nvSpPr>
-          <p:cNvPr id="9" name="Rounded Rectangle 8"/>
+              <a:t>runtime classes</a:t>
+            </a:r>
+          </a:p>
+        </p:txBody>
+      </p:sp>
+      <p:sp>
+        <p:nvSpPr>
+          <p:cNvPr id="63" name="Stat 63"/>
           <p:cNvSpPr/>
           <p:nvPr/>
         </p:nvSpPr>
         <p:spPr>
           <a:xfrm>
-            <a:off x="8972550" y="2468880"/>
+            <a:off x="8972550" y="3000000"/>
             <a:ext cx="2576322" cy="1463040"/>
           </a:xfrm>
           <a:prstGeom prst="roundRect">
@@ -3925,34 +4029,34 @@
           </a:fontRef>
         </p:style>
         <p:txBody>
-          <a:bodyPr rtlCol="0" anchor="ctr" wrap="square" lIns="201168" tIns="128016" rIns="146304"/>
-          <a:lstStyle/>
-          <a:p>
-            <a:pPr algn="l">
-              <a:lnSpc>
-                <a:spcPct val="105000"/>
-              </a:lnSpc>
-              <a:spcBef>
-                <a:spcPts val="0"/>
-              </a:spcBef>
-              <a:spcAft>
-                <a:spcPts val="300"/>
-              </a:spcAft>
-            </a:pPr>
-            <a:r>
-              <a:rPr sz="4000" b="1">
+          <a:bodyPr rtlCol="0" anchor="ctr" wrap="square" lIns="146304" tIns="128016" rIns="146304" bIns="91440"/>
+          <a:lstStyle/>
+          <a:p>
+            <a:pPr algn="ctr">
+              <a:lnSpc>
+                <a:spcPct val="100000"/>
+              </a:lnSpc>
+              <a:spcBef>
+                <a:spcPts val="0"/>
+              </a:spcBef>
+              <a:spcAft>
+                <a:spcPts val="400"/>
+              </a:spcAft>
+            </a:pPr>
+            <a:r>
+              <a:rPr sz="3600" b="1">
                 <a:solidFill>
                   <a:srgbClr val="3FB950"/>
                 </a:solidFill>
                 <a:latin typeface="Avenir Next"/>
               </a:rPr>
-              <a:t>24</a:t>
-            </a:r>
-          </a:p>
-          <a:p>
-            <a:pPr algn="l">
-              <a:lnSpc>
-                <a:spcPct val="110000"/>
+              <a:t>23</a:t>
+            </a:r>
+          </a:p>
+          <a:p>
+            <a:pPr algn="ctr">
+              <a:lnSpc>
+                <a:spcPct val="108000"/>
               </a:lnSpc>
               <a:spcBef>
                 <a:spcPts val="0"/>
@@ -3968,462 +4072,7 @@
                 </a:solidFill>
                 <a:latin typeface="Avenir Next"/>
               </a:rPr>
-              <a:t>IL optimizer passes</a:t>
-            </a:r>
-          </a:p>
-        </p:txBody>
-      </p:sp>
-      <p:sp>
-        <p:nvSpPr>
-          <p:cNvPr id="10" name="Rounded Rectangle 9"/>
-          <p:cNvSpPr/>
-          <p:nvPr/>
-        </p:nvSpPr>
-        <p:spPr>
-          <a:xfrm>
-            <a:off x="640080" y="4151376"/>
-            <a:ext cx="2576322" cy="1463040"/>
-          </a:xfrm>
-          <a:prstGeom prst="roundRect">
-            <a:avLst>
-              <a:gd name="adj" fmla="val 6874"/>
-            </a:avLst>
-          </a:prstGeom>
-          <a:solidFill>
-            <a:srgbClr val="161B22"/>
-          </a:solidFill>
-          <a:ln w="12700">
-            <a:solidFill>
-              <a:srgbClr val="30363D"/>
-            </a:solidFill>
-          </a:ln>
-          <a:effectLst/>
-        </p:spPr>
-        <p:style>
-          <a:lnRef idx="1">
-            <a:schemeClr val="accent1"/>
-          </a:lnRef>
-          <a:fillRef idx="3">
-            <a:schemeClr val="accent1"/>
-          </a:fillRef>
-          <a:effectRef idx="2">
-            <a:schemeClr val="accent1"/>
-          </a:effectRef>
-          <a:fontRef idx="minor">
-            <a:schemeClr val="lt1"/>
-          </a:fontRef>
-        </p:style>
-        <p:txBody>
-          <a:bodyPr rtlCol="0" anchor="ctr" wrap="square" lIns="201168" tIns="128016" rIns="146304"/>
-          <a:lstStyle/>
-          <a:p>
-            <a:pPr algn="l">
-              <a:lnSpc>
-                <a:spcPct val="105000"/>
-              </a:lnSpc>
-              <a:spcBef>
-                <a:spcPts val="0"/>
-              </a:spcBef>
-              <a:spcAft>
-                <a:spcPts val="300"/>
-              </a:spcAft>
-            </a:pPr>
-            <a:r>
-              <a:rPr sz="4000" b="1">
-                <a:solidFill>
-                  <a:srgbClr val="3FB950"/>
-                </a:solidFill>
-                <a:latin typeface="Avenir Next"/>
-              </a:rPr>
-              <a:t>2</a:t>
-            </a:r>
-          </a:p>
-          <a:p>
-            <a:pPr algn="l">
-              <a:lnSpc>
-                <a:spcPct val="110000"/>
-              </a:lnSpc>
-              <a:spcBef>
-                <a:spcPts val="0"/>
-              </a:spcBef>
-              <a:spcAft>
-                <a:spcPts val="0"/>
-              </a:spcAft>
-            </a:pPr>
-            <a:r>
-              <a:rPr sz="1300" b="0">
-                <a:solidFill>
-                  <a:srgbClr val="8B949E"/>
-                </a:solidFill>
-                <a:latin typeface="Avenir Next"/>
-              </a:rPr>
-              <a:t>native backends · x86-64 · ARM64</a:t>
-            </a:r>
-          </a:p>
-        </p:txBody>
-      </p:sp>
-      <p:sp>
-        <p:nvSpPr>
-          <p:cNvPr id="11" name="Rounded Rectangle 10"/>
-          <p:cNvSpPr/>
-          <p:nvPr/>
-        </p:nvSpPr>
-        <p:spPr>
-          <a:xfrm>
-            <a:off x="3417570" y="4151376"/>
-            <a:ext cx="2576322" cy="1463040"/>
-          </a:xfrm>
-          <a:prstGeom prst="roundRect">
-            <a:avLst>
-              <a:gd name="adj" fmla="val 6874"/>
-            </a:avLst>
-          </a:prstGeom>
-          <a:solidFill>
-            <a:srgbClr val="161B22"/>
-          </a:solidFill>
-          <a:ln w="12700">
-            <a:solidFill>
-              <a:srgbClr val="30363D"/>
-            </a:solidFill>
-          </a:ln>
-          <a:effectLst/>
-        </p:spPr>
-        <p:style>
-          <a:lnRef idx="1">
-            <a:schemeClr val="accent1"/>
-          </a:lnRef>
-          <a:fillRef idx="3">
-            <a:schemeClr val="accent1"/>
-          </a:fillRef>
-          <a:effectRef idx="2">
-            <a:schemeClr val="accent1"/>
-          </a:effectRef>
-          <a:fontRef idx="minor">
-            <a:schemeClr val="lt1"/>
-          </a:fontRef>
-        </p:style>
-        <p:txBody>
-          <a:bodyPr rtlCol="0" anchor="ctr" wrap="square" lIns="201168" tIns="128016" rIns="146304"/>
-          <a:lstStyle/>
-          <a:p>
-            <a:pPr algn="l">
-              <a:lnSpc>
-                <a:spcPct val="105000"/>
-              </a:lnSpc>
-              <a:spcBef>
-                <a:spcPts val="0"/>
-              </a:spcBef>
-              <a:spcAft>
-                <a:spcPts val="300"/>
-              </a:spcAft>
-            </a:pPr>
-            <a:r>
-              <a:rPr sz="4000" b="1">
-                <a:solidFill>
-                  <a:srgbClr val="3FB950"/>
-                </a:solidFill>
-                <a:latin typeface="Avenir Next"/>
-              </a:rPr>
-              <a:t>3</a:t>
-            </a:r>
-          </a:p>
-          <a:p>
-            <a:pPr algn="l">
-              <a:lnSpc>
-                <a:spcPct val="110000"/>
-              </a:lnSpc>
-              <a:spcBef>
-                <a:spcPts val="0"/>
-              </a:spcBef>
-              <a:spcAft>
-                <a:spcPts val="0"/>
-              </a:spcAft>
-            </a:pPr>
-            <a:r>
-              <a:rPr sz="1300" b="0">
-                <a:solidFill>
-                  <a:srgbClr val="8B949E"/>
-                </a:solidFill>
-                <a:latin typeface="Avenir Next"/>
-              </a:rPr>
-              <a:t>object formats · ELF · Mach-O · PE</a:t>
-            </a:r>
-          </a:p>
-        </p:txBody>
-      </p:sp>
-      <p:sp>
-        <p:nvSpPr>
-          <p:cNvPr id="12" name="Rounded Rectangle 11"/>
-          <p:cNvSpPr/>
-          <p:nvPr/>
-        </p:nvSpPr>
-        <p:spPr>
-          <a:xfrm>
-            <a:off x="6195060" y="4151376"/>
-            <a:ext cx="2576322" cy="1463040"/>
-          </a:xfrm>
-          <a:prstGeom prst="roundRect">
-            <a:avLst>
-              <a:gd name="adj" fmla="val 6874"/>
-            </a:avLst>
-          </a:prstGeom>
-          <a:solidFill>
-            <a:srgbClr val="161B22"/>
-          </a:solidFill>
-          <a:ln w="12700">
-            <a:solidFill>
-              <a:srgbClr val="30363D"/>
-            </a:solidFill>
-          </a:ln>
-          <a:effectLst/>
-        </p:spPr>
-        <p:style>
-          <a:lnRef idx="1">
-            <a:schemeClr val="accent1"/>
-          </a:lnRef>
-          <a:fillRef idx="3">
-            <a:schemeClr val="accent1"/>
-          </a:fillRef>
-          <a:effectRef idx="2">
-            <a:schemeClr val="accent1"/>
-          </a:effectRef>
-          <a:fontRef idx="minor">
-            <a:schemeClr val="lt1"/>
-          </a:fontRef>
-        </p:style>
-        <p:txBody>
-          <a:bodyPr rtlCol="0" anchor="ctr" wrap="square" lIns="201168" tIns="128016" rIns="146304"/>
-          <a:lstStyle/>
-          <a:p>
-            <a:pPr algn="l">
-              <a:lnSpc>
-                <a:spcPct val="105000"/>
-              </a:lnSpc>
-              <a:spcBef>
-                <a:spcPts val="0"/>
-              </a:spcBef>
-              <a:spcAft>
-                <a:spcPts val="300"/>
-              </a:spcAft>
-            </a:pPr>
-            <a:r>
-              <a:rPr sz="4000" b="1">
-                <a:solidFill>
-                  <a:srgbClr val="3FB950"/>
-                </a:solidFill>
-                <a:latin typeface="Avenir Next"/>
-              </a:rPr>
-              <a:t>~18</a:t>
-            </a:r>
-          </a:p>
-          <a:p>
-            <a:pPr algn="l">
-              <a:lnSpc>
-                <a:spcPct val="110000"/>
-              </a:lnSpc>
-              <a:spcBef>
-                <a:spcPts val="0"/>
-              </a:spcBef>
-              <a:spcAft>
-                <a:spcPts val="0"/>
-              </a:spcAft>
-            </a:pPr>
-            <a:r>
-              <a:rPr sz="1300" b="0">
-                <a:solidFill>
-                  <a:srgbClr val="8B949E"/>
-                </a:solidFill>
-                <a:latin typeface="Avenir Next"/>
-              </a:rPr>
-              <a:t>fuzz harnesses</a:t>
-            </a:r>
-          </a:p>
-        </p:txBody>
-      </p:sp>
-      <p:sp>
-        <p:nvSpPr>
-          <p:cNvPr id="13" name="Rounded Rectangle 12"/>
-          <p:cNvSpPr/>
-          <p:nvPr/>
-        </p:nvSpPr>
-        <p:spPr>
-          <a:xfrm>
-            <a:off x="8972550" y="4151376"/>
-            <a:ext cx="2576322" cy="1463040"/>
-          </a:xfrm>
-          <a:prstGeom prst="roundRect">
-            <a:avLst>
-              <a:gd name="adj" fmla="val 6874"/>
-            </a:avLst>
-          </a:prstGeom>
-          <a:solidFill>
-            <a:srgbClr val="161B22"/>
-          </a:solidFill>
-          <a:ln w="12700">
-            <a:solidFill>
-              <a:srgbClr val="30363D"/>
-            </a:solidFill>
-          </a:ln>
-          <a:effectLst/>
-        </p:spPr>
-        <p:style>
-          <a:lnRef idx="1">
-            <a:schemeClr val="accent1"/>
-          </a:lnRef>
-          <a:fillRef idx="3">
-            <a:schemeClr val="accent1"/>
-          </a:fillRef>
-          <a:effectRef idx="2">
-            <a:schemeClr val="accent1"/>
-          </a:effectRef>
-          <a:fontRef idx="minor">
-            <a:schemeClr val="lt1"/>
-          </a:fontRef>
-        </p:style>
-        <p:txBody>
-          <a:bodyPr rtlCol="0" anchor="ctr" wrap="square" lIns="201168" tIns="128016" rIns="146304"/>
-          <a:lstStyle/>
-          <a:p>
-            <a:pPr algn="l">
-              <a:lnSpc>
-                <a:spcPct val="105000"/>
-              </a:lnSpc>
-              <a:spcBef>
-                <a:spcPts val="0"/>
-              </a:spcBef>
-              <a:spcAft>
-                <a:spcPts val="300"/>
-              </a:spcAft>
-            </a:pPr>
-            <a:r>
-              <a:rPr sz="4000" b="1">
-                <a:solidFill>
-                  <a:srgbClr val="3FB950"/>
-                </a:solidFill>
-                <a:latin typeface="Avenir Next"/>
-              </a:rPr>
-              <a:t>23</a:t>
-            </a:r>
-          </a:p>
-          <a:p>
-            <a:pPr algn="l">
-              <a:lnSpc>
-                <a:spcPct val="110000"/>
-              </a:lnSpc>
-              <a:spcBef>
-                <a:spcPts val="0"/>
-              </a:spcBef>
-              <a:spcAft>
-                <a:spcPts val="0"/>
-              </a:spcAft>
-            </a:pPr>
-            <a:r>
-              <a:rPr sz="1300" b="0">
-                <a:solidFill>
-                  <a:srgbClr val="8B949E"/>
-                </a:solidFill>
-                <a:latin typeface="Avenir Next"/>
-              </a:rPr>
-              <a:t>example apps &amp; games</a:t>
-            </a:r>
-          </a:p>
-        </p:txBody>
-      </p:sp>
-      <p:sp>
-        <p:nvSpPr>
-          <p:cNvPr id="14" name="TextBox 13"/>
-          <p:cNvSpPr txBox="1"/>
-          <p:nvPr/>
-        </p:nvSpPr>
-        <p:spPr>
-          <a:xfrm>
-            <a:off x="640080" y="6144768"/>
-            <a:ext cx="10881360" cy="457200"/>
-          </a:xfrm>
-          <a:prstGeom prst="rect">
-            <a:avLst/>
-          </a:prstGeom>
-          <a:noFill/>
-        </p:spPr>
-        <p:txBody>
-          <a:bodyPr wrap="square" anchor="t" lIns="0" rIns="0" tIns="0" bIns="0">
-            <a:spAutoFit/>
-          </a:bodyPr>
-          <a:lstStyle/>
-          <a:p>
-            <a:pPr algn="l">
-              <a:lnSpc>
-                <a:spcPct val="105000"/>
-              </a:lnSpc>
-              <a:spcBef>
-                <a:spcPts val="0"/>
-              </a:spcBef>
-              <a:spcAft>
-                <a:spcPts val="0"/>
-              </a:spcAft>
-            </a:pPr>
-            <a:r>
-              <a:rPr sz="1450" b="1">
-                <a:solidFill>
-                  <a:srgbClr val="E6EDF3"/>
-                </a:solidFill>
-                <a:latin typeface="Avenir Next"/>
-              </a:rPr>
-              <a:t>Pre-Alpha, under active development</a:t>
-            </a:r>
-            <a:r>
-              <a:rPr sz="1450" b="0">
-                <a:solidFill>
-                  <a:srgbClr val="8B949E"/>
-                </a:solidFill>
-                <a:latin typeface="Avenir Next"/>
-              </a:rPr>
-              <a:t> — measures of scope, not maturity.</a:t>
-            </a:r>
-          </a:p>
-        </p:txBody>
-      </p:sp>
-      <p:sp>
-        <p:nvSpPr>
-          <p:cNvPr id="15" name="TextBox 14"/>
-          <p:cNvSpPr txBox="1"/>
-          <p:nvPr/>
-        </p:nvSpPr>
-        <p:spPr>
-          <a:xfrm>
-            <a:off x="10637215" y="420624"/>
-            <a:ext cx="914400" cy="274320"/>
-          </a:xfrm>
-          <a:prstGeom prst="rect">
-            <a:avLst/>
-          </a:prstGeom>
-          <a:noFill/>
-        </p:spPr>
-        <p:txBody>
-          <a:bodyPr wrap="square" anchor="t" lIns="0" rIns="0" tIns="0" bIns="0">
-            <a:spAutoFit/>
-          </a:bodyPr>
-          <a:lstStyle/>
-          <a:p>
-            <a:pPr algn="r">
-              <a:lnSpc>
-                <a:spcPct val="105000"/>
-              </a:lnSpc>
-              <a:spcBef>
-                <a:spcPts val="0"/>
-              </a:spcBef>
-              <a:spcAft>
-                <a:spcPts val="0"/>
-              </a:spcAft>
-            </a:pPr>
-            <a:r>
-              <a:rPr sz="1050" b="0">
-                <a:solidFill>
-                  <a:srgbClr val="8B949E"/>
-                </a:solidFill>
-                <a:latin typeface="Avenir Next"/>
-              </a:rPr>
-              <a:t>10 / 12</a:t>
+              <a:t>apps &amp; games</a:t>
             </a:r>
           </a:p>
         </p:txBody>
@@ -4619,7 +4268,7 @@
                 </a:solidFill>
                 <a:latin typeface="Avenir Next"/>
               </a:rPr>
-              <a:t>Real games and apps, in pure Zia</a:t>
+              <a:t>Larger demos, all in pure Zia</a:t>
             </a:r>
           </a:p>
           <a:p>
@@ -4752,7 +4401,7 @@
                 </a:solidFill>
                 <a:latin typeface="Avenir Next"/>
               </a:rPr>
-              <a:t>Metroidvania — bosses, abilities, saves</a:t>
+              <a:t>Metroidvania-style demo — bosses, abilities, saves</a:t>
             </a:r>
           </a:p>
         </p:txBody>
@@ -4863,7 +4512,7 @@
                 </a:solidFill>
                 <a:latin typeface="Avenir Next"/>
               </a:rPr>
-              <a:t>SQL database engine + client</a:t>
+              <a:t>Experimental SQL database engine + client</a:t>
             </a:r>
           </a:p>
         </p:txBody>
@@ -5529,7 +5178,7 @@
                 </a:solidFill>
                 <a:latin typeface="Avenir Next"/>
               </a:rPr>
-              <a:t>6 apps · 17 games · demos</a:t>
+              <a:t>6 apps · 17 games/demos</a:t>
             </a:r>
           </a:p>
         </p:txBody>
@@ -5583,7 +5232,7 @@
                 </a:solidFill>
                 <a:latin typeface="Avenir Next"/>
               </a:rPr>
-              <a:t> — every demo ships as a native binary on all three platforms.</a:t>
+              <a:t> — demos build through the native toolchain for the supported desktop platforms.</a:t>
             </a:r>
           </a:p>
         </p:txBody>
@@ -5628,7 +5277,7 @@
                 </a:solidFill>
                 <a:latin typeface="Avenir Next"/>
               </a:rPr>
-              <a:t>11 / 12</a:t>
+              <a:t>15 / 17</a:t>
             </a:r>
           </a:p>
         </p:txBody>
@@ -5932,11 +5581,47 @@
             <a:r>
               <a:rPr sz="1200" b="0">
                 <a:solidFill>
-                  <a:srgbClr val="E6EDF3"/>
-                </a:solidFill>
-                <a:latin typeface="Menlo"/>
-              </a:rPr>
-              <a:t>git clone https://github.com/splanck/viper</a:t>
+                  <a:srgbClr val="D2A8FF"/>
+                </a:solidFill>
+                <a:latin typeface="Menlo"/>
+              </a:rPr>
+              <a:t>git</a:t>
+            </a:r>
+            <a:r>
+              <a:rPr sz="1200" b="0">
+                <a:solidFill>
+                  <a:srgbClr val="E6EDF3"/>
+                </a:solidFill>
+                <a:latin typeface="Menlo"/>
+              </a:rPr>
+              <a:t> </a:t>
+            </a:r>
+            <a:r>
+              <a:rPr sz="1200" b="0">
+                <a:solidFill>
+                  <a:srgbClr val="D2A8FF"/>
+                </a:solidFill>
+                <a:latin typeface="Menlo"/>
+              </a:rPr>
+              <a:t>clone</a:t>
+            </a:r>
+            <a:r>
+              <a:rPr sz="1200" b="0">
+                <a:solidFill>
+                  <a:srgbClr val="E6EDF3"/>
+                </a:solidFill>
+                <a:latin typeface="Menlo"/>
+              </a:rPr>
+              <a:t> </a:t>
+            </a:r>
+            <a:r>
+              <a:rPr sz="1200" b="0">
+                <a:solidFill>
+                  <a:srgbClr val="A5D6FF"/>
+                </a:solidFill>
+                <a:latin typeface="Menlo"/>
+              </a:rPr>
+              <a:t>https://github.com/splanck/viper</a:t>
             </a:r>
           </a:p>
           <a:p>
@@ -5954,11 +5639,29 @@
             <a:r>
               <a:rPr sz="1200" b="0">
                 <a:solidFill>
-                  <a:srgbClr val="E6EDF3"/>
-                </a:solidFill>
-                <a:latin typeface="Menlo"/>
-              </a:rPr>
-              <a:t>cd viper</a:t>
+                  <a:srgbClr val="D2A8FF"/>
+                </a:solidFill>
+                <a:latin typeface="Menlo"/>
+              </a:rPr>
+              <a:t>cd</a:t>
+            </a:r>
+            <a:r>
+              <a:rPr sz="1200" b="0">
+                <a:solidFill>
+                  <a:srgbClr val="E6EDF3"/>
+                </a:solidFill>
+                <a:latin typeface="Menlo"/>
+              </a:rPr>
+              <a:t> </a:t>
+            </a:r>
+            <a:r>
+              <a:rPr sz="1200" b="0">
+                <a:solidFill>
+                  <a:srgbClr val="D2A8FF"/>
+                </a:solidFill>
+                <a:latin typeface="Menlo"/>
+              </a:rPr>
+              <a:t>viper</a:t>
             </a:r>
           </a:p>
           <a:p>
@@ -5976,15 +5679,24 @@
             <a:r>
               <a:rPr sz="1200" b="0">
                 <a:solidFill>
-                  <a:srgbClr val="E6EDF3"/>
-                </a:solidFill>
-                <a:latin typeface="Menlo"/>
-              </a:rPr>
-              <a:t>./scripts/build_viper_linux.sh    </a:t>
+                  <a:srgbClr val="A5D6FF"/>
+                </a:solidFill>
+                <a:latin typeface="Menlo"/>
+              </a:rPr>
+              <a:t>./scripts/build_viper_linux.sh</a:t>
             </a:r>
             <a:r>
               <a:rPr sz="1200" b="0">
                 <a:solidFill>
+                  <a:srgbClr val="E6EDF3"/>
+                </a:solidFill>
+                <a:latin typeface="Menlo"/>
+              </a:rPr>
+              <a:t>    </a:t>
+            </a:r>
+            <a:r>
+              <a:rPr sz="1200" b="0">
+                <a:solidFill>
                   <a:srgbClr val="6E966E"/>
                 </a:solidFill>
                 <a:latin typeface="Menlo"/>
@@ -6007,15 +5719,24 @@
             <a:r>
               <a:rPr sz="1200" b="0">
                 <a:solidFill>
-                  <a:srgbClr val="E6EDF3"/>
-                </a:solidFill>
-                <a:latin typeface="Menlo"/>
-              </a:rPr>
-              <a:t>./scripts/build_demos_linux.sh    </a:t>
+                  <a:srgbClr val="A5D6FF"/>
+                </a:solidFill>
+                <a:latin typeface="Menlo"/>
+              </a:rPr>
+              <a:t>./scripts/build_demos_linux.sh</a:t>
             </a:r>
             <a:r>
               <a:rPr sz="1200" b="0">
                 <a:solidFill>
+                  <a:srgbClr val="E6EDF3"/>
+                </a:solidFill>
+                <a:latin typeface="Menlo"/>
+              </a:rPr>
+              <a:t>    </a:t>
+            </a:r>
+            <a:r>
+              <a:rPr sz="1200" b="0">
+                <a:solidFill>
                   <a:srgbClr val="6E966E"/>
                 </a:solidFill>
                 <a:latin typeface="Menlo"/>
@@ -6060,11 +5781,47 @@
             <a:r>
               <a:rPr sz="1200" b="0">
                 <a:solidFill>
-                  <a:srgbClr val="E6EDF3"/>
-                </a:solidFill>
-                <a:latin typeface="Menlo"/>
-              </a:rPr>
-              <a:t>viper init my-app</a:t>
+                  <a:srgbClr val="D2A8FF"/>
+                </a:solidFill>
+                <a:latin typeface="Menlo"/>
+              </a:rPr>
+              <a:t>viper</a:t>
+            </a:r>
+            <a:r>
+              <a:rPr sz="1200" b="0">
+                <a:solidFill>
+                  <a:srgbClr val="E6EDF3"/>
+                </a:solidFill>
+                <a:latin typeface="Menlo"/>
+              </a:rPr>
+              <a:t> </a:t>
+            </a:r>
+            <a:r>
+              <a:rPr sz="1200" b="0">
+                <a:solidFill>
+                  <a:srgbClr val="D2A8FF"/>
+                </a:solidFill>
+                <a:latin typeface="Menlo"/>
+              </a:rPr>
+              <a:t>init</a:t>
+            </a:r>
+            <a:r>
+              <a:rPr sz="1200" b="0">
+                <a:solidFill>
+                  <a:srgbClr val="E6EDF3"/>
+                </a:solidFill>
+                <a:latin typeface="Menlo"/>
+              </a:rPr>
+              <a:t> </a:t>
+            </a:r>
+            <a:r>
+              <a:rPr sz="1200" b="0">
+                <a:solidFill>
+                  <a:srgbClr val="E6EDF3"/>
+                </a:solidFill>
+                <a:latin typeface="Menlo"/>
+              </a:rPr>
+              <a:t>my-app</a:t>
             </a:r>
           </a:p>
           <a:p>
@@ -6082,11 +5839,47 @@
             <a:r>
               <a:rPr sz="1200" b="0">
                 <a:solidFill>
-                  <a:srgbClr val="E6EDF3"/>
-                </a:solidFill>
-                <a:latin typeface="Menlo"/>
-              </a:rPr>
-              <a:t>viper run my-app</a:t>
+                  <a:srgbClr val="D2A8FF"/>
+                </a:solidFill>
+                <a:latin typeface="Menlo"/>
+              </a:rPr>
+              <a:t>viper</a:t>
+            </a:r>
+            <a:r>
+              <a:rPr sz="1200" b="0">
+                <a:solidFill>
+                  <a:srgbClr val="E6EDF3"/>
+                </a:solidFill>
+                <a:latin typeface="Menlo"/>
+              </a:rPr>
+              <a:t> </a:t>
+            </a:r>
+            <a:r>
+              <a:rPr sz="1200" b="0">
+                <a:solidFill>
+                  <a:srgbClr val="D2A8FF"/>
+                </a:solidFill>
+                <a:latin typeface="Menlo"/>
+              </a:rPr>
+              <a:t>run</a:t>
+            </a:r>
+            <a:r>
+              <a:rPr sz="1200" b="0">
+                <a:solidFill>
+                  <a:srgbClr val="E6EDF3"/>
+                </a:solidFill>
+                <a:latin typeface="Menlo"/>
+              </a:rPr>
+              <a:t> </a:t>
+            </a:r>
+            <a:r>
+              <a:rPr sz="1200" b="0">
+                <a:solidFill>
+                  <a:srgbClr val="E6EDF3"/>
+                </a:solidFill>
+                <a:latin typeface="Menlo"/>
+              </a:rPr>
+              <a:t>my-app</a:t>
             </a:r>
           </a:p>
           <a:p>
@@ -6104,11 +5897,29 @@
             <a:r>
               <a:rPr sz="1200" b="0">
                 <a:solidFill>
-                  <a:srgbClr val="E6EDF3"/>
-                </a:solidFill>
-                <a:latin typeface="Menlo"/>
-              </a:rPr>
-              <a:t>viper repl</a:t>
+                  <a:srgbClr val="D2A8FF"/>
+                </a:solidFill>
+                <a:latin typeface="Menlo"/>
+              </a:rPr>
+              <a:t>viper</a:t>
+            </a:r>
+            <a:r>
+              <a:rPr sz="1200" b="0">
+                <a:solidFill>
+                  <a:srgbClr val="E6EDF3"/>
+                </a:solidFill>
+                <a:latin typeface="Menlo"/>
+              </a:rPr>
+              <a:t> </a:t>
+            </a:r>
+            <a:r>
+              <a:rPr sz="1200" b="0">
+                <a:solidFill>
+                  <a:srgbClr val="D2A8FF"/>
+                </a:solidFill>
+                <a:latin typeface="Menlo"/>
+              </a:rPr>
+              <a:t>repl</a:t>
             </a:r>
           </a:p>
           <a:p>
@@ -6126,11 +5937,83 @@
             <a:r>
               <a:rPr sz="1200" b="0">
                 <a:solidFill>
-                  <a:srgbClr val="E6EDF3"/>
-                </a:solidFill>
-                <a:latin typeface="Menlo"/>
-              </a:rPr>
-              <a:t>viper build my-app -o my-app</a:t>
+                  <a:srgbClr val="D2A8FF"/>
+                </a:solidFill>
+                <a:latin typeface="Menlo"/>
+              </a:rPr>
+              <a:t>viper</a:t>
+            </a:r>
+            <a:r>
+              <a:rPr sz="1200" b="0">
+                <a:solidFill>
+                  <a:srgbClr val="E6EDF3"/>
+                </a:solidFill>
+                <a:latin typeface="Menlo"/>
+              </a:rPr>
+              <a:t> </a:t>
+            </a:r>
+            <a:r>
+              <a:rPr sz="1200" b="0">
+                <a:solidFill>
+                  <a:srgbClr val="D2A8FF"/>
+                </a:solidFill>
+                <a:latin typeface="Menlo"/>
+              </a:rPr>
+              <a:t>build</a:t>
+            </a:r>
+            <a:r>
+              <a:rPr sz="1200" b="0">
+                <a:solidFill>
+                  <a:srgbClr val="E6EDF3"/>
+                </a:solidFill>
+                <a:latin typeface="Menlo"/>
+              </a:rPr>
+              <a:t> </a:t>
+            </a:r>
+            <a:r>
+              <a:rPr sz="1200" b="0">
+                <a:solidFill>
+                  <a:srgbClr val="E6EDF3"/>
+                </a:solidFill>
+                <a:latin typeface="Menlo"/>
+              </a:rPr>
+              <a:t>my-app</a:t>
+            </a:r>
+            <a:r>
+              <a:rPr sz="1200" b="0">
+                <a:solidFill>
+                  <a:srgbClr val="E6EDF3"/>
+                </a:solidFill>
+                <a:latin typeface="Menlo"/>
+              </a:rPr>
+              <a:t> </a:t>
+            </a:r>
+            <a:r>
+              <a:rPr sz="1200" b="0">
+                <a:solidFill>
+                  <a:srgbClr val="79C0FF"/>
+                </a:solidFill>
+                <a:latin typeface="Menlo"/>
+              </a:rPr>
+              <a:t>-o</a:t>
+            </a:r>
+            <a:r>
+              <a:rPr sz="1200" b="0">
+                <a:solidFill>
+                  <a:srgbClr val="E6EDF3"/>
+                </a:solidFill>
+                <a:latin typeface="Menlo"/>
+              </a:rPr>
+              <a:t> </a:t>
+            </a:r>
+            <a:r>
+              <a:rPr sz="1200" b="0">
+                <a:solidFill>
+                  <a:srgbClr val="E6EDF3"/>
+                </a:solidFill>
+                <a:latin typeface="Menlo"/>
+              </a:rPr>
+              <a:t>my-app</a:t>
             </a:r>
           </a:p>
         </p:txBody>
@@ -6267,22 +6150,85 @@
               </a:spcAft>
             </a:pPr>
             <a:r>
-              <a:rPr sz="1350" b="1">
-                <a:solidFill>
-                  <a:srgbClr val="3FB950"/>
+              <a:rPr sz="1350" b="0">
+                <a:solidFill>
+                  <a:srgbClr val="D2A8FF"/>
                 </a:solidFill>
                 <a:latin typeface="Menlo"/>
               </a:rPr>
               <a:t>viper</a:t>
             </a:r>
             <a:r>
-              <a:rPr sz="1300" b="0">
-                <a:solidFill>
-                  <a:srgbClr val="8B949E"/>
-                </a:solidFill>
-                <a:latin typeface="Avenir Next"/>
-              </a:rPr>
-              <a:t>  unified driver — run/build/package</a:t>
+              <a:rPr sz="1350" b="0">
+                <a:solidFill>
+                  <a:srgbClr val="E6EDF3"/>
+                </a:solidFill>
+                <a:latin typeface="Menlo"/>
+              </a:rPr>
+              <a:t>  </a:t>
+            </a:r>
+            <a:r>
+              <a:rPr sz="1350" b="0">
+                <a:solidFill>
+                  <a:srgbClr val="E6EDF3"/>
+                </a:solidFill>
+                <a:latin typeface="Menlo"/>
+              </a:rPr>
+              <a:t>unified</a:t>
+            </a:r>
+            <a:r>
+              <a:rPr sz="1350" b="0">
+                <a:solidFill>
+                  <a:srgbClr val="E6EDF3"/>
+                </a:solidFill>
+                <a:latin typeface="Menlo"/>
+              </a:rPr>
+              <a:t> </a:t>
+            </a:r>
+            <a:r>
+              <a:rPr sz="1350" b="0">
+                <a:solidFill>
+                  <a:srgbClr val="E6EDF3"/>
+                </a:solidFill>
+                <a:latin typeface="Menlo"/>
+              </a:rPr>
+              <a:t>driver</a:t>
+            </a:r>
+            <a:r>
+              <a:rPr sz="1350" b="0">
+                <a:solidFill>
+                  <a:srgbClr val="E6EDF3"/>
+                </a:solidFill>
+                <a:latin typeface="Menlo"/>
+              </a:rPr>
+              <a:t> </a:t>
+            </a:r>
+            <a:r>
+              <a:rPr sz="1350" b="0">
+                <a:solidFill>
+                  <a:srgbClr val="E6EDF3"/>
+                </a:solidFill>
+                <a:latin typeface="Menlo"/>
+              </a:rPr>
+              <a:t>—</a:t>
+            </a:r>
+            <a:r>
+              <a:rPr sz="1350" b="0">
+                <a:solidFill>
+                  <a:srgbClr val="E6EDF3"/>
+                </a:solidFill>
+                <a:latin typeface="Menlo"/>
+              </a:rPr>
+              <a:t> </a:t>
+            </a:r>
+            <a:r>
+              <a:rPr sz="1350" b="0">
+                <a:solidFill>
+                  <a:srgbClr val="A5D6FF"/>
+                </a:solidFill>
+                <a:latin typeface="Menlo"/>
+              </a:rPr>
+              <a:t>run/build/package</a:t>
             </a:r>
           </a:p>
           <a:p>
@@ -6298,22 +6244,103 @@
               </a:spcAft>
             </a:pPr>
             <a:r>
-              <a:rPr sz="1350" b="1">
-                <a:solidFill>
-                  <a:srgbClr val="3FB950"/>
+              <a:rPr sz="1350" b="0">
+                <a:solidFill>
+                  <a:srgbClr val="D2A8FF"/>
                 </a:solidFill>
                 <a:latin typeface="Menlo"/>
               </a:rPr>
               <a:t>repl</a:t>
             </a:r>
             <a:r>
-              <a:rPr sz="1300" b="0">
-                <a:solidFill>
-                  <a:srgbClr val="8B949E"/>
-                </a:solidFill>
-                <a:latin typeface="Avenir Next"/>
-              </a:rPr>
-              <a:t>  live Zia &amp; BASIC evaluation</a:t>
+              <a:rPr sz="1350" b="0">
+                <a:solidFill>
+                  <a:srgbClr val="E6EDF3"/>
+                </a:solidFill>
+                <a:latin typeface="Menlo"/>
+              </a:rPr>
+              <a:t>  </a:t>
+            </a:r>
+            <a:r>
+              <a:rPr sz="1350" b="0">
+                <a:solidFill>
+                  <a:srgbClr val="E6EDF3"/>
+                </a:solidFill>
+                <a:latin typeface="Menlo"/>
+              </a:rPr>
+              <a:t>live</a:t>
+            </a:r>
+            <a:r>
+              <a:rPr sz="1350" b="0">
+                <a:solidFill>
+                  <a:srgbClr val="E6EDF3"/>
+                </a:solidFill>
+                <a:latin typeface="Menlo"/>
+              </a:rPr>
+              <a:t> </a:t>
+            </a:r>
+            <a:r>
+              <a:rPr sz="1350" b="0">
+                <a:solidFill>
+                  <a:srgbClr val="E6EDF3"/>
+                </a:solidFill>
+                <a:latin typeface="Menlo"/>
+              </a:rPr>
+              <a:t>Zia</a:t>
+            </a:r>
+            <a:r>
+              <a:rPr sz="1350" b="0">
+                <a:solidFill>
+                  <a:srgbClr val="E6EDF3"/>
+                </a:solidFill>
+                <a:latin typeface="Menlo"/>
+              </a:rPr>
+              <a:t> </a:t>
+            </a:r>
+            <a:r>
+              <a:rPr sz="1350" b="0">
+                <a:solidFill>
+                  <a:srgbClr val="E6EDF3"/>
+                </a:solidFill>
+                <a:latin typeface="Menlo"/>
+              </a:rPr>
+              <a:t>&amp;</a:t>
+            </a:r>
+            <a:r>
+              <a:rPr sz="1350" b="0">
+                <a:solidFill>
+                  <a:srgbClr val="E6EDF3"/>
+                </a:solidFill>
+                <a:latin typeface="Menlo"/>
+              </a:rPr>
+              <a:t> </a:t>
+            </a:r>
+            <a:r>
+              <a:rPr sz="1350" b="0">
+                <a:solidFill>
+                  <a:srgbClr val="E6EDF3"/>
+                </a:solidFill>
+                <a:latin typeface="Menlo"/>
+              </a:rPr>
+              <a:t>BASIC</a:t>
+            </a:r>
+            <a:r>
+              <a:rPr sz="1350" b="0">
+                <a:solidFill>
+                  <a:srgbClr val="E6EDF3"/>
+                </a:solidFill>
+                <a:latin typeface="Menlo"/>
+              </a:rPr>
+              <a:t> </a:t>
+            </a:r>
+            <a:r>
+              <a:rPr sz="1350" b="0">
+                <a:solidFill>
+                  <a:srgbClr val="E6EDF3"/>
+                </a:solidFill>
+                <a:latin typeface="Menlo"/>
+              </a:rPr>
+              <a:t>evaluation</a:t>
             </a:r>
           </a:p>
           <a:p>
@@ -6329,22 +6356,103 @@
               </a:spcAft>
             </a:pPr>
             <a:r>
-              <a:rPr sz="1350" b="1">
-                <a:solidFill>
-                  <a:srgbClr val="3FB950"/>
-                </a:solidFill>
-                <a:latin typeface="Menlo"/>
-              </a:rPr>
-              <a:t>viper il-opt</a:t>
-            </a:r>
-            <a:r>
-              <a:rPr sz="1300" b="0">
-                <a:solidFill>
-                  <a:srgbClr val="8B949E"/>
-                </a:solidFill>
-                <a:latin typeface="Avenir Next"/>
-              </a:rPr>
-              <a:t>  optimize IL (24 passes)</a:t>
+              <a:rPr sz="1350" b="0">
+                <a:solidFill>
+                  <a:srgbClr val="D2A8FF"/>
+                </a:solidFill>
+                <a:latin typeface="Menlo"/>
+              </a:rPr>
+              <a:t>viper</a:t>
+            </a:r>
+            <a:r>
+              <a:rPr sz="1350" b="0">
+                <a:solidFill>
+                  <a:srgbClr val="E6EDF3"/>
+                </a:solidFill>
+                <a:latin typeface="Menlo"/>
+              </a:rPr>
+              <a:t> </a:t>
+            </a:r>
+            <a:r>
+              <a:rPr sz="1350" b="0">
+                <a:solidFill>
+                  <a:srgbClr val="D2A8FF"/>
+                </a:solidFill>
+                <a:latin typeface="Menlo"/>
+              </a:rPr>
+              <a:t>il-opt</a:t>
+            </a:r>
+            <a:r>
+              <a:rPr sz="1350" b="0">
+                <a:solidFill>
+                  <a:srgbClr val="E6EDF3"/>
+                </a:solidFill>
+                <a:latin typeface="Menlo"/>
+              </a:rPr>
+              <a:t>  </a:t>
+            </a:r>
+            <a:r>
+              <a:rPr sz="1350" b="0">
+                <a:solidFill>
+                  <a:srgbClr val="E6EDF3"/>
+                </a:solidFill>
+                <a:latin typeface="Menlo"/>
+              </a:rPr>
+              <a:t>optimize</a:t>
+            </a:r>
+            <a:r>
+              <a:rPr sz="1350" b="0">
+                <a:solidFill>
+                  <a:srgbClr val="E6EDF3"/>
+                </a:solidFill>
+                <a:latin typeface="Menlo"/>
+              </a:rPr>
+              <a:t> </a:t>
+            </a:r>
+            <a:r>
+              <a:rPr sz="1350" b="0">
+                <a:solidFill>
+                  <a:srgbClr val="E6EDF3"/>
+                </a:solidFill>
+                <a:latin typeface="Menlo"/>
+              </a:rPr>
+              <a:t>IL</a:t>
+            </a:r>
+            <a:r>
+              <a:rPr sz="1350" b="0">
+                <a:solidFill>
+                  <a:srgbClr val="E6EDF3"/>
+                </a:solidFill>
+                <a:latin typeface="Menlo"/>
+              </a:rPr>
+              <a:t> </a:t>
+            </a:r>
+            <a:r>
+              <a:rPr sz="1350" b="0">
+                <a:solidFill>
+                  <a:srgbClr val="E6EDF3"/>
+                </a:solidFill>
+                <a:latin typeface="Menlo"/>
+              </a:rPr>
+              <a:t>(24</a:t>
+            </a:r>
+            <a:r>
+              <a:rPr sz="1350" b="0">
+                <a:solidFill>
+                  <a:srgbClr val="E6EDF3"/>
+                </a:solidFill>
+                <a:latin typeface="Menlo"/>
+              </a:rPr>
+              <a:t> </a:t>
+            </a:r>
+            <a:r>
+              <a:rPr sz="1350" b="0">
+                <a:solidFill>
+                  <a:srgbClr val="E6EDF3"/>
+                </a:solidFill>
+                <a:latin typeface="Menlo"/>
+              </a:rPr>
+              <a:t>passes)</a:t>
             </a:r>
           </a:p>
           <a:p>
@@ -6360,22 +6468,121 @@
               </a:spcAft>
             </a:pPr>
             <a:r>
-              <a:rPr sz="1350" b="1">
-                <a:solidFill>
-                  <a:srgbClr val="3FB950"/>
-                </a:solidFill>
-                <a:latin typeface="Menlo"/>
-              </a:rPr>
-              <a:t>il-verify · il-dis</a:t>
-            </a:r>
-            <a:r>
-              <a:rPr sz="1300" b="0">
-                <a:solidFill>
-                  <a:srgbClr val="8B949E"/>
-                </a:solidFill>
-                <a:latin typeface="Avenir Next"/>
-              </a:rPr>
-              <a:t>  verify &amp; disassemble IL</a:t>
+              <a:rPr sz="1350" b="0">
+                <a:solidFill>
+                  <a:srgbClr val="E6EDF3"/>
+                </a:solidFill>
+                <a:latin typeface="Menlo"/>
+              </a:rPr>
+              <a:t>il-verify</a:t>
+            </a:r>
+            <a:r>
+              <a:rPr sz="1350" b="0">
+                <a:solidFill>
+                  <a:srgbClr val="E6EDF3"/>
+                </a:solidFill>
+                <a:latin typeface="Menlo"/>
+              </a:rPr>
+              <a:t> </a:t>
+            </a:r>
+            <a:r>
+              <a:rPr sz="1350" b="0">
+                <a:solidFill>
+                  <a:srgbClr val="E6EDF3"/>
+                </a:solidFill>
+                <a:latin typeface="Menlo"/>
+              </a:rPr>
+              <a:t>·</a:t>
+            </a:r>
+            <a:r>
+              <a:rPr sz="1350" b="0">
+                <a:solidFill>
+                  <a:srgbClr val="E6EDF3"/>
+                </a:solidFill>
+                <a:latin typeface="Menlo"/>
+              </a:rPr>
+              <a:t> </a:t>
+            </a:r>
+            <a:r>
+              <a:rPr sz="1350" b="0">
+                <a:solidFill>
+                  <a:srgbClr val="E6EDF3"/>
+                </a:solidFill>
+                <a:latin typeface="Menlo"/>
+              </a:rPr>
+              <a:t>il-dis</a:t>
+            </a:r>
+            <a:r>
+              <a:rPr sz="1350" b="0">
+                <a:solidFill>
+                  <a:srgbClr val="E6EDF3"/>
+                </a:solidFill>
+                <a:latin typeface="Menlo"/>
+              </a:rPr>
+              <a:t>  </a:t>
+            </a:r>
+            <a:r>
+              <a:rPr sz="1350" b="0">
+                <a:solidFill>
+                  <a:srgbClr val="E6EDF3"/>
+                </a:solidFill>
+                <a:latin typeface="Menlo"/>
+              </a:rPr>
+              <a:t>verify</a:t>
+            </a:r>
+            <a:r>
+              <a:rPr sz="1350" b="0">
+                <a:solidFill>
+                  <a:srgbClr val="E6EDF3"/>
+                </a:solidFill>
+                <a:latin typeface="Menlo"/>
+              </a:rPr>
+              <a:t> </a:t>
+            </a:r>
+            <a:r>
+              <a:rPr sz="1350" b="0">
+                <a:solidFill>
+                  <a:srgbClr val="E6EDF3"/>
+                </a:solidFill>
+                <a:latin typeface="Menlo"/>
+              </a:rPr>
+              <a:t>&amp;</a:t>
+            </a:r>
+            <a:r>
+              <a:rPr sz="1350" b="0">
+                <a:solidFill>
+                  <a:srgbClr val="E6EDF3"/>
+                </a:solidFill>
+                <a:latin typeface="Menlo"/>
+              </a:rPr>
+              <a:t> </a:t>
+            </a:r>
+            <a:r>
+              <a:rPr sz="1350" b="0">
+                <a:solidFill>
+                  <a:srgbClr val="E6EDF3"/>
+                </a:solidFill>
+                <a:latin typeface="Menlo"/>
+              </a:rPr>
+              <a:t>disassemble</a:t>
+            </a:r>
+            <a:r>
+              <a:rPr sz="1350" b="0">
+                <a:solidFill>
+                  <a:srgbClr val="E6EDF3"/>
+                </a:solidFill>
+                <a:latin typeface="Menlo"/>
+              </a:rPr>
+              <a:t> </a:t>
+            </a:r>
+            <a:r>
+              <a:rPr sz="1350" b="0">
+                <a:solidFill>
+                  <a:srgbClr val="E6EDF3"/>
+                </a:solidFill>
+                <a:latin typeface="Menlo"/>
+              </a:rPr>
+              <a:t>IL</a:t>
             </a:r>
           </a:p>
           <a:p>
@@ -6391,22 +6598,103 @@
               </a:spcAft>
             </a:pPr>
             <a:r>
-              <a:rPr sz="1350" b="1">
-                <a:solidFill>
-                  <a:srgbClr val="3FB950"/>
+              <a:rPr sz="1350" b="0">
+                <a:solidFill>
+                  <a:srgbClr val="E6EDF3"/>
                 </a:solidFill>
                 <a:latin typeface="Menlo"/>
               </a:rPr>
               <a:t>zia-server</a:t>
             </a:r>
             <a:r>
-              <a:rPr sz="1300" b="0">
-                <a:solidFill>
-                  <a:srgbClr val="8B949E"/>
-                </a:solidFill>
-                <a:latin typeface="Avenir Next"/>
-              </a:rPr>
-              <a:t>  LSP + MCP language server</a:t>
+              <a:rPr sz="1350" b="0">
+                <a:solidFill>
+                  <a:srgbClr val="E6EDF3"/>
+                </a:solidFill>
+                <a:latin typeface="Menlo"/>
+              </a:rPr>
+              <a:t>  </a:t>
+            </a:r>
+            <a:r>
+              <a:rPr sz="1350" b="0">
+                <a:solidFill>
+                  <a:srgbClr val="E6EDF3"/>
+                </a:solidFill>
+                <a:latin typeface="Menlo"/>
+              </a:rPr>
+              <a:t>LSP</a:t>
+            </a:r>
+            <a:r>
+              <a:rPr sz="1350" b="0">
+                <a:solidFill>
+                  <a:srgbClr val="E6EDF3"/>
+                </a:solidFill>
+                <a:latin typeface="Menlo"/>
+              </a:rPr>
+              <a:t> </a:t>
+            </a:r>
+            <a:r>
+              <a:rPr sz="1350" b="0">
+                <a:solidFill>
+                  <a:srgbClr val="E6EDF3"/>
+                </a:solidFill>
+                <a:latin typeface="Menlo"/>
+              </a:rPr>
+              <a:t>+</a:t>
+            </a:r>
+            <a:r>
+              <a:rPr sz="1350" b="0">
+                <a:solidFill>
+                  <a:srgbClr val="E6EDF3"/>
+                </a:solidFill>
+                <a:latin typeface="Menlo"/>
+              </a:rPr>
+              <a:t> </a:t>
+            </a:r>
+            <a:r>
+              <a:rPr sz="1350" b="0">
+                <a:solidFill>
+                  <a:srgbClr val="E6EDF3"/>
+                </a:solidFill>
+                <a:latin typeface="Menlo"/>
+              </a:rPr>
+              <a:t>MCP</a:t>
+            </a:r>
+            <a:r>
+              <a:rPr sz="1350" b="0">
+                <a:solidFill>
+                  <a:srgbClr val="E6EDF3"/>
+                </a:solidFill>
+                <a:latin typeface="Menlo"/>
+              </a:rPr>
+              <a:t> </a:t>
+            </a:r>
+            <a:r>
+              <a:rPr sz="1350" b="0">
+                <a:solidFill>
+                  <a:srgbClr val="E6EDF3"/>
+                </a:solidFill>
+                <a:latin typeface="Menlo"/>
+              </a:rPr>
+              <a:t>language</a:t>
+            </a:r>
+            <a:r>
+              <a:rPr sz="1350" b="0">
+                <a:solidFill>
+                  <a:srgbClr val="E6EDF3"/>
+                </a:solidFill>
+                <a:latin typeface="Menlo"/>
+              </a:rPr>
+              <a:t> </a:t>
+            </a:r>
+            <a:r>
+              <a:rPr sz="1350" b="0">
+                <a:solidFill>
+                  <a:srgbClr val="E6EDF3"/>
+                </a:solidFill>
+                <a:latin typeface="Menlo"/>
+              </a:rPr>
+              <a:t>server</a:t>
             </a:r>
           </a:p>
           <a:p>
@@ -6422,120 +6710,157 @@
               </a:spcAft>
             </a:pPr>
             <a:r>
-              <a:rPr sz="1350" b="1">
-                <a:solidFill>
-                  <a:srgbClr val="3FB950"/>
+              <a:rPr sz="1350" b="0">
+                <a:solidFill>
+                  <a:srgbClr val="E6EDF3"/>
                 </a:solidFill>
                 <a:latin typeface="Menlo"/>
               </a:rPr>
               <a:t>package</a:t>
             </a:r>
             <a:r>
-              <a:rPr sz="1300" b="0">
-                <a:solidFill>
-                  <a:srgbClr val="8B949E"/>
-                </a:solidFill>
-                <a:latin typeface="Avenir Next"/>
-              </a:rPr>
-              <a:t>  installers: .app · .deb · .exe · .tar.gz</a:t>
-            </a:r>
-          </a:p>
-        </p:txBody>
-      </p:sp>
-      <p:sp>
-        <p:nvSpPr>
-          <p:cNvPr id="10" name="Rounded Rectangle 9"/>
-          <p:cNvSpPr/>
-          <p:nvPr/>
-        </p:nvSpPr>
-        <p:spPr>
-          <a:xfrm>
-            <a:off x="640080" y="4681728"/>
-            <a:ext cx="5989320" cy="1170432"/>
-          </a:xfrm>
-          <a:prstGeom prst="roundRect">
-            <a:avLst>
-              <a:gd name="adj" fmla="val 10156"/>
-            </a:avLst>
-          </a:prstGeom>
-          <a:solidFill>
-            <a:srgbClr val="161B22"/>
-          </a:solidFill>
-          <a:ln w="19050">
-            <a:solidFill>
-              <a:srgbClr val="58A6FF"/>
-            </a:solidFill>
-          </a:ln>
-          <a:effectLst/>
-        </p:spPr>
-        <p:style>
-          <a:lnRef idx="1">
-            <a:schemeClr val="accent1"/>
-          </a:lnRef>
-          <a:fillRef idx="3">
-            <a:schemeClr val="accent1"/>
-          </a:fillRef>
-          <a:effectRef idx="2">
-            <a:schemeClr val="accent1"/>
-          </a:effectRef>
-          <a:fontRef idx="minor">
-            <a:schemeClr val="lt1"/>
-          </a:fontRef>
-        </p:style>
-        <p:txBody>
-          <a:bodyPr rtlCol="0" anchor="t" wrap="square" lIns="274320" rIns="256032" tIns="146304" bIns="182880"/>
-          <a:lstStyle/>
-          <a:p>
-            <a:pPr algn="l">
-              <a:lnSpc>
-                <a:spcPct val="105000"/>
-              </a:lnSpc>
-              <a:spcBef>
-                <a:spcPts val="0"/>
-              </a:spcBef>
-              <a:spcAft>
-                <a:spcPts val="600"/>
-              </a:spcAft>
-            </a:pPr>
-            <a:r>
-              <a:rPr sz="1600" b="1">
-                <a:solidFill>
-                  <a:srgbClr val="E6EDF3"/>
-                </a:solidFill>
-                <a:latin typeface="Avenir Next"/>
-              </a:rPr>
-              <a:t>Agent-friendly</a:t>
-            </a:r>
-          </a:p>
-          <a:p>
-            <a:pPr algn="l">
-              <a:lnSpc>
-                <a:spcPct val="125000"/>
-              </a:lnSpc>
-              <a:spcBef>
-                <a:spcPts val="0"/>
-              </a:spcBef>
-              <a:spcAft>
-                <a:spcPts val="0"/>
-              </a:spcAft>
-            </a:pPr>
-            <a:r>
               <a:rPr sz="1350" b="0">
                 <a:solidFill>
                   <a:srgbClr val="E6EDF3"/>
                 </a:solidFill>
-                <a:latin typeface="Avenir Next"/>
-              </a:rPr>
-              <a:t>viper check · eval · explain</a:t>
+                <a:latin typeface="Menlo"/>
+              </a:rPr>
+              <a:t>  </a:t>
             </a:r>
             <a:r>
               <a:rPr sz="1350" b="0">
                 <a:solidFill>
-                  <a:srgbClr val="8B949E"/>
-                </a:solidFill>
-                <a:latin typeface="Avenir Next"/>
-              </a:rPr>
-              <a:t>   ·   JSON diagnostics   ·   --dump-runtime-api   ·   LSP + MCP servers</a:t>
+                  <a:srgbClr val="E6EDF3"/>
+                </a:solidFill>
+                <a:latin typeface="Menlo"/>
+              </a:rPr>
+              <a:t>installers:</a:t>
+            </a:r>
+            <a:r>
+              <a:rPr sz="1350" b="0">
+                <a:solidFill>
+                  <a:srgbClr val="E6EDF3"/>
+                </a:solidFill>
+                <a:latin typeface="Menlo"/>
+              </a:rPr>
+              <a:t> </a:t>
+            </a:r>
+            <a:r>
+              <a:rPr sz="1350" b="0">
+                <a:solidFill>
+                  <a:srgbClr val="E6EDF3"/>
+                </a:solidFill>
+                <a:latin typeface="Menlo"/>
+              </a:rPr>
+              <a:t>.app</a:t>
+            </a:r>
+            <a:r>
+              <a:rPr sz="1350" b="0">
+                <a:solidFill>
+                  <a:srgbClr val="E6EDF3"/>
+                </a:solidFill>
+                <a:latin typeface="Menlo"/>
+              </a:rPr>
+              <a:t> </a:t>
+            </a:r>
+            <a:r>
+              <a:rPr sz="1350" b="0">
+                <a:solidFill>
+                  <a:srgbClr val="E6EDF3"/>
+                </a:solidFill>
+                <a:latin typeface="Menlo"/>
+              </a:rPr>
+              <a:t>·</a:t>
+            </a:r>
+            <a:r>
+              <a:rPr sz="1350" b="0">
+                <a:solidFill>
+                  <a:srgbClr val="E6EDF3"/>
+                </a:solidFill>
+                <a:latin typeface="Menlo"/>
+              </a:rPr>
+              <a:t> </a:t>
+            </a:r>
+            <a:r>
+              <a:rPr sz="1350" b="0">
+                <a:solidFill>
+                  <a:srgbClr val="E6EDF3"/>
+                </a:solidFill>
+                <a:latin typeface="Menlo"/>
+              </a:rPr>
+              <a:t>.deb</a:t>
+            </a:r>
+            <a:r>
+              <a:rPr sz="1350" b="0">
+                <a:solidFill>
+                  <a:srgbClr val="E6EDF3"/>
+                </a:solidFill>
+                <a:latin typeface="Menlo"/>
+              </a:rPr>
+              <a:t> </a:t>
+            </a:r>
+            <a:r>
+              <a:rPr sz="1350" b="0">
+                <a:solidFill>
+                  <a:srgbClr val="E6EDF3"/>
+                </a:solidFill>
+                <a:latin typeface="Menlo"/>
+              </a:rPr>
+              <a:t>·</a:t>
+            </a:r>
+            <a:r>
+              <a:rPr sz="1350" b="0">
+                <a:solidFill>
+                  <a:srgbClr val="E6EDF3"/>
+                </a:solidFill>
+                <a:latin typeface="Menlo"/>
+              </a:rPr>
+              <a:t> </a:t>
+            </a:r>
+            <a:r>
+              <a:rPr sz="1350" b="0">
+                <a:solidFill>
+                  <a:srgbClr val="E6EDF3"/>
+                </a:solidFill>
+                <a:latin typeface="Menlo"/>
+              </a:rPr>
+              <a:t>.exe</a:t>
+            </a:r>
+            <a:r>
+              <a:rPr sz="1350" b="0">
+                <a:solidFill>
+                  <a:srgbClr val="E6EDF3"/>
+                </a:solidFill>
+                <a:latin typeface="Menlo"/>
+              </a:rPr>
+              <a:t> </a:t>
+            </a:r>
+            <a:r>
+              <a:rPr sz="1350" b="0">
+                <a:solidFill>
+                  <a:srgbClr val="E6EDF3"/>
+                </a:solidFill>
+                <a:latin typeface="Menlo"/>
+              </a:rPr>
+              <a:t>·</a:t>
+            </a:r>
+            <a:r>
+              <a:rPr sz="1350" b="0">
+                <a:solidFill>
+                  <a:srgbClr val="E6EDF3"/>
+                </a:solidFill>
+                <a:latin typeface="Menlo"/>
+              </a:rPr>
+              <a:t> </a:t>
+            </a:r>
+            <a:r>
+              <a:rPr sz="1350" b="0">
+                <a:solidFill>
+                  <a:srgbClr val="E6EDF3"/>
+                </a:solidFill>
+                <a:latin typeface="Menlo"/>
+              </a:rPr>
+              <a:t>.tar.gz</a:t>
             </a:r>
           </a:p>
         </p:txBody>
@@ -6634,7 +6959,3362 @@
                 </a:solidFill>
                 <a:latin typeface="Avenir Next"/>
               </a:rPr>
-              <a:t>12 / 12</a:t>
+              <a:t>16 / 17</a:t>
+            </a:r>
+          </a:p>
+        </p:txBody>
+      </p:sp>
+    </p:spTree>
+  </p:cSld>
+  <p:clrMapOvr>
+    <a:masterClrMapping/>
+  </p:clrMapOvr>
+</p:sld>
+</file>
+
+<file path=ppt/slides/slide13.xml><?xml version="1.0" encoding="utf-8"?>
+<p:sld xmlns:a="http://schemas.openxmlformats.org/drawingml/2006/main" xmlns:p="http://schemas.openxmlformats.org/presentationml/2006/main" xmlns:r="http://schemas.openxmlformats.org/officeDocument/2006/relationships">
+  <p:cSld>
+    <p:spTree>
+      <p:nvGrpSpPr>
+        <p:cNvPr id="1" name=""/>
+        <p:cNvGrpSpPr/>
+        <p:nvPr/>
+      </p:nvGrpSpPr>
+      <p:grpSpPr/>
+      <p:sp>
+        <p:nvSpPr>
+          <p:cNvPr id="2" name="Rectangle 1"/>
+          <p:cNvSpPr/>
+          <p:nvPr/>
+        </p:nvSpPr>
+        <p:spPr>
+          <a:xfrm>
+            <a:off x="0" y="0"/>
+            <a:ext cx="12191695" cy="6858000"/>
+          </a:xfrm>
+          <a:prstGeom prst="rect">
+            <a:avLst/>
+          </a:prstGeom>
+          <a:solidFill>
+            <a:srgbClr val="0D1117"/>
+          </a:solidFill>
+          <a:ln>
+            <a:noFill/>
+          </a:ln>
+          <a:effectLst/>
+        </p:spPr>
+        <p:style>
+          <a:lnRef idx="1">
+            <a:schemeClr val="accent1"/>
+          </a:lnRef>
+          <a:fillRef idx="3">
+            <a:schemeClr val="accent1"/>
+          </a:fillRef>
+          <a:effectRef idx="2">
+            <a:schemeClr val="accent1"/>
+          </a:effectRef>
+          <a:fontRef idx="minor">
+            <a:schemeClr val="lt1"/>
+          </a:fontRef>
+        </p:style>
+        <p:txBody>
+          <a:bodyPr rtlCol="0" anchor="ctr"/>
+          <a:lstStyle/>
+          <a:p>
+            <a:pPr algn="ctr"/>
+          </a:p>
+        </p:txBody>
+      </p:sp>
+      <p:sp>
+        <p:nvSpPr>
+          <p:cNvPr id="100" name="TextBox 100"/>
+          <p:cNvSpPr txBox="1"/>
+          <p:nvPr/>
+        </p:nvSpPr>
+        <p:spPr>
+          <a:xfrm>
+            <a:off x="640080" y="384048"/>
+            <a:ext cx="10881360" cy="365760"/>
+          </a:xfrm>
+          <a:prstGeom prst="rect">
+            <a:avLst/>
+          </a:prstGeom>
+          <a:noFill/>
+        </p:spPr>
+        <p:txBody>
+          <a:bodyPr wrap="square" anchor="t" lIns="0" rIns="0" tIns="0" bIns="0">
+            <a:spAutoFit/>
+          </a:bodyPr>
+          <a:lstStyle/>
+          <a:p>
+            <a:pPr algn="l">
+              <a:lnSpc>
+                <a:spcPct val="105000"/>
+              </a:lnSpc>
+              <a:spcBef>
+                <a:spcPts val="0"/>
+              </a:spcBef>
+              <a:spcAft>
+                <a:spcPts val="0"/>
+              </a:spcAft>
+            </a:pPr>
+            <a:r>
+              <a:rPr sz="1300" b="1">
+                <a:solidFill>
+                  <a:srgbClr val="3FB950"/>
+                </a:solidFill>
+                <a:latin typeface="Avenir Next"/>
+              </a:rPr>
+              <a:t>FRONTENDS</a:t>
+            </a:r>
+          </a:p>
+        </p:txBody>
+      </p:sp>
+      <p:sp>
+        <p:nvSpPr>
+          <p:cNvPr id="301" name="Rectangle underline"/>
+          <p:cNvSpPr/>
+          <p:nvPr/>
+        </p:nvSpPr>
+        <p:spPr>
+          <a:xfrm>
+            <a:off x="658368" y="786384"/>
+            <a:ext cx="502920" cy="50292"/>
+          </a:xfrm>
+          <a:prstGeom prst="rect">
+            <a:avLst/>
+          </a:prstGeom>
+          <a:solidFill>
+            <a:srgbClr val="3FB950"/>
+          </a:solidFill>
+          <a:ln>
+            <a:noFill/>
+          </a:ln>
+          <a:effectLst/>
+        </p:spPr>
+        <p:style>
+          <a:lnRef idx="1">
+            <a:schemeClr val="accent1"/>
+          </a:lnRef>
+          <a:fillRef idx="3">
+            <a:schemeClr val="accent1"/>
+          </a:fillRef>
+          <a:effectRef idx="2">
+            <a:schemeClr val="accent1"/>
+          </a:effectRef>
+          <a:fontRef idx="minor">
+            <a:schemeClr val="lt1"/>
+          </a:fontRef>
+        </p:style>
+        <p:txBody>
+          <a:bodyPr rtlCol="0" anchor="ctr"/>
+          <a:lstStyle/>
+          <a:p>
+            <a:pPr algn="ctr"/>
+          </a:p>
+        </p:txBody>
+      </p:sp>
+      <p:sp>
+        <p:nvSpPr>
+          <p:cNvPr id="101" name="TextBox 101"/>
+          <p:cNvSpPr txBox="1"/>
+          <p:nvPr/>
+        </p:nvSpPr>
+        <p:spPr>
+          <a:xfrm>
+            <a:off x="640080" y="896112"/>
+            <a:ext cx="10881360" cy="700000"/>
+          </a:xfrm>
+          <a:prstGeom prst="rect">
+            <a:avLst/>
+          </a:prstGeom>
+          <a:noFill/>
+        </p:spPr>
+        <p:txBody>
+          <a:bodyPr wrap="square" anchor="t" lIns="0" rIns="0" tIns="0" bIns="0">
+            <a:spAutoFit/>
+          </a:bodyPr>
+          <a:lstStyle/>
+          <a:p>
+            <a:pPr algn="l">
+              <a:lnSpc>
+                <a:spcPct val="105000"/>
+              </a:lnSpc>
+              <a:spcBef>
+                <a:spcPts val="0"/>
+              </a:spcBef>
+              <a:spcAft>
+                <a:spcPts val="0"/>
+              </a:spcAft>
+            </a:pPr>
+            <a:r>
+              <a:rPr sz="3400" b="1">
+                <a:solidFill>
+                  <a:srgbClr val="E6EDF3"/>
+                </a:solidFill>
+                <a:latin typeface="Avenir Next"/>
+              </a:rPr>
+              <a:t>Same program, two languages</a:t>
+            </a:r>
+          </a:p>
+        </p:txBody>
+      </p:sp>
+      <p:sp>
+        <p:nvSpPr>
+          <p:cNvPr id="102" name="TextBox 102"/>
+          <p:cNvSpPr txBox="1"/>
+          <p:nvPr/>
+        </p:nvSpPr>
+        <p:spPr>
+          <a:xfrm>
+            <a:off x="658368" y="1563623"/>
+            <a:ext cx="5074920" cy="274320"/>
+          </a:xfrm>
+          <a:prstGeom prst="rect">
+            <a:avLst/>
+          </a:prstGeom>
+          <a:noFill/>
+        </p:spPr>
+        <p:txBody>
+          <a:bodyPr wrap="square" anchor="t" lIns="0" rIns="0" tIns="0" bIns="0">
+            <a:spAutoFit/>
+          </a:bodyPr>
+          <a:lstStyle/>
+          <a:p>
+            <a:pPr algn="l">
+              <a:lnSpc>
+                <a:spcPct val="105000"/>
+              </a:lnSpc>
+              <a:spcBef>
+                <a:spcPts val="0"/>
+              </a:spcBef>
+              <a:spcAft>
+                <a:spcPts val="0"/>
+              </a:spcAft>
+            </a:pPr>
+            <a:r>
+              <a:rPr sz="1200" b="1">
+                <a:solidFill>
+                  <a:srgbClr val="3FB950"/>
+                </a:solidFill>
+                <a:latin typeface="Avenir Next"/>
+              </a:rPr>
+              <a:t>Zia</a:t>
+            </a:r>
+          </a:p>
+        </p:txBody>
+      </p:sp>
+      <p:sp>
+        <p:nvSpPr>
+          <p:cNvPr id="103" name="TextBox 103"/>
+          <p:cNvSpPr txBox="1"/>
+          <p:nvPr/>
+        </p:nvSpPr>
+        <p:spPr>
+          <a:xfrm>
+            <a:off x="6510527" y="1563623"/>
+            <a:ext cx="5074920" cy="274320"/>
+          </a:xfrm>
+          <a:prstGeom prst="rect">
+            <a:avLst/>
+          </a:prstGeom>
+          <a:noFill/>
+        </p:spPr>
+        <p:txBody>
+          <a:bodyPr wrap="square" anchor="t" lIns="0" rIns="0" tIns="0" bIns="0">
+            <a:spAutoFit/>
+          </a:bodyPr>
+          <a:lstStyle/>
+          <a:p>
+            <a:pPr algn="l">
+              <a:lnSpc>
+                <a:spcPct val="105000"/>
+              </a:lnSpc>
+              <a:spcBef>
+                <a:spcPts val="0"/>
+              </a:spcBef>
+              <a:spcAft>
+                <a:spcPts val="0"/>
+              </a:spcAft>
+            </a:pPr>
+            <a:r>
+              <a:rPr sz="1200" b="1">
+                <a:solidFill>
+                  <a:srgbClr val="58A6FF"/>
+                </a:solidFill>
+                <a:latin typeface="Avenir Next"/>
+              </a:rPr>
+              <a:t>Viper BASIC</a:t>
+            </a:r>
+          </a:p>
+        </p:txBody>
+      </p:sp>
+      <p:sp>
+        <p:nvSpPr>
+          <p:cNvPr id="200" name="Rounded Rectangle 200"/>
+          <p:cNvSpPr/>
+          <p:nvPr/>
+        </p:nvSpPr>
+        <p:spPr>
+          <a:xfrm>
+            <a:off x="640080" y="1874519"/>
+            <a:ext cx="5074920" cy="3340480"/>
+          </a:xfrm>
+          <a:prstGeom prst="roundRect">
+            <a:avLst>
+              <a:gd name="adj" fmla="val 2380"/>
+            </a:avLst>
+          </a:prstGeom>
+          <a:solidFill>
+            <a:srgbClr val="0A0E14"/>
+          </a:solidFill>
+          <a:ln w="12700">
+            <a:solidFill>
+              <a:srgbClr val="30363D"/>
+            </a:solidFill>
+          </a:ln>
+          <a:effectLst/>
+        </p:spPr>
+        <p:style>
+          <a:lnRef idx="1">
+            <a:schemeClr val="accent1"/>
+          </a:lnRef>
+          <a:fillRef idx="3">
+            <a:schemeClr val="accent1"/>
+          </a:fillRef>
+          <a:effectRef idx="2">
+            <a:schemeClr val="accent1"/>
+          </a:effectRef>
+          <a:fontRef idx="minor">
+            <a:schemeClr val="lt1"/>
+          </a:fontRef>
+        </p:style>
+        <p:txBody>
+          <a:bodyPr rtlCol="0" anchor="t" wrap="none" lIns="164592" rIns="109728" tIns="128016" bIns="91440"/>
+          <a:lstStyle/>
+          <a:p>
+            <a:pPr algn="l">
+              <a:lnSpc>
+                <a:spcPct val="100000"/>
+              </a:lnSpc>
+              <a:spcBef>
+                <a:spcPts val="0"/>
+              </a:spcBef>
+              <a:spcAft>
+                <a:spcPts val="200"/>
+              </a:spcAft>
+            </a:pPr>
+            <a:r>
+              <a:rPr sz="1300" b="0">
+                <a:solidFill>
+                  <a:srgbClr val="FF7B72"/>
+                </a:solidFill>
+                <a:latin typeface="Menlo"/>
+              </a:rPr>
+              <a:t>module</a:t>
+            </a:r>
+            <a:r>
+              <a:rPr sz="1300" b="0">
+                <a:solidFill>
+                  <a:srgbClr val="E6EDF3"/>
+                </a:solidFill>
+                <a:latin typeface="Menlo"/>
+              </a:rPr>
+              <a:t> </a:t>
+            </a:r>
+            <a:r>
+              <a:rPr sz="1300" b="0">
+                <a:solidFill>
+                  <a:srgbClr val="E6EDF3"/>
+                </a:solidFill>
+                <a:latin typeface="Menlo"/>
+              </a:rPr>
+              <a:t>Area</a:t>
+            </a:r>
+            <a:r>
+              <a:rPr sz="1300" b="0">
+                <a:solidFill>
+                  <a:srgbClr val="E6EDF3"/>
+                </a:solidFill>
+                <a:latin typeface="Menlo"/>
+              </a:rPr>
+              <a:t>;</a:t>
+            </a:r>
+          </a:p>
+          <a:p>
+            <a:pPr algn="l">
+              <a:lnSpc>
+                <a:spcPct val="100000"/>
+              </a:lnSpc>
+              <a:spcBef>
+                <a:spcPts val="0"/>
+              </a:spcBef>
+              <a:spcAft>
+                <a:spcPts val="200"/>
+              </a:spcAft>
+            </a:pPr>
+            <a:r>
+              <a:rPr sz="1300" b="0">
+                <a:solidFill>
+                  <a:srgbClr val="E6EDF3"/>
+                </a:solidFill>
+                <a:latin typeface="Menlo"/>
+              </a:rPr>
+              <a:t> </a:t>
+            </a:r>
+          </a:p>
+          <a:p>
+            <a:pPr algn="l">
+              <a:lnSpc>
+                <a:spcPct val="100000"/>
+              </a:lnSpc>
+              <a:spcBef>
+                <a:spcPts val="0"/>
+              </a:spcBef>
+              <a:spcAft>
+                <a:spcPts val="200"/>
+              </a:spcAft>
+            </a:pPr>
+            <a:r>
+              <a:rPr sz="1300" b="0">
+                <a:solidFill>
+                  <a:srgbClr val="FF7B72"/>
+                </a:solidFill>
+                <a:latin typeface="Menlo"/>
+              </a:rPr>
+              <a:t>bind</a:t>
+            </a:r>
+            <a:r>
+              <a:rPr sz="1300" b="0">
+                <a:solidFill>
+                  <a:srgbClr val="E6EDF3"/>
+                </a:solidFill>
+                <a:latin typeface="Menlo"/>
+              </a:rPr>
+              <a:t> </a:t>
+            </a:r>
+            <a:r>
+              <a:rPr sz="1300" b="0">
+                <a:solidFill>
+                  <a:srgbClr val="3FB950"/>
+                </a:solidFill>
+                <a:latin typeface="Menlo"/>
+              </a:rPr>
+              <a:t>Viper</a:t>
+            </a:r>
+            <a:r>
+              <a:rPr sz="1300" b="0">
+                <a:solidFill>
+                  <a:srgbClr val="E6EDF3"/>
+                </a:solidFill>
+                <a:latin typeface="Menlo"/>
+              </a:rPr>
+              <a:t>.</a:t>
+            </a:r>
+            <a:r>
+              <a:rPr sz="1300" b="0">
+                <a:solidFill>
+                  <a:srgbClr val="3FB950"/>
+                </a:solidFill>
+                <a:latin typeface="Menlo"/>
+              </a:rPr>
+              <a:t>Terminal</a:t>
+            </a:r>
+            <a:r>
+              <a:rPr sz="1300" b="0">
+                <a:solidFill>
+                  <a:srgbClr val="E6EDF3"/>
+                </a:solidFill>
+                <a:latin typeface="Menlo"/>
+              </a:rPr>
+              <a:t> </a:t>
+            </a:r>
+            <a:r>
+              <a:rPr sz="1300" b="0">
+                <a:solidFill>
+                  <a:srgbClr val="FF7B72"/>
+                </a:solidFill>
+                <a:latin typeface="Menlo"/>
+              </a:rPr>
+              <a:t>as</a:t>
+            </a:r>
+            <a:r>
+              <a:rPr sz="1300" b="0">
+                <a:solidFill>
+                  <a:srgbClr val="E6EDF3"/>
+                </a:solidFill>
+                <a:latin typeface="Menlo"/>
+              </a:rPr>
+              <a:t> </a:t>
+            </a:r>
+            <a:r>
+              <a:rPr sz="1300" b="0">
+                <a:solidFill>
+                  <a:srgbClr val="3FB950"/>
+                </a:solidFill>
+                <a:latin typeface="Menlo"/>
+              </a:rPr>
+              <a:t>Terminal</a:t>
+            </a:r>
+            <a:r>
+              <a:rPr sz="1300" b="0">
+                <a:solidFill>
+                  <a:srgbClr val="E6EDF3"/>
+                </a:solidFill>
+                <a:latin typeface="Menlo"/>
+              </a:rPr>
+              <a:t>;</a:t>
+            </a:r>
+          </a:p>
+          <a:p>
+            <a:pPr algn="l">
+              <a:lnSpc>
+                <a:spcPct val="100000"/>
+              </a:lnSpc>
+              <a:spcBef>
+                <a:spcPts val="0"/>
+              </a:spcBef>
+              <a:spcAft>
+                <a:spcPts val="200"/>
+              </a:spcAft>
+            </a:pPr>
+            <a:r>
+              <a:rPr sz="1300" b="0">
+                <a:solidFill>
+                  <a:srgbClr val="FF7B72"/>
+                </a:solidFill>
+                <a:latin typeface="Menlo"/>
+              </a:rPr>
+              <a:t>bind</a:t>
+            </a:r>
+            <a:r>
+              <a:rPr sz="1300" b="0">
+                <a:solidFill>
+                  <a:srgbClr val="E6EDF3"/>
+                </a:solidFill>
+                <a:latin typeface="Menlo"/>
+              </a:rPr>
+              <a:t> </a:t>
+            </a:r>
+            <a:r>
+              <a:rPr sz="1300" b="0">
+                <a:solidFill>
+                  <a:srgbClr val="3FB950"/>
+                </a:solidFill>
+                <a:latin typeface="Menlo"/>
+              </a:rPr>
+              <a:t>Viper</a:t>
+            </a:r>
+            <a:r>
+              <a:rPr sz="1300" b="0">
+                <a:solidFill>
+                  <a:srgbClr val="E6EDF3"/>
+                </a:solidFill>
+                <a:latin typeface="Menlo"/>
+              </a:rPr>
+              <a:t>.</a:t>
+            </a:r>
+            <a:r>
+              <a:rPr sz="1300" b="0">
+                <a:solidFill>
+                  <a:srgbClr val="3FB950"/>
+                </a:solidFill>
+                <a:latin typeface="Menlo"/>
+              </a:rPr>
+              <a:t>Text</a:t>
+            </a:r>
+            <a:r>
+              <a:rPr sz="1300" b="0">
+                <a:solidFill>
+                  <a:srgbClr val="E6EDF3"/>
+                </a:solidFill>
+                <a:latin typeface="Menlo"/>
+              </a:rPr>
+              <a:t>.</a:t>
+            </a:r>
+            <a:r>
+              <a:rPr sz="1300" b="0">
+                <a:solidFill>
+                  <a:srgbClr val="3FB950"/>
+                </a:solidFill>
+                <a:latin typeface="Menlo"/>
+              </a:rPr>
+              <a:t>Fmt</a:t>
+            </a:r>
+            <a:r>
+              <a:rPr sz="1300" b="0">
+                <a:solidFill>
+                  <a:srgbClr val="E6EDF3"/>
+                </a:solidFill>
+                <a:latin typeface="Menlo"/>
+              </a:rPr>
+              <a:t> </a:t>
+            </a:r>
+            <a:r>
+              <a:rPr sz="1300" b="0">
+                <a:solidFill>
+                  <a:srgbClr val="FF7B72"/>
+                </a:solidFill>
+                <a:latin typeface="Menlo"/>
+              </a:rPr>
+              <a:t>as</a:t>
+            </a:r>
+            <a:r>
+              <a:rPr sz="1300" b="0">
+                <a:solidFill>
+                  <a:srgbClr val="E6EDF3"/>
+                </a:solidFill>
+                <a:latin typeface="Menlo"/>
+              </a:rPr>
+              <a:t> </a:t>
+            </a:r>
+            <a:r>
+              <a:rPr sz="1300" b="0">
+                <a:solidFill>
+                  <a:srgbClr val="3FB950"/>
+                </a:solidFill>
+                <a:latin typeface="Menlo"/>
+              </a:rPr>
+              <a:t>Fmt</a:t>
+            </a:r>
+            <a:r>
+              <a:rPr sz="1300" b="0">
+                <a:solidFill>
+                  <a:srgbClr val="E6EDF3"/>
+                </a:solidFill>
+                <a:latin typeface="Menlo"/>
+              </a:rPr>
+              <a:t>;</a:t>
+            </a:r>
+          </a:p>
+          <a:p>
+            <a:pPr algn="l">
+              <a:lnSpc>
+                <a:spcPct val="100000"/>
+              </a:lnSpc>
+              <a:spcBef>
+                <a:spcPts val="0"/>
+              </a:spcBef>
+              <a:spcAft>
+                <a:spcPts val="200"/>
+              </a:spcAft>
+            </a:pPr>
+            <a:r>
+              <a:rPr sz="1300" b="0">
+                <a:solidFill>
+                  <a:srgbClr val="E6EDF3"/>
+                </a:solidFill>
+                <a:latin typeface="Menlo"/>
+              </a:rPr>
+              <a:t> </a:t>
+            </a:r>
+          </a:p>
+          <a:p>
+            <a:pPr algn="l">
+              <a:lnSpc>
+                <a:spcPct val="100000"/>
+              </a:lnSpc>
+              <a:spcBef>
+                <a:spcPts val="0"/>
+              </a:spcBef>
+              <a:spcAft>
+                <a:spcPts val="200"/>
+              </a:spcAft>
+            </a:pPr>
+            <a:r>
+              <a:rPr sz="1300" b="0">
+                <a:solidFill>
+                  <a:srgbClr val="FF7B72"/>
+                </a:solidFill>
+                <a:latin typeface="Menlo"/>
+              </a:rPr>
+              <a:t>func</a:t>
+            </a:r>
+            <a:r>
+              <a:rPr sz="1300" b="0">
+                <a:solidFill>
+                  <a:srgbClr val="E6EDF3"/>
+                </a:solidFill>
+                <a:latin typeface="Menlo"/>
+              </a:rPr>
+              <a:t> </a:t>
+            </a:r>
+            <a:r>
+              <a:rPr sz="1300" b="0">
+                <a:solidFill>
+                  <a:srgbClr val="E6EDF3"/>
+                </a:solidFill>
+                <a:latin typeface="Menlo"/>
+              </a:rPr>
+              <a:t>start</a:t>
+            </a:r>
+            <a:r>
+              <a:rPr sz="1300" b="0">
+                <a:solidFill>
+                  <a:srgbClr val="E6EDF3"/>
+                </a:solidFill>
+                <a:latin typeface="Menlo"/>
+              </a:rPr>
+              <a:t>()</a:t>
+            </a:r>
+            <a:r>
+              <a:rPr sz="1300" b="0">
+                <a:solidFill>
+                  <a:srgbClr val="E6EDF3"/>
+                </a:solidFill>
+                <a:latin typeface="Menlo"/>
+              </a:rPr>
+              <a:t> </a:t>
+            </a:r>
+            <a:r>
+              <a:rPr sz="1300" b="0">
+                <a:solidFill>
+                  <a:srgbClr val="E6EDF3"/>
+                </a:solidFill>
+                <a:latin typeface="Menlo"/>
+              </a:rPr>
+              <a:t>{</a:t>
+            </a:r>
+          </a:p>
+          <a:p>
+            <a:pPr algn="l">
+              <a:lnSpc>
+                <a:spcPct val="100000"/>
+              </a:lnSpc>
+              <a:spcBef>
+                <a:spcPts val="0"/>
+              </a:spcBef>
+              <a:spcAft>
+                <a:spcPts val="200"/>
+              </a:spcAft>
+            </a:pPr>
+            <a:r>
+              <a:rPr sz="1300" b="0">
+                <a:solidFill>
+                  <a:srgbClr val="E6EDF3"/>
+                </a:solidFill>
+                <a:latin typeface="Menlo"/>
+              </a:rPr>
+              <a:t>    </a:t>
+            </a:r>
+            <a:r>
+              <a:rPr sz="1300" b="0">
+                <a:solidFill>
+                  <a:srgbClr val="FF7B72"/>
+                </a:solidFill>
+                <a:latin typeface="Menlo"/>
+              </a:rPr>
+              <a:t>var</a:t>
+            </a:r>
+            <a:r>
+              <a:rPr sz="1300" b="0">
+                <a:solidFill>
+                  <a:srgbClr val="E6EDF3"/>
+                </a:solidFill>
+                <a:latin typeface="Menlo"/>
+              </a:rPr>
+              <a:t> </a:t>
+            </a:r>
+            <a:r>
+              <a:rPr sz="1300" b="0">
+                <a:solidFill>
+                  <a:srgbClr val="E6EDF3"/>
+                </a:solidFill>
+                <a:latin typeface="Menlo"/>
+              </a:rPr>
+              <a:t>w</a:t>
+            </a:r>
+            <a:r>
+              <a:rPr sz="1300" b="0">
+                <a:solidFill>
+                  <a:srgbClr val="E6EDF3"/>
+                </a:solidFill>
+                <a:latin typeface="Menlo"/>
+              </a:rPr>
+              <a:t> </a:t>
+            </a:r>
+            <a:r>
+              <a:rPr sz="1300" b="0">
+                <a:solidFill>
+                  <a:srgbClr val="FF7B72"/>
+                </a:solidFill>
+                <a:latin typeface="Menlo"/>
+              </a:rPr>
+              <a:t>=</a:t>
+            </a:r>
+            <a:r>
+              <a:rPr sz="1300" b="0">
+                <a:solidFill>
+                  <a:srgbClr val="E6EDF3"/>
+                </a:solidFill>
+                <a:latin typeface="Menlo"/>
+              </a:rPr>
+              <a:t> </a:t>
+            </a:r>
+            <a:r>
+              <a:rPr sz="1300" b="0">
+                <a:solidFill>
+                  <a:srgbClr val="79C0FF"/>
+                </a:solidFill>
+                <a:latin typeface="Menlo"/>
+              </a:rPr>
+              <a:t>4</a:t>
+            </a:r>
+            <a:r>
+              <a:rPr sz="1300" b="0">
+                <a:solidFill>
+                  <a:srgbClr val="E6EDF3"/>
+                </a:solidFill>
+                <a:latin typeface="Menlo"/>
+              </a:rPr>
+              <a:t>;</a:t>
+            </a:r>
+          </a:p>
+          <a:p>
+            <a:pPr algn="l">
+              <a:lnSpc>
+                <a:spcPct val="100000"/>
+              </a:lnSpc>
+              <a:spcBef>
+                <a:spcPts val="0"/>
+              </a:spcBef>
+              <a:spcAft>
+                <a:spcPts val="200"/>
+              </a:spcAft>
+            </a:pPr>
+            <a:r>
+              <a:rPr sz="1300" b="0">
+                <a:solidFill>
+                  <a:srgbClr val="E6EDF3"/>
+                </a:solidFill>
+                <a:latin typeface="Menlo"/>
+              </a:rPr>
+              <a:t>    </a:t>
+            </a:r>
+            <a:r>
+              <a:rPr sz="1300" b="0">
+                <a:solidFill>
+                  <a:srgbClr val="FF7B72"/>
+                </a:solidFill>
+                <a:latin typeface="Menlo"/>
+              </a:rPr>
+              <a:t>var</a:t>
+            </a:r>
+            <a:r>
+              <a:rPr sz="1300" b="0">
+                <a:solidFill>
+                  <a:srgbClr val="E6EDF3"/>
+                </a:solidFill>
+                <a:latin typeface="Menlo"/>
+              </a:rPr>
+              <a:t> </a:t>
+            </a:r>
+            <a:r>
+              <a:rPr sz="1300" b="0">
+                <a:solidFill>
+                  <a:srgbClr val="E6EDF3"/>
+                </a:solidFill>
+                <a:latin typeface="Menlo"/>
+              </a:rPr>
+              <a:t>h</a:t>
+            </a:r>
+            <a:r>
+              <a:rPr sz="1300" b="0">
+                <a:solidFill>
+                  <a:srgbClr val="E6EDF3"/>
+                </a:solidFill>
+                <a:latin typeface="Menlo"/>
+              </a:rPr>
+              <a:t> </a:t>
+            </a:r>
+            <a:r>
+              <a:rPr sz="1300" b="0">
+                <a:solidFill>
+                  <a:srgbClr val="FF7B72"/>
+                </a:solidFill>
+                <a:latin typeface="Menlo"/>
+              </a:rPr>
+              <a:t>=</a:t>
+            </a:r>
+            <a:r>
+              <a:rPr sz="1300" b="0">
+                <a:solidFill>
+                  <a:srgbClr val="E6EDF3"/>
+                </a:solidFill>
+                <a:latin typeface="Menlo"/>
+              </a:rPr>
+              <a:t> </a:t>
+            </a:r>
+            <a:r>
+              <a:rPr sz="1300" b="0">
+                <a:solidFill>
+                  <a:srgbClr val="79C0FF"/>
+                </a:solidFill>
+                <a:latin typeface="Menlo"/>
+              </a:rPr>
+              <a:t>3</a:t>
+            </a:r>
+            <a:r>
+              <a:rPr sz="1300" b="0">
+                <a:solidFill>
+                  <a:srgbClr val="E6EDF3"/>
+                </a:solidFill>
+                <a:latin typeface="Menlo"/>
+              </a:rPr>
+              <a:t>;</a:t>
+            </a:r>
+          </a:p>
+          <a:p>
+            <a:pPr algn="l">
+              <a:lnSpc>
+                <a:spcPct val="100000"/>
+              </a:lnSpc>
+              <a:spcBef>
+                <a:spcPts val="0"/>
+              </a:spcBef>
+              <a:spcAft>
+                <a:spcPts val="200"/>
+              </a:spcAft>
+            </a:pPr>
+            <a:r>
+              <a:rPr sz="1300" b="0">
+                <a:solidFill>
+                  <a:srgbClr val="E6EDF3"/>
+                </a:solidFill>
+                <a:latin typeface="Menlo"/>
+              </a:rPr>
+              <a:t>    </a:t>
+            </a:r>
+            <a:r>
+              <a:rPr sz="1300" b="0">
+                <a:solidFill>
+                  <a:srgbClr val="FF7B72"/>
+                </a:solidFill>
+                <a:latin typeface="Menlo"/>
+              </a:rPr>
+              <a:t>var</a:t>
+            </a:r>
+            <a:r>
+              <a:rPr sz="1300" b="0">
+                <a:solidFill>
+                  <a:srgbClr val="E6EDF3"/>
+                </a:solidFill>
+                <a:latin typeface="Menlo"/>
+              </a:rPr>
+              <a:t> </a:t>
+            </a:r>
+            <a:r>
+              <a:rPr sz="1300" b="0">
+                <a:solidFill>
+                  <a:srgbClr val="E6EDF3"/>
+                </a:solidFill>
+                <a:latin typeface="Menlo"/>
+              </a:rPr>
+              <a:t>area</a:t>
+            </a:r>
+            <a:r>
+              <a:rPr sz="1300" b="0">
+                <a:solidFill>
+                  <a:srgbClr val="E6EDF3"/>
+                </a:solidFill>
+                <a:latin typeface="Menlo"/>
+              </a:rPr>
+              <a:t> </a:t>
+            </a:r>
+            <a:r>
+              <a:rPr sz="1300" b="0">
+                <a:solidFill>
+                  <a:srgbClr val="FF7B72"/>
+                </a:solidFill>
+                <a:latin typeface="Menlo"/>
+              </a:rPr>
+              <a:t>=</a:t>
+            </a:r>
+            <a:r>
+              <a:rPr sz="1300" b="0">
+                <a:solidFill>
+                  <a:srgbClr val="E6EDF3"/>
+                </a:solidFill>
+                <a:latin typeface="Menlo"/>
+              </a:rPr>
+              <a:t> </a:t>
+            </a:r>
+            <a:r>
+              <a:rPr sz="1300" b="0">
+                <a:solidFill>
+                  <a:srgbClr val="E6EDF3"/>
+                </a:solidFill>
+                <a:latin typeface="Menlo"/>
+              </a:rPr>
+              <a:t>w</a:t>
+            </a:r>
+            <a:r>
+              <a:rPr sz="1300" b="0">
+                <a:solidFill>
+                  <a:srgbClr val="E6EDF3"/>
+                </a:solidFill>
+                <a:latin typeface="Menlo"/>
+              </a:rPr>
+              <a:t> </a:t>
+            </a:r>
+            <a:r>
+              <a:rPr sz="1300" b="0">
+                <a:solidFill>
+                  <a:srgbClr val="FF7B72"/>
+                </a:solidFill>
+                <a:latin typeface="Menlo"/>
+              </a:rPr>
+              <a:t>*</a:t>
+            </a:r>
+            <a:r>
+              <a:rPr sz="1300" b="0">
+                <a:solidFill>
+                  <a:srgbClr val="E6EDF3"/>
+                </a:solidFill>
+                <a:latin typeface="Menlo"/>
+              </a:rPr>
+              <a:t> </a:t>
+            </a:r>
+            <a:r>
+              <a:rPr sz="1300" b="0">
+                <a:solidFill>
+                  <a:srgbClr val="E6EDF3"/>
+                </a:solidFill>
+                <a:latin typeface="Menlo"/>
+              </a:rPr>
+              <a:t>h</a:t>
+            </a:r>
+            <a:r>
+              <a:rPr sz="1300" b="0">
+                <a:solidFill>
+                  <a:srgbClr val="E6EDF3"/>
+                </a:solidFill>
+                <a:latin typeface="Menlo"/>
+              </a:rPr>
+              <a:t>;</a:t>
+            </a:r>
+          </a:p>
+          <a:p>
+            <a:pPr algn="l">
+              <a:lnSpc>
+                <a:spcPct val="100000"/>
+              </a:lnSpc>
+              <a:spcBef>
+                <a:spcPts val="0"/>
+              </a:spcBef>
+              <a:spcAft>
+                <a:spcPts val="200"/>
+              </a:spcAft>
+            </a:pPr>
+            <a:r>
+              <a:rPr sz="1300" b="0">
+                <a:solidFill>
+                  <a:srgbClr val="E6EDF3"/>
+                </a:solidFill>
+                <a:latin typeface="Menlo"/>
+              </a:rPr>
+              <a:t>    </a:t>
+            </a:r>
+            <a:r>
+              <a:rPr sz="1300" b="0">
+                <a:solidFill>
+                  <a:srgbClr val="3FB950"/>
+                </a:solidFill>
+                <a:latin typeface="Menlo"/>
+              </a:rPr>
+              <a:t>Terminal</a:t>
+            </a:r>
+            <a:r>
+              <a:rPr sz="1300" b="0">
+                <a:solidFill>
+                  <a:srgbClr val="E6EDF3"/>
+                </a:solidFill>
+                <a:latin typeface="Menlo"/>
+              </a:rPr>
+              <a:t>.</a:t>
+            </a:r>
+            <a:r>
+              <a:rPr sz="1300" b="0">
+                <a:solidFill>
+                  <a:srgbClr val="D2A8FF"/>
+                </a:solidFill>
+                <a:latin typeface="Menlo"/>
+              </a:rPr>
+              <a:t>Say</a:t>
+            </a:r>
+            <a:r>
+              <a:rPr sz="1300" b="0">
+                <a:solidFill>
+                  <a:srgbClr val="E6EDF3"/>
+                </a:solidFill>
+                <a:latin typeface="Menlo"/>
+              </a:rPr>
+              <a:t>(</a:t>
+            </a:r>
+            <a:r>
+              <a:rPr sz="1300" b="0">
+                <a:solidFill>
+                  <a:srgbClr val="A5D6FF"/>
+                </a:solidFill>
+                <a:latin typeface="Menlo"/>
+              </a:rPr>
+              <a:t>"Area = "</a:t>
+            </a:r>
+            <a:r>
+              <a:rPr sz="1300" b="0">
+                <a:solidFill>
+                  <a:srgbClr val="E6EDF3"/>
+                </a:solidFill>
+                <a:latin typeface="Menlo"/>
+              </a:rPr>
+              <a:t>);</a:t>
+            </a:r>
+          </a:p>
+          <a:p>
+            <a:pPr algn="l">
+              <a:lnSpc>
+                <a:spcPct val="100000"/>
+              </a:lnSpc>
+              <a:spcBef>
+                <a:spcPts val="0"/>
+              </a:spcBef>
+              <a:spcAft>
+                <a:spcPts val="200"/>
+              </a:spcAft>
+            </a:pPr>
+            <a:r>
+              <a:rPr sz="1300" b="0">
+                <a:solidFill>
+                  <a:srgbClr val="E6EDF3"/>
+                </a:solidFill>
+                <a:latin typeface="Menlo"/>
+              </a:rPr>
+              <a:t>    </a:t>
+            </a:r>
+            <a:r>
+              <a:rPr sz="1300" b="0">
+                <a:solidFill>
+                  <a:srgbClr val="3FB950"/>
+                </a:solidFill>
+                <a:latin typeface="Menlo"/>
+              </a:rPr>
+              <a:t>Terminal</a:t>
+            </a:r>
+            <a:r>
+              <a:rPr sz="1300" b="0">
+                <a:solidFill>
+                  <a:srgbClr val="E6EDF3"/>
+                </a:solidFill>
+                <a:latin typeface="Menlo"/>
+              </a:rPr>
+              <a:t>.</a:t>
+            </a:r>
+            <a:r>
+              <a:rPr sz="1300" b="0">
+                <a:solidFill>
+                  <a:srgbClr val="D2A8FF"/>
+                </a:solidFill>
+                <a:latin typeface="Menlo"/>
+              </a:rPr>
+              <a:t>Say</a:t>
+            </a:r>
+            <a:r>
+              <a:rPr sz="1300" b="0">
+                <a:solidFill>
+                  <a:srgbClr val="E6EDF3"/>
+                </a:solidFill>
+                <a:latin typeface="Menlo"/>
+              </a:rPr>
+              <a:t>(</a:t>
+            </a:r>
+            <a:r>
+              <a:rPr sz="1300" b="0">
+                <a:solidFill>
+                  <a:srgbClr val="3FB950"/>
+                </a:solidFill>
+                <a:latin typeface="Menlo"/>
+              </a:rPr>
+              <a:t>Fmt</a:t>
+            </a:r>
+            <a:r>
+              <a:rPr sz="1300" b="0">
+                <a:solidFill>
+                  <a:srgbClr val="E6EDF3"/>
+                </a:solidFill>
+                <a:latin typeface="Menlo"/>
+              </a:rPr>
+              <a:t>.</a:t>
+            </a:r>
+            <a:r>
+              <a:rPr sz="1300" b="0">
+                <a:solidFill>
+                  <a:srgbClr val="D2A8FF"/>
+                </a:solidFill>
+                <a:latin typeface="Menlo"/>
+              </a:rPr>
+              <a:t>Int</a:t>
+            </a:r>
+            <a:r>
+              <a:rPr sz="1300" b="0">
+                <a:solidFill>
+                  <a:srgbClr val="E6EDF3"/>
+                </a:solidFill>
+                <a:latin typeface="Menlo"/>
+              </a:rPr>
+              <a:t>(</a:t>
+            </a:r>
+            <a:r>
+              <a:rPr sz="1300" b="0">
+                <a:solidFill>
+                  <a:srgbClr val="E6EDF3"/>
+                </a:solidFill>
+                <a:latin typeface="Menlo"/>
+              </a:rPr>
+              <a:t>area</a:t>
+            </a:r>
+            <a:r>
+              <a:rPr sz="1300" b="0">
+                <a:solidFill>
+                  <a:srgbClr val="E6EDF3"/>
+                </a:solidFill>
+                <a:latin typeface="Menlo"/>
+              </a:rPr>
+              <a:t>));</a:t>
+            </a:r>
+          </a:p>
+          <a:p>
+            <a:pPr algn="l">
+              <a:lnSpc>
+                <a:spcPct val="100000"/>
+              </a:lnSpc>
+              <a:spcBef>
+                <a:spcPts val="0"/>
+              </a:spcBef>
+              <a:spcAft>
+                <a:spcPts val="200"/>
+              </a:spcAft>
+            </a:pPr>
+            <a:r>
+              <a:rPr sz="1300" b="0">
+                <a:solidFill>
+                  <a:srgbClr val="E6EDF3"/>
+                </a:solidFill>
+                <a:latin typeface="Menlo"/>
+              </a:rPr>
+              <a:t>}</a:t>
+            </a:r>
+          </a:p>
+        </p:txBody>
+      </p:sp>
+      <p:sp>
+        <p:nvSpPr>
+          <p:cNvPr id="201" name="Rounded Rectangle 201"/>
+          <p:cNvSpPr/>
+          <p:nvPr/>
+        </p:nvSpPr>
+        <p:spPr>
+          <a:xfrm>
+            <a:off x="6492240" y="1874519"/>
+            <a:ext cx="5074920" cy="3340480"/>
+          </a:xfrm>
+          <a:prstGeom prst="roundRect">
+            <a:avLst>
+              <a:gd name="adj" fmla="val 2380"/>
+            </a:avLst>
+          </a:prstGeom>
+          <a:solidFill>
+            <a:srgbClr val="0A0E14"/>
+          </a:solidFill>
+          <a:ln w="12700">
+            <a:solidFill>
+              <a:srgbClr val="30363D"/>
+            </a:solidFill>
+          </a:ln>
+          <a:effectLst/>
+        </p:spPr>
+        <p:style>
+          <a:lnRef idx="1">
+            <a:schemeClr val="accent1"/>
+          </a:lnRef>
+          <a:fillRef idx="3">
+            <a:schemeClr val="accent1"/>
+          </a:fillRef>
+          <a:effectRef idx="2">
+            <a:schemeClr val="accent1"/>
+          </a:effectRef>
+          <a:fontRef idx="minor">
+            <a:schemeClr val="lt1"/>
+          </a:fontRef>
+        </p:style>
+        <p:txBody>
+          <a:bodyPr rtlCol="0" anchor="t" wrap="none" lIns="164592" rIns="109728" tIns="128016" bIns="91440"/>
+          <a:lstStyle/>
+          <a:p>
+            <a:pPr algn="l">
+              <a:lnSpc>
+                <a:spcPct val="100000"/>
+              </a:lnSpc>
+              <a:spcBef>
+                <a:spcPts val="0"/>
+              </a:spcBef>
+              <a:spcAft>
+                <a:spcPts val="200"/>
+              </a:spcAft>
+            </a:pPr>
+            <a:r>
+              <a:rPr sz="1300" b="0">
+                <a:solidFill>
+                  <a:srgbClr val="6E966E"/>
+                </a:solidFill>
+                <a:latin typeface="Menlo"/>
+              </a:rPr>
+              <a:t>REM Area</a:t>
+            </a:r>
+          </a:p>
+          <a:p>
+            <a:pPr algn="l">
+              <a:lnSpc>
+                <a:spcPct val="100000"/>
+              </a:lnSpc>
+              <a:spcBef>
+                <a:spcPts val="0"/>
+              </a:spcBef>
+              <a:spcAft>
+                <a:spcPts val="200"/>
+              </a:spcAft>
+            </a:pPr>
+            <a:r>
+              <a:rPr sz="1300" b="0">
+                <a:solidFill>
+                  <a:srgbClr val="E6EDF3"/>
+                </a:solidFill>
+                <a:latin typeface="Menlo"/>
+              </a:rPr>
+              <a:t> </a:t>
+            </a:r>
+          </a:p>
+          <a:p>
+            <a:pPr algn="l">
+              <a:lnSpc>
+                <a:spcPct val="100000"/>
+              </a:lnSpc>
+              <a:spcBef>
+                <a:spcPts val="0"/>
+              </a:spcBef>
+              <a:spcAft>
+                <a:spcPts val="200"/>
+              </a:spcAft>
+            </a:pPr>
+            <a:r>
+              <a:rPr sz="1300" b="0">
+                <a:solidFill>
+                  <a:srgbClr val="FF7B72"/>
+                </a:solidFill>
+                <a:latin typeface="Menlo"/>
+              </a:rPr>
+              <a:t>USING</a:t>
+            </a:r>
+            <a:r>
+              <a:rPr sz="1300" b="0">
+                <a:solidFill>
+                  <a:srgbClr val="E6EDF3"/>
+                </a:solidFill>
+                <a:latin typeface="Menlo"/>
+              </a:rPr>
+              <a:t> </a:t>
+            </a:r>
+            <a:r>
+              <a:rPr sz="1300" b="0">
+                <a:solidFill>
+                  <a:srgbClr val="3FB950"/>
+                </a:solidFill>
+                <a:latin typeface="Menlo"/>
+              </a:rPr>
+              <a:t>Viper</a:t>
+            </a:r>
+            <a:r>
+              <a:rPr sz="1300" b="0">
+                <a:solidFill>
+                  <a:srgbClr val="E6EDF3"/>
+                </a:solidFill>
+                <a:latin typeface="Menlo"/>
+              </a:rPr>
+              <a:t>.</a:t>
+            </a:r>
+            <a:r>
+              <a:rPr sz="1300" b="0">
+                <a:solidFill>
+                  <a:srgbClr val="3FB950"/>
+                </a:solidFill>
+                <a:latin typeface="Menlo"/>
+              </a:rPr>
+              <a:t>Text</a:t>
+            </a:r>
+          </a:p>
+          <a:p>
+            <a:pPr algn="l">
+              <a:lnSpc>
+                <a:spcPct val="100000"/>
+              </a:lnSpc>
+              <a:spcBef>
+                <a:spcPts val="0"/>
+              </a:spcBef>
+              <a:spcAft>
+                <a:spcPts val="200"/>
+              </a:spcAft>
+            </a:pPr>
+            <a:r>
+              <a:rPr sz="1300" b="0">
+                <a:solidFill>
+                  <a:srgbClr val="E6EDF3"/>
+                </a:solidFill>
+                <a:latin typeface="Menlo"/>
+              </a:rPr>
+              <a:t> </a:t>
+            </a:r>
+          </a:p>
+          <a:p>
+            <a:pPr algn="l">
+              <a:lnSpc>
+                <a:spcPct val="100000"/>
+              </a:lnSpc>
+              <a:spcBef>
+                <a:spcPts val="0"/>
+              </a:spcBef>
+              <a:spcAft>
+                <a:spcPts val="200"/>
+              </a:spcAft>
+            </a:pPr>
+            <a:r>
+              <a:rPr sz="1300" b="0">
+                <a:solidFill>
+                  <a:srgbClr val="FF7B72"/>
+                </a:solidFill>
+                <a:latin typeface="Menlo"/>
+              </a:rPr>
+              <a:t>LET</a:t>
+            </a:r>
+            <a:r>
+              <a:rPr sz="1300" b="0">
+                <a:solidFill>
+                  <a:srgbClr val="E6EDF3"/>
+                </a:solidFill>
+                <a:latin typeface="Menlo"/>
+              </a:rPr>
+              <a:t> </a:t>
+            </a:r>
+            <a:r>
+              <a:rPr sz="1300" b="0">
+                <a:solidFill>
+                  <a:srgbClr val="E6EDF3"/>
+                </a:solidFill>
+                <a:latin typeface="Menlo"/>
+              </a:rPr>
+              <a:t>W</a:t>
+            </a:r>
+            <a:r>
+              <a:rPr sz="1300" b="0">
+                <a:solidFill>
+                  <a:srgbClr val="E6EDF3"/>
+                </a:solidFill>
+                <a:latin typeface="Menlo"/>
+              </a:rPr>
+              <a:t> </a:t>
+            </a:r>
+            <a:r>
+              <a:rPr sz="1300" b="0">
+                <a:solidFill>
+                  <a:srgbClr val="FF7B72"/>
+                </a:solidFill>
+                <a:latin typeface="Menlo"/>
+              </a:rPr>
+              <a:t>=</a:t>
+            </a:r>
+            <a:r>
+              <a:rPr sz="1300" b="0">
+                <a:solidFill>
+                  <a:srgbClr val="E6EDF3"/>
+                </a:solidFill>
+                <a:latin typeface="Menlo"/>
+              </a:rPr>
+              <a:t> </a:t>
+            </a:r>
+            <a:r>
+              <a:rPr sz="1300" b="0">
+                <a:solidFill>
+                  <a:srgbClr val="79C0FF"/>
+                </a:solidFill>
+                <a:latin typeface="Menlo"/>
+              </a:rPr>
+              <a:t>4</a:t>
+            </a:r>
+          </a:p>
+          <a:p>
+            <a:pPr algn="l">
+              <a:lnSpc>
+                <a:spcPct val="100000"/>
+              </a:lnSpc>
+              <a:spcBef>
+                <a:spcPts val="0"/>
+              </a:spcBef>
+              <a:spcAft>
+                <a:spcPts val="200"/>
+              </a:spcAft>
+            </a:pPr>
+            <a:r>
+              <a:rPr sz="1300" b="0">
+                <a:solidFill>
+                  <a:srgbClr val="FF7B72"/>
+                </a:solidFill>
+                <a:latin typeface="Menlo"/>
+              </a:rPr>
+              <a:t>LET</a:t>
+            </a:r>
+            <a:r>
+              <a:rPr sz="1300" b="0">
+                <a:solidFill>
+                  <a:srgbClr val="E6EDF3"/>
+                </a:solidFill>
+                <a:latin typeface="Menlo"/>
+              </a:rPr>
+              <a:t> </a:t>
+            </a:r>
+            <a:r>
+              <a:rPr sz="1300" b="0">
+                <a:solidFill>
+                  <a:srgbClr val="E6EDF3"/>
+                </a:solidFill>
+                <a:latin typeface="Menlo"/>
+              </a:rPr>
+              <a:t>H</a:t>
+            </a:r>
+            <a:r>
+              <a:rPr sz="1300" b="0">
+                <a:solidFill>
+                  <a:srgbClr val="E6EDF3"/>
+                </a:solidFill>
+                <a:latin typeface="Menlo"/>
+              </a:rPr>
+              <a:t> </a:t>
+            </a:r>
+            <a:r>
+              <a:rPr sz="1300" b="0">
+                <a:solidFill>
+                  <a:srgbClr val="FF7B72"/>
+                </a:solidFill>
+                <a:latin typeface="Menlo"/>
+              </a:rPr>
+              <a:t>=</a:t>
+            </a:r>
+            <a:r>
+              <a:rPr sz="1300" b="0">
+                <a:solidFill>
+                  <a:srgbClr val="E6EDF3"/>
+                </a:solidFill>
+                <a:latin typeface="Menlo"/>
+              </a:rPr>
+              <a:t> </a:t>
+            </a:r>
+            <a:r>
+              <a:rPr sz="1300" b="0">
+                <a:solidFill>
+                  <a:srgbClr val="79C0FF"/>
+                </a:solidFill>
+                <a:latin typeface="Menlo"/>
+              </a:rPr>
+              <a:t>3</a:t>
+            </a:r>
+          </a:p>
+          <a:p>
+            <a:pPr algn="l">
+              <a:lnSpc>
+                <a:spcPct val="100000"/>
+              </a:lnSpc>
+              <a:spcBef>
+                <a:spcPts val="0"/>
+              </a:spcBef>
+              <a:spcAft>
+                <a:spcPts val="200"/>
+              </a:spcAft>
+            </a:pPr>
+            <a:r>
+              <a:rPr sz="1300" b="0">
+                <a:solidFill>
+                  <a:srgbClr val="FF7B72"/>
+                </a:solidFill>
+                <a:latin typeface="Menlo"/>
+              </a:rPr>
+              <a:t>LET</a:t>
+            </a:r>
+            <a:r>
+              <a:rPr sz="1300" b="0">
+                <a:solidFill>
+                  <a:srgbClr val="E6EDF3"/>
+                </a:solidFill>
+                <a:latin typeface="Menlo"/>
+              </a:rPr>
+              <a:t> </a:t>
+            </a:r>
+            <a:r>
+              <a:rPr sz="1300" b="0">
+                <a:solidFill>
+                  <a:srgbClr val="E6EDF3"/>
+                </a:solidFill>
+                <a:latin typeface="Menlo"/>
+              </a:rPr>
+              <a:t>AREA</a:t>
+            </a:r>
+            <a:r>
+              <a:rPr sz="1300" b="0">
+                <a:solidFill>
+                  <a:srgbClr val="E6EDF3"/>
+                </a:solidFill>
+                <a:latin typeface="Menlo"/>
+              </a:rPr>
+              <a:t> </a:t>
+            </a:r>
+            <a:r>
+              <a:rPr sz="1300" b="0">
+                <a:solidFill>
+                  <a:srgbClr val="FF7B72"/>
+                </a:solidFill>
+                <a:latin typeface="Menlo"/>
+              </a:rPr>
+              <a:t>=</a:t>
+            </a:r>
+            <a:r>
+              <a:rPr sz="1300" b="0">
+                <a:solidFill>
+                  <a:srgbClr val="E6EDF3"/>
+                </a:solidFill>
+                <a:latin typeface="Menlo"/>
+              </a:rPr>
+              <a:t> </a:t>
+            </a:r>
+            <a:r>
+              <a:rPr sz="1300" b="0">
+                <a:solidFill>
+                  <a:srgbClr val="E6EDF3"/>
+                </a:solidFill>
+                <a:latin typeface="Menlo"/>
+              </a:rPr>
+              <a:t>W</a:t>
+            </a:r>
+            <a:r>
+              <a:rPr sz="1300" b="0">
+                <a:solidFill>
+                  <a:srgbClr val="E6EDF3"/>
+                </a:solidFill>
+                <a:latin typeface="Menlo"/>
+              </a:rPr>
+              <a:t> </a:t>
+            </a:r>
+            <a:r>
+              <a:rPr sz="1300" b="0">
+                <a:solidFill>
+                  <a:srgbClr val="FF7B72"/>
+                </a:solidFill>
+                <a:latin typeface="Menlo"/>
+              </a:rPr>
+              <a:t>*</a:t>
+            </a:r>
+            <a:r>
+              <a:rPr sz="1300" b="0">
+                <a:solidFill>
+                  <a:srgbClr val="E6EDF3"/>
+                </a:solidFill>
+                <a:latin typeface="Menlo"/>
+              </a:rPr>
+              <a:t> </a:t>
+            </a:r>
+            <a:r>
+              <a:rPr sz="1300" b="0">
+                <a:solidFill>
+                  <a:srgbClr val="E6EDF3"/>
+                </a:solidFill>
+                <a:latin typeface="Menlo"/>
+              </a:rPr>
+              <a:t>H</a:t>
+            </a:r>
+          </a:p>
+          <a:p>
+            <a:pPr algn="l">
+              <a:lnSpc>
+                <a:spcPct val="100000"/>
+              </a:lnSpc>
+              <a:spcBef>
+                <a:spcPts val="0"/>
+              </a:spcBef>
+              <a:spcAft>
+                <a:spcPts val="200"/>
+              </a:spcAft>
+            </a:pPr>
+            <a:r>
+              <a:rPr sz="1300" b="0">
+                <a:solidFill>
+                  <a:srgbClr val="FF7B72"/>
+                </a:solidFill>
+                <a:latin typeface="Menlo"/>
+              </a:rPr>
+              <a:t>PRINT</a:t>
+            </a:r>
+            <a:r>
+              <a:rPr sz="1300" b="0">
+                <a:solidFill>
+                  <a:srgbClr val="E6EDF3"/>
+                </a:solidFill>
+                <a:latin typeface="Menlo"/>
+              </a:rPr>
+              <a:t> </a:t>
+            </a:r>
+            <a:r>
+              <a:rPr sz="1300" b="0">
+                <a:solidFill>
+                  <a:srgbClr val="A5D6FF"/>
+                </a:solidFill>
+                <a:latin typeface="Menlo"/>
+              </a:rPr>
+              <a:t>"Area = "</a:t>
+            </a:r>
+          </a:p>
+          <a:p>
+            <a:pPr algn="l">
+              <a:lnSpc>
+                <a:spcPct val="100000"/>
+              </a:lnSpc>
+              <a:spcBef>
+                <a:spcPts val="0"/>
+              </a:spcBef>
+              <a:spcAft>
+                <a:spcPts val="200"/>
+              </a:spcAft>
+            </a:pPr>
+            <a:r>
+              <a:rPr sz="1300" b="0">
+                <a:solidFill>
+                  <a:srgbClr val="FF7B72"/>
+                </a:solidFill>
+                <a:latin typeface="Menlo"/>
+              </a:rPr>
+              <a:t>PRINT</a:t>
+            </a:r>
+            <a:r>
+              <a:rPr sz="1300" b="0">
+                <a:solidFill>
+                  <a:srgbClr val="E6EDF3"/>
+                </a:solidFill>
+                <a:latin typeface="Menlo"/>
+              </a:rPr>
+              <a:t> </a:t>
+            </a:r>
+            <a:r>
+              <a:rPr sz="1300" b="0">
+                <a:solidFill>
+                  <a:srgbClr val="3FB950"/>
+                </a:solidFill>
+                <a:latin typeface="Menlo"/>
+              </a:rPr>
+              <a:t>Fmt</a:t>
+            </a:r>
+            <a:r>
+              <a:rPr sz="1300" b="0">
+                <a:solidFill>
+                  <a:srgbClr val="E6EDF3"/>
+                </a:solidFill>
+                <a:latin typeface="Menlo"/>
+              </a:rPr>
+              <a:t>.</a:t>
+            </a:r>
+            <a:r>
+              <a:rPr sz="1300" b="0">
+                <a:solidFill>
+                  <a:srgbClr val="D2A8FF"/>
+                </a:solidFill>
+                <a:latin typeface="Menlo"/>
+              </a:rPr>
+              <a:t>Int</a:t>
+            </a:r>
+            <a:r>
+              <a:rPr sz="1300" b="0">
+                <a:solidFill>
+                  <a:srgbClr val="E6EDF3"/>
+                </a:solidFill>
+                <a:latin typeface="Menlo"/>
+              </a:rPr>
+              <a:t>(</a:t>
+            </a:r>
+            <a:r>
+              <a:rPr sz="1300" b="0">
+                <a:solidFill>
+                  <a:srgbClr val="E6EDF3"/>
+                </a:solidFill>
+                <a:latin typeface="Menlo"/>
+              </a:rPr>
+              <a:t>AREA</a:t>
+            </a:r>
+            <a:r>
+              <a:rPr sz="1300" b="0">
+                <a:solidFill>
+                  <a:srgbClr val="E6EDF3"/>
+                </a:solidFill>
+                <a:latin typeface="Menlo"/>
+              </a:rPr>
+              <a:t>)</a:t>
+            </a:r>
+          </a:p>
+        </p:txBody>
+      </p:sp>
+      <p:sp>
+        <p:nvSpPr>
+          <p:cNvPr id="104" name="TextBox 104"/>
+          <p:cNvSpPr txBox="1"/>
+          <p:nvPr/>
+        </p:nvSpPr>
+        <p:spPr>
+          <a:xfrm>
+            <a:off x="5808600" y="3180000"/>
+            <a:ext cx="600000" cy="600000"/>
+          </a:xfrm>
+          <a:prstGeom prst="rect">
+            <a:avLst/>
+          </a:prstGeom>
+          <a:noFill/>
+        </p:spPr>
+        <p:txBody>
+          <a:bodyPr wrap="square" anchor="ctr" lIns="0" rIns="0" tIns="0" bIns="0"/>
+          <a:lstStyle/>
+          <a:p>
+            <a:pPr algn="ctr">
+              <a:lnSpc>
+                <a:spcPct val="100000"/>
+              </a:lnSpc>
+            </a:pPr>
+            <a:r>
+              <a:rPr sz="4000" b="1">
+                <a:solidFill>
+                  <a:srgbClr val="3FB950"/>
+                </a:solidFill>
+                <a:latin typeface="Avenir Next"/>
+              </a:rPr>
+              <a:t>=</a:t>
+            </a:r>
+          </a:p>
+        </p:txBody>
+      </p:sp>
+      <p:sp>
+        <p:nvSpPr>
+          <p:cNvPr id="105" name="TextBox 105"/>
+          <p:cNvSpPr txBox="1"/>
+          <p:nvPr/>
+        </p:nvSpPr>
+        <p:spPr>
+          <a:xfrm>
+            <a:off x="640080" y="5360000"/>
+            <a:ext cx="10881360" cy="640080"/>
+          </a:xfrm>
+          <a:prstGeom prst="rect">
+            <a:avLst/>
+          </a:prstGeom>
+          <a:noFill/>
+        </p:spPr>
+        <p:txBody>
+          <a:bodyPr wrap="square" anchor="t" lIns="0" rIns="0" tIns="0" bIns="0">
+            <a:spAutoFit/>
+          </a:bodyPr>
+          <a:lstStyle/>
+          <a:p>
+            <a:pPr algn="l">
+              <a:lnSpc>
+                <a:spcPct val="110000"/>
+              </a:lnSpc>
+              <a:spcBef>
+                <a:spcPts val="0"/>
+              </a:spcBef>
+              <a:spcAft>
+                <a:spcPts val="0"/>
+              </a:spcAft>
+            </a:pPr>
+            <a:r>
+              <a:rPr sz="1500" b="1">
+                <a:solidFill>
+                  <a:srgbClr val="3FB950"/>
+                </a:solidFill>
+                <a:latin typeface="Avenir Next"/>
+              </a:rPr>
+              <a:t>Same runtime, either way</a:t>
+            </a:r>
+            <a:r>
+              <a:rPr sz="1500" b="0">
+                <a:solidFill>
+                  <a:srgbClr val="8B949E"/>
+                </a:solidFill>
+                <a:latin typeface="Avenir Next"/>
+              </a:rPr>
+              <a:t> — both frontends call the very same Viper.Text.Fmt and terminal classes. Only the syntax differs.</a:t>
+            </a:r>
+          </a:p>
+        </p:txBody>
+      </p:sp>
+      <p:sp>
+        <p:nvSpPr>
+          <p:cNvPr id="106" name="TextBox 106"/>
+          <p:cNvSpPr txBox="1"/>
+          <p:nvPr/>
+        </p:nvSpPr>
+        <p:spPr>
+          <a:xfrm>
+            <a:off x="10637215" y="420624"/>
+            <a:ext cx="914400" cy="274320"/>
+          </a:xfrm>
+          <a:prstGeom prst="rect">
+            <a:avLst/>
+          </a:prstGeom>
+          <a:noFill/>
+        </p:spPr>
+        <p:txBody>
+          <a:bodyPr wrap="square" anchor="t" lIns="0" rIns="0" tIns="0" bIns="0">
+            <a:spAutoFit/>
+          </a:bodyPr>
+          <a:lstStyle/>
+          <a:p>
+            <a:pPr algn="r">
+              <a:lnSpc>
+                <a:spcPct val="105000"/>
+              </a:lnSpc>
+              <a:spcBef>
+                <a:spcPts val="0"/>
+              </a:spcBef>
+              <a:spcAft>
+                <a:spcPts val="0"/>
+              </a:spcAft>
+            </a:pPr>
+            <a:r>
+              <a:rPr sz="1050" b="0">
+                <a:solidFill>
+                  <a:srgbClr val="8B949E"/>
+                </a:solidFill>
+                <a:latin typeface="Avenir Next"/>
+              </a:rPr>
+              <a:t>07 / 17</a:t>
+            </a:r>
+          </a:p>
+        </p:txBody>
+      </p:sp>
+    </p:spTree>
+  </p:cSld>
+  <p:clrMapOvr>
+    <a:masterClrMapping/>
+  </p:clrMapOvr>
+</p:sld>
+</file>
+
+<file path=ppt/slides/slide14.xml><?xml version="1.0" encoding="utf-8"?>
+<p:sld xmlns:a="http://schemas.openxmlformats.org/drawingml/2006/main" xmlns:p="http://schemas.openxmlformats.org/presentationml/2006/main" xmlns:r="http://schemas.openxmlformats.org/officeDocument/2006/relationships">
+  <p:cSld>
+    <p:spTree>
+      <p:nvGrpSpPr>
+        <p:cNvPr id="1" name=""/>
+        <p:cNvGrpSpPr/>
+        <p:nvPr/>
+      </p:nvGrpSpPr>
+      <p:grpSpPr/>
+      <p:sp>
+        <p:nvSpPr>
+          <p:cNvPr id="2" name="Rectangle 1"/>
+          <p:cNvSpPr/>
+          <p:nvPr/>
+        </p:nvSpPr>
+        <p:spPr>
+          <a:xfrm>
+            <a:off x="0" y="0"/>
+            <a:ext cx="12191695" cy="6858000"/>
+          </a:xfrm>
+          <a:prstGeom prst="rect">
+            <a:avLst/>
+          </a:prstGeom>
+          <a:solidFill>
+            <a:srgbClr val="0D1117"/>
+          </a:solidFill>
+          <a:ln>
+            <a:noFill/>
+          </a:ln>
+          <a:effectLst/>
+        </p:spPr>
+        <p:style>
+          <a:lnRef idx="1">
+            <a:schemeClr val="accent1"/>
+          </a:lnRef>
+          <a:fillRef idx="3">
+            <a:schemeClr val="accent1"/>
+          </a:fillRef>
+          <a:effectRef idx="2">
+            <a:schemeClr val="accent1"/>
+          </a:effectRef>
+          <a:fontRef idx="minor">
+            <a:schemeClr val="lt1"/>
+          </a:fontRef>
+        </p:style>
+        <p:txBody>
+          <a:bodyPr rtlCol="0" anchor="ctr"/>
+          <a:lstStyle/>
+          <a:p>
+            <a:pPr algn="ctr"/>
+          </a:p>
+        </p:txBody>
+      </p:sp>
+      <p:sp>
+        <p:nvSpPr>
+          <p:cNvPr id="3" name="Edge Bar"/>
+          <p:cNvSpPr/>
+          <p:nvPr/>
+        </p:nvSpPr>
+        <p:spPr>
+          <a:xfrm>
+            <a:off x="0" y="0"/>
+            <a:ext cx="146304" cy="6858000"/>
+          </a:xfrm>
+          <a:prstGeom prst="rect">
+            <a:avLst/>
+          </a:prstGeom>
+          <a:solidFill>
+            <a:srgbClr val="3FB950"/>
+          </a:solidFill>
+          <a:ln>
+            <a:noFill/>
+          </a:ln>
+          <a:effectLst/>
+        </p:spPr>
+        <p:style>
+          <a:lnRef idx="1">
+            <a:schemeClr val="accent1"/>
+          </a:lnRef>
+          <a:fillRef idx="3">
+            <a:schemeClr val="accent1"/>
+          </a:fillRef>
+          <a:effectRef idx="2">
+            <a:schemeClr val="accent1"/>
+          </a:effectRef>
+          <a:fontRef idx="minor">
+            <a:schemeClr val="lt1"/>
+          </a:fontRef>
+        </p:style>
+        <p:txBody>
+          <a:bodyPr rtlCol="0" anchor="ctr"/>
+          <a:lstStyle/>
+          <a:p>
+            <a:pPr algn="ctr"/>
+          </a:p>
+        </p:txBody>
+      </p:sp>
+      <p:sp>
+        <p:nvSpPr>
+          <p:cNvPr id="10" name="TextBox 10"/>
+          <p:cNvSpPr txBox="1"/>
+          <p:nvPr/>
+        </p:nvSpPr>
+        <p:spPr>
+          <a:xfrm>
+            <a:off x="868680" y="1950000"/>
+            <a:ext cx="10515600" cy="600000"/>
+          </a:xfrm>
+          <a:prstGeom prst="rect">
+            <a:avLst/>
+          </a:prstGeom>
+          <a:noFill/>
+        </p:spPr>
+        <p:txBody>
+          <a:bodyPr wrap="square" anchor="t" lIns="0" rIns="0" tIns="0" bIns="0"/>
+          <a:lstStyle/>
+          <a:p>
+            <a:pPr algn="l">
+              <a:lnSpc>
+                <a:spcPct val="105000"/>
+              </a:lnSpc>
+              <a:spcBef>
+                <a:spcPts val="0"/>
+              </a:spcBef>
+              <a:spcAft>
+                <a:spcPts val="400"/>
+              </a:spcAft>
+            </a:pPr>
+            <a:r>
+              <a:rPr sz="1500" b="1">
+                <a:solidFill>
+                  <a:srgbClr val="3FB950"/>
+                </a:solidFill>
+                <a:latin typeface="Avenir Next"/>
+              </a:rPr>
+              <a:t>THE ORIGIN STORY</a:t>
+            </a:r>
+          </a:p>
+        </p:txBody>
+      </p:sp>
+      <p:sp>
+        <p:nvSpPr>
+          <p:cNvPr id="11" name="TextBox 11"/>
+          <p:cNvSpPr txBox="1"/>
+          <p:nvPr/>
+        </p:nvSpPr>
+        <p:spPr>
+          <a:xfrm>
+            <a:off x="868680" y="2400000"/>
+            <a:ext cx="10515600" cy="1900000"/>
+          </a:xfrm>
+          <a:prstGeom prst="rect">
+            <a:avLst/>
+          </a:prstGeom>
+          <a:noFill/>
+        </p:spPr>
+        <p:txBody>
+          <a:bodyPr wrap="square" anchor="t" lIns="0" rIns="0" tIns="0" bIns="0"/>
+          <a:lstStyle/>
+          <a:p>
+            <a:pPr algn="l">
+              <a:lnSpc>
+                <a:spcPct val="105000"/>
+              </a:lnSpc>
+              <a:spcBef>
+                <a:spcPts val="0"/>
+              </a:spcBef>
+              <a:spcAft>
+                <a:spcPts val="300"/>
+              </a:spcAft>
+            </a:pPr>
+            <a:r>
+              <a:rPr sz="5400" b="1">
+                <a:solidFill>
+                  <a:srgbClr val="E6EDF3"/>
+                </a:solidFill>
+                <a:latin typeface="Avenir Next"/>
+              </a:rPr>
+              <a:t>Where did Viper come from?</a:t>
+            </a:r>
+          </a:p>
+        </p:txBody>
+      </p:sp>
+      <p:sp>
+        <p:nvSpPr>
+          <p:cNvPr id="12" name="TextBox 12"/>
+          <p:cNvSpPr txBox="1"/>
+          <p:nvPr/>
+        </p:nvSpPr>
+        <p:spPr>
+          <a:xfrm>
+            <a:off x="868680" y="4450000"/>
+            <a:ext cx="9500000" cy="900000"/>
+          </a:xfrm>
+          <a:prstGeom prst="rect">
+            <a:avLst/>
+          </a:prstGeom>
+          <a:noFill/>
+        </p:spPr>
+        <p:txBody>
+          <a:bodyPr wrap="square" anchor="t" lIns="0" rIns="0" tIns="0" bIns="0"/>
+          <a:lstStyle/>
+          <a:p>
+            <a:pPr algn="l">
+              <a:lnSpc>
+                <a:spcPct val="115000"/>
+              </a:lnSpc>
+              <a:spcBef>
+                <a:spcPts val="0"/>
+              </a:spcBef>
+              <a:spcAft>
+                <a:spcPts val="200"/>
+              </a:spcAft>
+            </a:pPr>
+            <a:r>
+              <a:rPr sz="2000" b="0">
+                <a:solidFill>
+                  <a:srgbClr val="8B949E"/>
+                </a:solidFill>
+                <a:latin typeface="Avenir Next"/>
+              </a:rPr>
+              <a:t>How a weekend compiler experiment quietly turned into an entire stack.</a:t>
+            </a:r>
+          </a:p>
+        </p:txBody>
+      </p:sp>
+    </p:spTree>
+  </p:cSld>
+  <p:clrMapOvr>
+    <a:masterClrMapping/>
+  </p:clrMapOvr>
+</p:sld>
+</file>
+
+<file path=ppt/slides/slide15.xml><?xml version="1.0" encoding="utf-8"?>
+<p:sld xmlns:a="http://schemas.openxmlformats.org/drawingml/2006/main" xmlns:p="http://schemas.openxmlformats.org/presentationml/2006/main" xmlns:r="http://schemas.openxmlformats.org/officeDocument/2006/relationships">
+  <p:cSld>
+    <p:spTree>
+      <p:nvGrpSpPr>
+        <p:cNvPr id="1" name=""/>
+        <p:cNvGrpSpPr/>
+        <p:nvPr/>
+      </p:nvGrpSpPr>
+      <p:grpSpPr/>
+      <p:sp>
+        <p:nvSpPr>
+          <p:cNvPr id="2" name="Rectangle 1"/>
+          <p:cNvSpPr/>
+          <p:nvPr/>
+        </p:nvSpPr>
+        <p:spPr>
+          <a:xfrm>
+            <a:off x="0" y="0"/>
+            <a:ext cx="12191695" cy="6858000"/>
+          </a:xfrm>
+          <a:prstGeom prst="rect">
+            <a:avLst/>
+          </a:prstGeom>
+          <a:solidFill>
+            <a:srgbClr val="0D1117"/>
+          </a:solidFill>
+          <a:ln>
+            <a:noFill/>
+          </a:ln>
+          <a:effectLst/>
+        </p:spPr>
+        <p:style>
+          <a:lnRef idx="1">
+            <a:schemeClr val="accent1"/>
+          </a:lnRef>
+          <a:fillRef idx="3">
+            <a:schemeClr val="accent1"/>
+          </a:fillRef>
+          <a:effectRef idx="2">
+            <a:schemeClr val="accent1"/>
+          </a:effectRef>
+          <a:fontRef idx="minor">
+            <a:schemeClr val="lt1"/>
+          </a:fontRef>
+        </p:style>
+        <p:txBody>
+          <a:bodyPr rtlCol="0" anchor="ctr"/>
+          <a:lstStyle/>
+          <a:p>
+            <a:pPr algn="ctr"/>
+          </a:p>
+        </p:txBody>
+      </p:sp>
+      <p:sp>
+        <p:nvSpPr>
+          <p:cNvPr id="3" name="Edge Bar"/>
+          <p:cNvSpPr/>
+          <p:nvPr/>
+        </p:nvSpPr>
+        <p:spPr>
+          <a:xfrm>
+            <a:off x="0" y="0"/>
+            <a:ext cx="146304" cy="6858000"/>
+          </a:xfrm>
+          <a:prstGeom prst="rect">
+            <a:avLst/>
+          </a:prstGeom>
+          <a:solidFill>
+            <a:srgbClr val="3FB950"/>
+          </a:solidFill>
+          <a:ln>
+            <a:noFill/>
+          </a:ln>
+          <a:effectLst/>
+        </p:spPr>
+        <p:style>
+          <a:lnRef idx="1">
+            <a:schemeClr val="accent1"/>
+          </a:lnRef>
+          <a:fillRef idx="3">
+            <a:schemeClr val="accent1"/>
+          </a:fillRef>
+          <a:effectRef idx="2">
+            <a:schemeClr val="accent1"/>
+          </a:effectRef>
+          <a:fontRef idx="minor">
+            <a:schemeClr val="lt1"/>
+          </a:fontRef>
+        </p:style>
+        <p:txBody>
+          <a:bodyPr rtlCol="0" anchor="ctr"/>
+          <a:lstStyle/>
+          <a:p>
+            <a:pPr algn="ctr"/>
+          </a:p>
+        </p:txBody>
+      </p:sp>
+      <p:sp>
+        <p:nvSpPr>
+          <p:cNvPr id="10" name="TextBox 10"/>
+          <p:cNvSpPr txBox="1"/>
+          <p:nvPr/>
+        </p:nvSpPr>
+        <p:spPr>
+          <a:xfrm>
+            <a:off x="868680" y="2300000"/>
+            <a:ext cx="10515600" cy="600000"/>
+          </a:xfrm>
+          <a:prstGeom prst="rect">
+            <a:avLst/>
+          </a:prstGeom>
+          <a:noFill/>
+        </p:spPr>
+        <p:txBody>
+          <a:bodyPr wrap="square" anchor="t" lIns="0" rIns="0" tIns="0" bIns="0"/>
+          <a:lstStyle/>
+          <a:p>
+            <a:pPr algn="l">
+              <a:lnSpc>
+                <a:spcPct val="105000"/>
+              </a:lnSpc>
+              <a:spcBef>
+                <a:spcPts val="0"/>
+              </a:spcBef>
+              <a:spcAft>
+                <a:spcPts val="400"/>
+              </a:spcAft>
+            </a:pPr>
+            <a:r>
+              <a:rPr sz="1500" b="1">
+                <a:solidFill>
+                  <a:srgbClr val="3FB950"/>
+                </a:solidFill>
+                <a:latin typeface="Avenir Next"/>
+              </a:rPr>
+              <a:t>ENOUGH ARCHITECTURE</a:t>
+            </a:r>
+          </a:p>
+        </p:txBody>
+      </p:sp>
+      <p:sp>
+        <p:nvSpPr>
+          <p:cNvPr id="11" name="TextBox 11"/>
+          <p:cNvSpPr txBox="1"/>
+          <p:nvPr/>
+        </p:nvSpPr>
+        <p:spPr>
+          <a:xfrm>
+            <a:off x="868680" y="2750000"/>
+            <a:ext cx="10515600" cy="1500000"/>
+          </a:xfrm>
+          <a:prstGeom prst="rect">
+            <a:avLst/>
+          </a:prstGeom>
+          <a:noFill/>
+        </p:spPr>
+        <p:txBody>
+          <a:bodyPr wrap="square" anchor="t" lIns="0" rIns="0" tIns="0" bIns="0"/>
+          <a:lstStyle/>
+          <a:p>
+            <a:pPr algn="l">
+              <a:lnSpc>
+                <a:spcPct val="105000"/>
+              </a:lnSpc>
+              <a:spcBef>
+                <a:spcPts val="0"/>
+              </a:spcBef>
+              <a:spcAft>
+                <a:spcPts val="300"/>
+              </a:spcAft>
+            </a:pPr>
+            <a:r>
+              <a:rPr sz="6000" b="1">
+                <a:solidFill>
+                  <a:srgbClr val="E6EDF3"/>
+                </a:solidFill>
+                <a:latin typeface="Avenir Next"/>
+              </a:rPr>
+              <a:t>Let's look at the demos.</a:t>
+            </a:r>
+          </a:p>
+        </p:txBody>
+      </p:sp>
+      <p:sp>
+        <p:nvSpPr>
+          <p:cNvPr id="12" name="TextBox 12"/>
+          <p:cNvSpPr txBox="1"/>
+          <p:nvPr/>
+        </p:nvSpPr>
+        <p:spPr>
+          <a:xfrm>
+            <a:off x="868680" y="4300000"/>
+            <a:ext cx="9500000" cy="900000"/>
+          </a:xfrm>
+          <a:prstGeom prst="rect">
+            <a:avLst/>
+          </a:prstGeom>
+          <a:noFill/>
+        </p:spPr>
+        <p:txBody>
+          <a:bodyPr wrap="square" anchor="t" lIns="0" rIns="0" tIns="0" bIns="0"/>
+          <a:lstStyle/>
+          <a:p>
+            <a:pPr algn="l">
+              <a:lnSpc>
+                <a:spcPct val="115000"/>
+              </a:lnSpc>
+              <a:spcBef>
+                <a:spcPts val="0"/>
+              </a:spcBef>
+              <a:spcAft>
+                <a:spcPts val="200"/>
+              </a:spcAft>
+            </a:pPr>
+            <a:r>
+              <a:rPr sz="2000" b="0">
+                <a:solidFill>
+                  <a:srgbClr val="8B949E"/>
+                </a:solidFill>
+                <a:latin typeface="Avenir Next"/>
+              </a:rPr>
+              <a:t>Games and apps built entirely in Zia, running on the toolchain we just walked through.</a:t>
+            </a:r>
+          </a:p>
+        </p:txBody>
+      </p:sp>
+    </p:spTree>
+  </p:cSld>
+  <p:clrMapOvr>
+    <a:masterClrMapping/>
+  </p:clrMapOvr>
+</p:sld>
+</file>
+
+<file path=ppt/slides/slide16.xml><?xml version="1.0" encoding="utf-8"?>
+<p:sld xmlns:a="http://schemas.openxmlformats.org/drawingml/2006/main" xmlns:p="http://schemas.openxmlformats.org/presentationml/2006/main" xmlns:r="http://schemas.openxmlformats.org/officeDocument/2006/relationships">
+  <p:cSld>
+    <p:spTree>
+      <p:nvGrpSpPr>
+        <p:cNvPr id="1" name=""/>
+        <p:cNvGrpSpPr/>
+        <p:nvPr/>
+      </p:nvGrpSpPr>
+      <p:grpSpPr/>
+      <p:sp>
+        <p:nvSpPr>
+          <p:cNvPr id="2" name="Rectangle 1"/>
+          <p:cNvSpPr/>
+          <p:nvPr/>
+        </p:nvSpPr>
+        <p:spPr>
+          <a:xfrm>
+            <a:off x="0" y="0"/>
+            <a:ext cx="12191695" cy="6858000"/>
+          </a:xfrm>
+          <a:prstGeom prst="rect">
+            <a:avLst/>
+          </a:prstGeom>
+          <a:solidFill>
+            <a:srgbClr val="0D1117"/>
+          </a:solidFill>
+          <a:ln>
+            <a:noFill/>
+          </a:ln>
+          <a:effectLst/>
+        </p:spPr>
+        <p:style>
+          <a:lnRef idx="1">
+            <a:schemeClr val="accent1"/>
+          </a:lnRef>
+          <a:fillRef idx="3">
+            <a:schemeClr val="accent1"/>
+          </a:fillRef>
+          <a:effectRef idx="2">
+            <a:schemeClr val="accent1"/>
+          </a:effectRef>
+          <a:fontRef idx="minor">
+            <a:schemeClr val="lt1"/>
+          </a:fontRef>
+        </p:style>
+        <p:txBody>
+          <a:bodyPr rtlCol="0" anchor="ctr"/>
+          <a:lstStyle/>
+          <a:p>
+            <a:pPr algn="ctr"/>
+          </a:p>
+        </p:txBody>
+      </p:sp>
+      <p:sp>
+        <p:nvSpPr>
+          <p:cNvPr id="3" name="Edge Bar"/>
+          <p:cNvSpPr/>
+          <p:nvPr/>
+        </p:nvSpPr>
+        <p:spPr>
+          <a:xfrm>
+            <a:off x="0" y="0"/>
+            <a:ext cx="146304" cy="6858000"/>
+          </a:xfrm>
+          <a:prstGeom prst="rect">
+            <a:avLst/>
+          </a:prstGeom>
+          <a:solidFill>
+            <a:srgbClr val="3FB950"/>
+          </a:solidFill>
+          <a:ln>
+            <a:noFill/>
+          </a:ln>
+          <a:effectLst/>
+        </p:spPr>
+        <p:style>
+          <a:lnRef idx="1">
+            <a:schemeClr val="accent1"/>
+          </a:lnRef>
+          <a:fillRef idx="3">
+            <a:schemeClr val="accent1"/>
+          </a:fillRef>
+          <a:effectRef idx="2">
+            <a:schemeClr val="accent1"/>
+          </a:effectRef>
+          <a:fontRef idx="minor">
+            <a:schemeClr val="lt1"/>
+          </a:fontRef>
+        </p:style>
+        <p:txBody>
+          <a:bodyPr rtlCol="0" anchor="ctr"/>
+          <a:lstStyle/>
+          <a:p>
+            <a:pPr algn="ctr"/>
+          </a:p>
+        </p:txBody>
+      </p:sp>
+      <p:pic>
+        <p:nvPicPr>
+          <p:cNvPr id="4" name="Picture 3" descr="viperlogo2.png"/>
+          <p:cNvPicPr>
+            <a:picLocks noChangeAspect="1"/>
+          </p:cNvPicPr>
+          <p:nvPr/>
+        </p:nvPicPr>
+        <p:blipFill>
+          <a:blip r:embed="rId2"/>
+          <a:stretch>
+            <a:fillRect/>
+          </a:stretch>
+        </p:blipFill>
+        <p:spPr>
+          <a:xfrm>
+            <a:off x="868680" y="960120"/>
+            <a:ext cx="1737360" cy="1737360"/>
+          </a:xfrm>
+          <a:prstGeom prst="rect">
+            <a:avLst/>
+          </a:prstGeom>
+        </p:spPr>
+      </p:pic>
+      <p:sp>
+        <p:nvSpPr>
+          <p:cNvPr id="10" name="TextBox 10"/>
+          <p:cNvSpPr txBox="1"/>
+          <p:nvPr/>
+        </p:nvSpPr>
+        <p:spPr>
+          <a:xfrm>
+            <a:off x="868680" y="3250000"/>
+            <a:ext cx="10515600" cy="1200000"/>
+          </a:xfrm>
+          <a:prstGeom prst="rect">
+            <a:avLst/>
+          </a:prstGeom>
+          <a:noFill/>
+        </p:spPr>
+        <p:txBody>
+          <a:bodyPr wrap="square" anchor="t" lIns="0" rIns="0" tIns="0" bIns="0"/>
+          <a:lstStyle/>
+          <a:p>
+            <a:pPr algn="l">
+              <a:lnSpc>
+                <a:spcPct val="105000"/>
+              </a:lnSpc>
+              <a:spcBef>
+                <a:spcPts val="0"/>
+              </a:spcBef>
+              <a:spcAft>
+                <a:spcPts val="300"/>
+              </a:spcAft>
+            </a:pPr>
+            <a:r>
+              <a:rPr sz="6000" b="1">
+                <a:solidFill>
+                  <a:srgbClr val="E6EDF3"/>
+                </a:solidFill>
+                <a:latin typeface="Avenir Next"/>
+              </a:rPr>
+              <a:t>Thanks for watching.</a:t>
+            </a:r>
+          </a:p>
+        </p:txBody>
+      </p:sp>
+      <p:sp>
+        <p:nvSpPr>
+          <p:cNvPr id="11" name="TextBox 11"/>
+          <p:cNvSpPr txBox="1"/>
+          <p:nvPr/>
+        </p:nvSpPr>
+        <p:spPr>
+          <a:xfrm>
+            <a:off x="868680" y="4350000"/>
+            <a:ext cx="9800000" cy="900000"/>
+          </a:xfrm>
+          <a:prstGeom prst="rect">
+            <a:avLst/>
+          </a:prstGeom>
+          <a:noFill/>
+        </p:spPr>
+        <p:txBody>
+          <a:bodyPr wrap="square" anchor="t" lIns="0" rIns="0" tIns="0" bIns="0"/>
+          <a:lstStyle/>
+          <a:p>
+            <a:pPr algn="l">
+              <a:lnSpc>
+                <a:spcPct val="115000"/>
+              </a:lnSpc>
+              <a:spcBef>
+                <a:spcPts val="0"/>
+              </a:spcBef>
+              <a:spcAft>
+                <a:spcPts val="200"/>
+              </a:spcAft>
+            </a:pPr>
+            <a:r>
+              <a:rPr sz="2000" b="0">
+                <a:solidFill>
+                  <a:srgbClr val="8B949E"/>
+                </a:solidFill>
+                <a:latin typeface="Avenir Next"/>
+              </a:rPr>
+              <a:t>Viper is open source and pre-alpha. Clone it, run the demos, and tell me what breaks.</a:t>
+            </a:r>
+          </a:p>
+        </p:txBody>
+      </p:sp>
+      <p:sp>
+        <p:nvSpPr>
+          <p:cNvPr id="12" name="TextBox 12"/>
+          <p:cNvSpPr txBox="1"/>
+          <p:nvPr/>
+        </p:nvSpPr>
+        <p:spPr>
+          <a:xfrm>
+            <a:off x="868680" y="6126480"/>
+            <a:ext cx="10515600" cy="457200"/>
+          </a:xfrm>
+          <a:prstGeom prst="rect">
+            <a:avLst/>
+          </a:prstGeom>
+          <a:noFill/>
+        </p:spPr>
+        <p:txBody>
+          <a:bodyPr wrap="square" anchor="t" lIns="0" rIns="0" tIns="0" bIns="0"/>
+          <a:lstStyle/>
+          <a:p>
+            <a:pPr algn="l">
+              <a:lnSpc>
+                <a:spcPct val="105000"/>
+              </a:lnSpc>
+              <a:spcBef>
+                <a:spcPts val="0"/>
+              </a:spcBef>
+              <a:spcAft>
+                <a:spcPts val="0"/>
+              </a:spcAft>
+            </a:pPr>
+            <a:r>
+              <a:rPr sz="1600" b="1">
+                <a:solidFill>
+                  <a:srgbClr val="58A6FF"/>
+                </a:solidFill>
+                <a:latin typeface="Avenir Next"/>
+              </a:rPr>
+              <a:t>github.com/splanck/viper</a:t>
+            </a:r>
+            <a:r>
+              <a:rPr sz="1600" b="0">
+                <a:solidFill>
+                  <a:srgbClr val="30363D"/>
+                </a:solidFill>
+                <a:latin typeface="Avenir Next"/>
+              </a:rPr>
+              <a:t>    ·    </a:t>
+            </a:r>
+            <a:r>
+              <a:rPr sz="1600" b="0">
+                <a:solidFill>
+                  <a:srgbClr val="8B949E"/>
+                </a:solidFill>
+                <a:latin typeface="Avenir Next"/>
+              </a:rPr>
+              <a:t>GPL-3.0</a:t>
+            </a:r>
+            <a:r>
+              <a:rPr sz="1600" b="0">
+                <a:solidFill>
+                  <a:srgbClr val="30363D"/>
+                </a:solidFill>
+                <a:latin typeface="Avenir Next"/>
+              </a:rPr>
+              <a:t>    ·    </a:t>
+            </a:r>
+            <a:r>
+              <a:rPr sz="1600" b="0">
+                <a:solidFill>
+                  <a:srgbClr val="8B949E"/>
+                </a:solidFill>
+                <a:latin typeface="Avenir Next"/>
+              </a:rPr>
+              <a:t>Linux · macOS · Windows</a:t>
+            </a:r>
+          </a:p>
+        </p:txBody>
+      </p:sp>
+    </p:spTree>
+  </p:cSld>
+  <p:clrMapOvr>
+    <a:masterClrMapping/>
+  </p:clrMapOvr>
+</p:sld>
+</file>
+
+<file path=ppt/slides/slide17.xml><?xml version="1.0" encoding="utf-8"?>
+<p:sld xmlns:a="http://schemas.openxmlformats.org/drawingml/2006/main" xmlns:p="http://schemas.openxmlformats.org/presentationml/2006/main" xmlns:r="http://schemas.openxmlformats.org/officeDocument/2006/relationships">
+  <p:cSld>
+    <p:spTree>
+      <p:nvGrpSpPr>
+        <p:cNvPr id="1" name=""/>
+        <p:cNvGrpSpPr/>
+        <p:nvPr/>
+      </p:nvGrpSpPr>
+      <p:grpSpPr/>
+      <p:sp>
+        <p:nvSpPr>
+          <p:cNvPr id="2" name="Rect 2"/>
+          <p:cNvSpPr/>
+          <p:nvPr/>
+        </p:nvSpPr>
+        <p:spPr>
+          <a:xfrm>
+            <a:off x="0" y="0"/>
+            <a:ext cx="12191695" cy="6858000"/>
+          </a:xfrm>
+          <a:prstGeom prst="rect">
+            <a:avLst/>
+          </a:prstGeom>
+          <a:solidFill>
+            <a:srgbClr val="0D1117"/>
+          </a:solidFill>
+          <a:ln>
+            <a:noFill/>
+          </a:ln>
+          <a:effectLst/>
+        </p:spPr>
+        <p:style>
+          <a:lnRef idx="1">
+            <a:schemeClr val="accent1"/>
+          </a:lnRef>
+          <a:fillRef idx="3">
+            <a:schemeClr val="accent1"/>
+          </a:fillRef>
+          <a:effectRef idx="2">
+            <a:schemeClr val="accent1"/>
+          </a:effectRef>
+          <a:fontRef idx="minor">
+            <a:schemeClr val="lt1"/>
+          </a:fontRef>
+        </p:style>
+        <p:txBody>
+          <a:bodyPr rtlCol="0" anchor="ctr"/>
+          <a:lstStyle/>
+          <a:p>
+            <a:pPr algn="ctr"/>
+          </a:p>
+        </p:txBody>
+      </p:sp>
+      <p:sp>
+        <p:nvSpPr>
+          <p:cNvPr id="3" name="TextBox 3"/>
+          <p:cNvSpPr txBox="1"/>
+          <p:nvPr/>
+        </p:nvSpPr>
+        <p:spPr>
+          <a:xfrm>
+            <a:off x="640080" y="384048"/>
+            <a:ext cx="10881360" cy="365760"/>
+          </a:xfrm>
+          <a:prstGeom prst="rect">
+            <a:avLst/>
+          </a:prstGeom>
+          <a:noFill/>
+        </p:spPr>
+        <p:txBody>
+          <a:bodyPr wrap="square" anchor="t" lIns="0" rIns="0" tIns="0" bIns="0"/>
+          <a:lstStyle/>
+          <a:p>
+            <a:pPr algn="l">
+              <a:lnSpc>
+                <a:spcPct val="105000"/>
+              </a:lnSpc>
+              <a:spcBef>
+                <a:spcPts val="0"/>
+              </a:spcBef>
+              <a:spcAft>
+                <a:spcPts val="0"/>
+              </a:spcAft>
+            </a:pPr>
+            <a:r>
+              <a:rPr sz="1300" b="1">
+                <a:solidFill>
+                  <a:srgbClr val="3FB950"/>
+                </a:solidFill>
+                <a:latin typeface="Avenir Next"/>
+              </a:rPr>
+              <a:t>WHAT IS VIPER</a:t>
+            </a:r>
+          </a:p>
+        </p:txBody>
+      </p:sp>
+      <p:sp>
+        <p:nvSpPr>
+          <p:cNvPr id="4" name="Rect 4"/>
+          <p:cNvSpPr/>
+          <p:nvPr/>
+        </p:nvSpPr>
+        <p:spPr>
+          <a:xfrm>
+            <a:off x="658368" y="786384"/>
+            <a:ext cx="502920" cy="50292"/>
+          </a:xfrm>
+          <a:prstGeom prst="rect">
+            <a:avLst/>
+          </a:prstGeom>
+          <a:solidFill>
+            <a:srgbClr val="3FB950"/>
+          </a:solidFill>
+          <a:ln>
+            <a:noFill/>
+          </a:ln>
+          <a:effectLst/>
+        </p:spPr>
+        <p:style>
+          <a:lnRef idx="1">
+            <a:schemeClr val="accent1"/>
+          </a:lnRef>
+          <a:fillRef idx="3">
+            <a:schemeClr val="accent1"/>
+          </a:fillRef>
+          <a:effectRef idx="2">
+            <a:schemeClr val="accent1"/>
+          </a:effectRef>
+          <a:fontRef idx="minor">
+            <a:schemeClr val="lt1"/>
+          </a:fontRef>
+        </p:style>
+        <p:txBody>
+          <a:bodyPr rtlCol="0" anchor="ctr"/>
+          <a:lstStyle/>
+          <a:p>
+            <a:pPr algn="ctr"/>
+          </a:p>
+        </p:txBody>
+      </p:sp>
+      <p:sp>
+        <p:nvSpPr>
+          <p:cNvPr id="5" name="TextBox 5"/>
+          <p:cNvSpPr txBox="1"/>
+          <p:nvPr/>
+        </p:nvSpPr>
+        <p:spPr>
+          <a:xfrm>
+            <a:off x="640080" y="896112"/>
+            <a:ext cx="10881360" cy="700000"/>
+          </a:xfrm>
+          <a:prstGeom prst="rect">
+            <a:avLst/>
+          </a:prstGeom>
+          <a:noFill/>
+        </p:spPr>
+        <p:txBody>
+          <a:bodyPr wrap="square" anchor="t" lIns="0" rIns="0" tIns="0" bIns="0"/>
+          <a:lstStyle/>
+          <a:p>
+            <a:pPr algn="l">
+              <a:lnSpc>
+                <a:spcPct val="105000"/>
+              </a:lnSpc>
+              <a:spcBef>
+                <a:spcPts val="0"/>
+              </a:spcBef>
+              <a:spcAft>
+                <a:spcPts val="0"/>
+              </a:spcAft>
+            </a:pPr>
+            <a:r>
+              <a:rPr sz="3400" b="1">
+                <a:solidFill>
+                  <a:srgbClr val="E6EDF3"/>
+                </a:solidFill>
+                <a:latin typeface="Avenir Next"/>
+              </a:rPr>
+              <a:t>A platform for building games</a:t>
+            </a:r>
+          </a:p>
+        </p:txBody>
+      </p:sp>
+      <p:sp>
+        <p:nvSpPr>
+          <p:cNvPr id="6" name="TextBox 6"/>
+          <p:cNvSpPr txBox="1"/>
+          <p:nvPr/>
+        </p:nvSpPr>
+        <p:spPr>
+          <a:xfrm>
+            <a:off x="640080" y="1750000"/>
+            <a:ext cx="10300000" cy="1500000"/>
+          </a:xfrm>
+          <a:prstGeom prst="rect">
+            <a:avLst/>
+          </a:prstGeom>
+          <a:noFill/>
+        </p:spPr>
+        <p:txBody>
+          <a:bodyPr wrap="square" anchor="t" lIns="0" rIns="0" tIns="0" bIns="0"/>
+          <a:lstStyle/>
+          <a:p>
+            <a:pPr algn="l">
+              <a:lnSpc>
+                <a:spcPct val="112000"/>
+              </a:lnSpc>
+              <a:spcBef>
+                <a:spcPts val="0"/>
+              </a:spcBef>
+              <a:spcAft>
+                <a:spcPts val="0"/>
+              </a:spcAft>
+            </a:pPr>
+            <a:r>
+              <a:rPr sz="2400" b="0">
+                <a:solidFill>
+                  <a:srgbClr val="E6EDF3"/>
+                </a:solidFill>
+                <a:latin typeface="Avenir Next"/>
+              </a:rPr>
+              <a:t>Viper is a </a:t>
+            </a:r>
+            <a:r>
+              <a:rPr sz="2400" b="1">
+                <a:solidFill>
+                  <a:srgbClr val="3FB950"/>
+                </a:solidFill>
+                <a:latin typeface="Avenir Next"/>
+              </a:rPr>
+              <a:t>game development platform and runtime</a:t>
+            </a:r>
+            <a:r>
+              <a:rPr sz="2400" b="0">
+                <a:solidFill>
+                  <a:srgbClr val="E6EDF3"/>
+                </a:solidFill>
+                <a:latin typeface="Avenir Next"/>
+              </a:rPr>
+              <a:t>. It is general purpose, but the whole stack is shaped first and foremost around </a:t>
+            </a:r>
+            <a:r>
+              <a:rPr sz="2400" b="1">
+                <a:solidFill>
+                  <a:srgbClr val="58A6FF"/>
+                </a:solidFill>
+                <a:latin typeface="Avenir Next"/>
+              </a:rPr>
+              <a:t>PC game development</a:t>
+            </a:r>
+            <a:r>
+              <a:rPr sz="2400" b="0">
+                <a:solidFill>
+                  <a:srgbClr val="E6EDF3"/>
+                </a:solidFill>
+                <a:latin typeface="Avenir Next"/>
+              </a:rPr>
+              <a:t>.</a:t>
+            </a:r>
+          </a:p>
+        </p:txBody>
+      </p:sp>
+      <p:sp>
+        <p:nvSpPr>
+          <p:cNvPr id="10" name="Card 10"/>
+          <p:cNvSpPr/>
+          <p:nvPr/>
+        </p:nvSpPr>
+        <p:spPr>
+          <a:xfrm>
+            <a:off x="640080" y="3850000"/>
+            <a:ext cx="3454298" cy="1750000"/>
+          </a:xfrm>
+          <a:prstGeom prst="roundRect">
+            <a:avLst>
+              <a:gd name="adj" fmla="val 4200"/>
+            </a:avLst>
+          </a:prstGeom>
+          <a:solidFill>
+            <a:srgbClr val="0A0E14"/>
+          </a:solidFill>
+          <a:ln w="12700">
+            <a:solidFill>
+              <a:srgbClr val="30363D"/>
+            </a:solidFill>
+          </a:ln>
+          <a:effectLst/>
+        </p:spPr>
+        <p:style>
+          <a:lnRef idx="1">
+            <a:schemeClr val="accent1"/>
+          </a:lnRef>
+          <a:fillRef idx="3">
+            <a:schemeClr val="accent1"/>
+          </a:fillRef>
+          <a:effectRef idx="2">
+            <a:schemeClr val="accent1"/>
+          </a:effectRef>
+          <a:fontRef idx="minor">
+            <a:schemeClr val="lt1"/>
+          </a:fontRef>
+        </p:style>
+        <p:txBody>
+          <a:bodyPr rtlCol="0" anchor="ctr"/>
+          <a:lstStyle/>
+          <a:p>
+            <a:pPr algn="ctr"/>
+          </a:p>
+        </p:txBody>
+      </p:sp>
+      <p:sp>
+        <p:nvSpPr>
+          <p:cNvPr id="11" name="TextBox 11"/>
+          <p:cNvSpPr txBox="1"/>
+          <p:nvPr/>
+        </p:nvSpPr>
+        <p:spPr>
+          <a:xfrm>
+            <a:off x="868680" y="4170000"/>
+            <a:ext cx="2997098" cy="1250000"/>
+          </a:xfrm>
+          <a:prstGeom prst="rect">
+            <a:avLst/>
+          </a:prstGeom>
+          <a:noFill/>
+        </p:spPr>
+        <p:txBody>
+          <a:bodyPr wrap="square" anchor="t" lIns="0" rIns="0" tIns="0" bIns="0"/>
+          <a:lstStyle/>
+          <a:p>
+            <a:pPr algn="l">
+              <a:lnSpc>
+                <a:spcPct val="105000"/>
+              </a:lnSpc>
+              <a:spcBef>
+                <a:spcPts val="0"/>
+              </a:spcBef>
+              <a:spcAft>
+                <a:spcPts val="600"/>
+              </a:spcAft>
+            </a:pPr>
+            <a:r>
+              <a:rPr sz="1700" b="1">
+                <a:solidFill>
+                  <a:srgbClr val="3FB950"/>
+                </a:solidFill>
+                <a:latin typeface="Avenir Next"/>
+              </a:rPr>
+              <a:t>Games first</a:t>
+            </a:r>
+          </a:p>
+          <a:p>
+            <a:pPr algn="l">
+              <a:lnSpc>
+                <a:spcPct val="118000"/>
+              </a:lnSpc>
+              <a:spcBef>
+                <a:spcPts val="0"/>
+              </a:spcBef>
+              <a:spcAft>
+                <a:spcPts val="0"/>
+              </a:spcAft>
+            </a:pPr>
+            <a:r>
+              <a:rPr sz="1400" b="0">
+                <a:solidFill>
+                  <a:srgbClr val="8B949E"/>
+                </a:solidFill>
+                <a:latin typeface="Avenir Next"/>
+              </a:rPr>
+              <a:t>Graphics, audio, input, 2D and 3D game systems are the core of the runtime.</a:t>
+            </a:r>
+          </a:p>
+        </p:txBody>
+      </p:sp>
+      <p:sp>
+        <p:nvSpPr>
+          <p:cNvPr id="12" name="Card 12"/>
+          <p:cNvSpPr/>
+          <p:nvPr/>
+        </p:nvSpPr>
+        <p:spPr>
+          <a:xfrm>
+            <a:off x="4368698" y="3850000"/>
+            <a:ext cx="3454298" cy="1750000"/>
+          </a:xfrm>
+          <a:prstGeom prst="roundRect">
+            <a:avLst>
+              <a:gd name="adj" fmla="val 4200"/>
+            </a:avLst>
+          </a:prstGeom>
+          <a:solidFill>
+            <a:srgbClr val="0A0E14"/>
+          </a:solidFill>
+          <a:ln w="12700">
+            <a:solidFill>
+              <a:srgbClr val="30363D"/>
+            </a:solidFill>
+          </a:ln>
+          <a:effectLst/>
+        </p:spPr>
+        <p:style>
+          <a:lnRef idx="1">
+            <a:schemeClr val="accent1"/>
+          </a:lnRef>
+          <a:fillRef idx="3">
+            <a:schemeClr val="accent1"/>
+          </a:fillRef>
+          <a:effectRef idx="2">
+            <a:schemeClr val="accent1"/>
+          </a:effectRef>
+          <a:fontRef idx="minor">
+            <a:schemeClr val="lt1"/>
+          </a:fontRef>
+        </p:style>
+        <p:txBody>
+          <a:bodyPr rtlCol="0" anchor="ctr"/>
+          <a:lstStyle/>
+          <a:p>
+            <a:pPr algn="ctr"/>
+          </a:p>
+        </p:txBody>
+      </p:sp>
+      <p:sp>
+        <p:nvSpPr>
+          <p:cNvPr id="13" name="TextBox 13"/>
+          <p:cNvSpPr txBox="1"/>
+          <p:nvPr/>
+        </p:nvSpPr>
+        <p:spPr>
+          <a:xfrm>
+            <a:off x="4597298" y="4170000"/>
+            <a:ext cx="2997098" cy="1250000"/>
+          </a:xfrm>
+          <a:prstGeom prst="rect">
+            <a:avLst/>
+          </a:prstGeom>
+          <a:noFill/>
+        </p:spPr>
+        <p:txBody>
+          <a:bodyPr wrap="square" anchor="t" lIns="0" rIns="0" tIns="0" bIns="0"/>
+          <a:lstStyle/>
+          <a:p>
+            <a:pPr algn="l">
+              <a:lnSpc>
+                <a:spcPct val="105000"/>
+              </a:lnSpc>
+              <a:spcBef>
+                <a:spcPts val="0"/>
+              </a:spcBef>
+              <a:spcAft>
+                <a:spcPts val="600"/>
+              </a:spcAft>
+            </a:pPr>
+            <a:r>
+              <a:rPr sz="1700" b="1">
+                <a:solidFill>
+                  <a:srgbClr val="3FB950"/>
+                </a:solidFill>
+                <a:latin typeface="Avenir Next"/>
+              </a:rPr>
+              <a:t>General purpose</a:t>
+            </a:r>
+          </a:p>
+          <a:p>
+            <a:pPr algn="l">
+              <a:lnSpc>
+                <a:spcPct val="118000"/>
+              </a:lnSpc>
+              <a:spcBef>
+                <a:spcPts val="0"/>
+              </a:spcBef>
+              <a:spcAft>
+                <a:spcPts val="0"/>
+              </a:spcAft>
+            </a:pPr>
+            <a:r>
+              <a:rPr sz="1400" b="0">
+                <a:solidFill>
+                  <a:srgbClr val="8B949E"/>
+                </a:solidFill>
+                <a:latin typeface="Avenir Next"/>
+              </a:rPr>
+              <a:t>The same compiler, languages, and runtime handle ordinary apps and tools too.</a:t>
+            </a:r>
+          </a:p>
+        </p:txBody>
+      </p:sp>
+      <p:sp>
+        <p:nvSpPr>
+          <p:cNvPr id="14" name="Card 14"/>
+          <p:cNvSpPr/>
+          <p:nvPr/>
+        </p:nvSpPr>
+        <p:spPr>
+          <a:xfrm>
+            <a:off x="8097316" y="3850000"/>
+            <a:ext cx="3454298" cy="1750000"/>
+          </a:xfrm>
+          <a:prstGeom prst="roundRect">
+            <a:avLst>
+              <a:gd name="adj" fmla="val 4200"/>
+            </a:avLst>
+          </a:prstGeom>
+          <a:solidFill>
+            <a:srgbClr val="0A0E14"/>
+          </a:solidFill>
+          <a:ln w="12700">
+            <a:solidFill>
+              <a:srgbClr val="30363D"/>
+            </a:solidFill>
+          </a:ln>
+          <a:effectLst/>
+        </p:spPr>
+        <p:style>
+          <a:lnRef idx="1">
+            <a:schemeClr val="accent1"/>
+          </a:lnRef>
+          <a:fillRef idx="3">
+            <a:schemeClr val="accent1"/>
+          </a:fillRef>
+          <a:effectRef idx="2">
+            <a:schemeClr val="accent1"/>
+          </a:effectRef>
+          <a:fontRef idx="minor">
+            <a:schemeClr val="lt1"/>
+          </a:fontRef>
+        </p:style>
+        <p:txBody>
+          <a:bodyPr rtlCol="0" anchor="ctr"/>
+          <a:lstStyle/>
+          <a:p>
+            <a:pPr algn="ctr"/>
+          </a:p>
+        </p:txBody>
+      </p:sp>
+      <p:sp>
+        <p:nvSpPr>
+          <p:cNvPr id="15" name="TextBox 15"/>
+          <p:cNvSpPr txBox="1"/>
+          <p:nvPr/>
+        </p:nvSpPr>
+        <p:spPr>
+          <a:xfrm>
+            <a:off x="8325916" y="4170000"/>
+            <a:ext cx="2997098" cy="1250000"/>
+          </a:xfrm>
+          <a:prstGeom prst="rect">
+            <a:avLst/>
+          </a:prstGeom>
+          <a:noFill/>
+        </p:spPr>
+        <p:txBody>
+          <a:bodyPr wrap="square" anchor="t" lIns="0" rIns="0" tIns="0" bIns="0"/>
+          <a:lstStyle/>
+          <a:p>
+            <a:pPr algn="l">
+              <a:lnSpc>
+                <a:spcPct val="105000"/>
+              </a:lnSpc>
+              <a:spcBef>
+                <a:spcPts val="0"/>
+              </a:spcBef>
+              <a:spcAft>
+                <a:spcPts val="600"/>
+              </a:spcAft>
+            </a:pPr>
+            <a:r>
+              <a:rPr sz="1700" b="1">
+                <a:solidFill>
+                  <a:srgbClr val="3FB950"/>
+                </a:solidFill>
+                <a:latin typeface="Avenir Next"/>
+              </a:rPr>
+              <a:t>One whole stack</a:t>
+            </a:r>
+          </a:p>
+          <a:p>
+            <a:pPr algn="l">
+              <a:lnSpc>
+                <a:spcPct val="118000"/>
+              </a:lnSpc>
+              <a:spcBef>
+                <a:spcPts val="0"/>
+              </a:spcBef>
+              <a:spcAft>
+                <a:spcPts val="0"/>
+              </a:spcAft>
+            </a:pPr>
+            <a:r>
+              <a:rPr sz="1400" b="0">
+                <a:solidFill>
+                  <a:srgbClr val="8B949E"/>
+                </a:solidFill>
+                <a:latin typeface="Avenir Next"/>
+              </a:rPr>
+              <a:t>Compiler, VM, native backends, and runtime are all part of Viper itself.</a:t>
+            </a:r>
+          </a:p>
+        </p:txBody>
+      </p:sp>
+      <p:sp>
+        <p:nvSpPr>
+          <p:cNvPr id="90" name="TextBox 90"/>
+          <p:cNvSpPr txBox="1"/>
+          <p:nvPr/>
+        </p:nvSpPr>
+        <p:spPr>
+          <a:xfrm>
+            <a:off x="10637215" y="420624"/>
+            <a:ext cx="914400" cy="274320"/>
+          </a:xfrm>
+          <a:prstGeom prst="rect">
+            <a:avLst/>
+          </a:prstGeom>
+          <a:noFill/>
+        </p:spPr>
+        <p:txBody>
+          <a:bodyPr wrap="square" anchor="t" lIns="0" rIns="0" tIns="0" bIns="0"/>
+          <a:lstStyle/>
+          <a:p>
+            <a:pPr algn="r">
+              <a:lnSpc>
+                <a:spcPct val="105000"/>
+              </a:lnSpc>
+              <a:spcBef>
+                <a:spcPts val="0"/>
+              </a:spcBef>
+              <a:spcAft>
+                <a:spcPts val="0"/>
+              </a:spcAft>
+            </a:pPr>
+            <a:r>
+              <a:rPr sz="1050" b="0">
+                <a:solidFill>
+                  <a:srgbClr val="8B949E"/>
+                </a:solidFill>
+                <a:latin typeface="Avenir Next"/>
+              </a:rPr>
+              <a:t>03 / 17</a:t>
             </a:r>
           </a:p>
         </p:txBody>
@@ -7358,7 +11038,7 @@
                 </a:solidFill>
                 <a:latin typeface="Avenir Next"/>
               </a:rPr>
-              <a:t>02 / 12</a:t>
+              <a:t>04 / 17</a:t>
             </a:r>
           </a:p>
         </p:txBody>
@@ -7554,7 +11234,7 @@
                 </a:solidFill>
                 <a:latin typeface="Avenir Next"/>
               </a:rPr>
-              <a:t>One IL. Many languages. Native everywhere.</a:t>
+              <a:t>One IL. Many languages. VM and native targets.</a:t>
             </a:r>
           </a:p>
         </p:txBody>
@@ -7791,8 +11471,8 @@
         </p:nvSpPr>
         <p:spPr>
           <a:xfrm>
-            <a:off x="7178040" y="2240280"/>
-            <a:ext cx="4370832" cy="3383280"/>
+            <a:off x="7178040" y="2057400"/>
+            <a:ext cx="4370832" cy="3779520"/>
           </a:xfrm>
           <a:prstGeom prst="roundRect">
             <a:avLst>
@@ -7845,7 +11525,7 @@
                 </a:solidFill>
                 <a:latin typeface="Avenir Next"/>
               </a:rPr>
-              <a:t>Built from scratch</a:t>
+              <a:t>Self-contained stack</a:t>
             </a:r>
           </a:p>
           <a:p>
@@ -7867,7 +11547,7 @@
                 </a:solidFill>
                 <a:latin typeface="Avenir Next"/>
               </a:rPr>
-              <a:t>Compiler · VM · assembler · linker · runtime — every layer is ours.</a:t>
+              <a:t>Every layer of the stack is implemented in the Viper repo.</a:t>
             </a:r>
           </a:p>
           <a:p>
@@ -7889,7 +11569,7 @@
                 </a:solidFill>
                 <a:latin typeface="Avenir Next"/>
               </a:rPr>
-              <a:t>✗  </a:t>
+              <a:t>✓  </a:t>
             </a:r>
             <a:r>
               <a:rPr sz="1550" b="0">
@@ -7898,7 +11578,7 @@
                 </a:solidFill>
                 <a:latin typeface="Avenir Next"/>
               </a:rPr>
-              <a:t>No SDL or graphics middleware</a:t>
+              <a:t>Compiler, VM, assembler, linker, runtime in-tree</a:t>
             </a:r>
           </a:p>
           <a:p>
@@ -7920,7 +11600,7 @@
                 </a:solidFill>
                 <a:latin typeface="Avenir Next"/>
               </a:rPr>
-              <a:t>✗  </a:t>
+              <a:t>✓  </a:t>
             </a:r>
             <a:r>
               <a:rPr sz="1550" b="0">
@@ -7929,7 +11609,7 @@
                 </a:solidFill>
                 <a:latin typeface="Avenir Next"/>
               </a:rPr>
-              <a:t>No LLVM or external codegen</a:t>
+              <a:t>Native code generation without LLVM</a:t>
             </a:r>
           </a:p>
           <a:p>
@@ -7951,7 +11631,7 @@
                 </a:solidFill>
                 <a:latin typeface="Avenir Next"/>
               </a:rPr>
-              <a:t>✗  </a:t>
+              <a:t>✓  </a:t>
             </a:r>
             <a:r>
               <a:rPr sz="1550" b="0">
@@ -7960,7 +11640,7 @@
                 </a:solidFill>
                 <a:latin typeface="Avenir Next"/>
               </a:rPr>
-              <a:t>No Boost · zlib · OpenSSL</a:t>
+              <a:t>Custom runtime and graphics layers</a:t>
             </a:r>
           </a:p>
           <a:p>
@@ -7982,7 +11662,7 @@
                 </a:solidFill>
                 <a:latin typeface="Avenir Next"/>
               </a:rPr>
-              <a:t>✗  </a:t>
+              <a:t>✓  </a:t>
             </a:r>
             <a:r>
               <a:rPr sz="1550" b="0">
@@ -7991,7 +11671,7 @@
                 </a:solidFill>
                 <a:latin typeface="Avenir Next"/>
               </a:rPr>
-              <a:t>No third-party runtime stack</a:t>
+              <a:t>Minimal third-party dependencies</a:t>
             </a:r>
           </a:p>
         </p:txBody>
@@ -8036,7 +11716,7 @@
                 </a:solidFill>
                 <a:latin typeface="Avenir Next"/>
               </a:rPr>
-              <a:t>03 / 12</a:t>
+              <a:t>05 / 17</a:t>
             </a:r>
           </a:p>
         </p:txBody>
@@ -8308,7 +11988,7 @@
                 </a:solidFill>
                 <a:latin typeface="Avenir Next"/>
               </a:rPr>
-              <a:t>   the flagship language</a:t>
+              <a:t>   the main language</a:t>
             </a:r>
           </a:p>
           <a:p>
@@ -8330,7 +12010,7 @@
                 </a:solidFill>
                 <a:latin typeface="Avenir Next"/>
               </a:rPr>
-              <a:t>Modern, statically typed — designed for real apps and games.</a:t>
+              <a:t>Modern, statically typed — designed for apps and games.</a:t>
             </a:r>
           </a:p>
           <a:p>
@@ -8775,7 +12455,7 @@
                 </a:solidFill>
                 <a:latin typeface="Avenir Next"/>
               </a:rPr>
-              <a:t>04 / 12</a:t>
+              <a:t>06 / 17</a:t>
             </a:r>
           </a:p>
         </p:txBody>
@@ -9079,11 +12759,38 @@
             <a:r>
               <a:rPr sz="1350" b="0">
                 <a:solidFill>
-                  <a:srgbClr val="E6EDF3"/>
-                </a:solidFill>
-                <a:latin typeface="Menlo"/>
-              </a:rPr>
-              <a:t>module Hello;</a:t>
+                  <a:srgbClr val="FF7B72"/>
+                </a:solidFill>
+                <a:latin typeface="Menlo"/>
+              </a:rPr>
+              <a:t>module</a:t>
+            </a:r>
+            <a:r>
+              <a:rPr sz="1350" b="0">
+                <a:solidFill>
+                  <a:srgbClr val="E6EDF3"/>
+                </a:solidFill>
+                <a:latin typeface="Menlo"/>
+              </a:rPr>
+              <a:t> </a:t>
+            </a:r>
+            <a:r>
+              <a:rPr sz="1350" b="0">
+                <a:solidFill>
+                  <a:srgbClr val="E6EDF3"/>
+                </a:solidFill>
+                <a:latin typeface="Menlo"/>
+              </a:rPr>
+              <a:t>Hello</a:t>
+            </a:r>
+            <a:r>
+              <a:rPr sz="1350" b="0">
+                <a:solidFill>
+                  <a:srgbClr val="E6EDF3"/>
+                </a:solidFill>
+                <a:latin typeface="Menlo"/>
+              </a:rPr>
+              <a:t>;</a:t>
             </a:r>
           </a:p>
           <a:p>
@@ -9123,11 +12830,92 @@
             <a:r>
               <a:rPr sz="1350" b="0">
                 <a:solidFill>
-                  <a:srgbClr val="E6EDF3"/>
-                </a:solidFill>
-                <a:latin typeface="Menlo"/>
-              </a:rPr>
-              <a:t>bind Viper.Terminal as Terminal;</a:t>
+                  <a:srgbClr val="FF7B72"/>
+                </a:solidFill>
+                <a:latin typeface="Menlo"/>
+              </a:rPr>
+              <a:t>bind</a:t>
+            </a:r>
+            <a:r>
+              <a:rPr sz="1350" b="0">
+                <a:solidFill>
+                  <a:srgbClr val="E6EDF3"/>
+                </a:solidFill>
+                <a:latin typeface="Menlo"/>
+              </a:rPr>
+              <a:t> </a:t>
+            </a:r>
+            <a:r>
+              <a:rPr sz="1350" b="0">
+                <a:solidFill>
+                  <a:srgbClr val="3FB950"/>
+                </a:solidFill>
+                <a:latin typeface="Menlo"/>
+              </a:rPr>
+              <a:t>Viper</a:t>
+            </a:r>
+            <a:r>
+              <a:rPr sz="1350" b="0">
+                <a:solidFill>
+                  <a:srgbClr val="E6EDF3"/>
+                </a:solidFill>
+                <a:latin typeface="Menlo"/>
+              </a:rPr>
+              <a:t>.</a:t>
+            </a:r>
+            <a:r>
+              <a:rPr sz="1350" b="0">
+                <a:solidFill>
+                  <a:srgbClr val="3FB950"/>
+                </a:solidFill>
+                <a:latin typeface="Menlo"/>
+              </a:rPr>
+              <a:t>Terminal</a:t>
+            </a:r>
+            <a:r>
+              <a:rPr sz="1350" b="0">
+                <a:solidFill>
+                  <a:srgbClr val="E6EDF3"/>
+                </a:solidFill>
+                <a:latin typeface="Menlo"/>
+              </a:rPr>
+              <a:t> </a:t>
+            </a:r>
+            <a:r>
+              <a:rPr sz="1350" b="0">
+                <a:solidFill>
+                  <a:srgbClr val="FF7B72"/>
+                </a:solidFill>
+                <a:latin typeface="Menlo"/>
+              </a:rPr>
+              <a:t>as</a:t>
+            </a:r>
+            <a:r>
+              <a:rPr sz="1350" b="0">
+                <a:solidFill>
+                  <a:srgbClr val="E6EDF3"/>
+                </a:solidFill>
+                <a:latin typeface="Menlo"/>
+              </a:rPr>
+              <a:t> </a:t>
+            </a:r>
+            <a:r>
+              <a:rPr sz="1350" b="0">
+                <a:solidFill>
+                  <a:srgbClr val="3FB950"/>
+                </a:solidFill>
+                <a:latin typeface="Menlo"/>
+              </a:rPr>
+              <a:t>Terminal</a:t>
+            </a:r>
+            <a:r>
+              <a:rPr sz="1350" b="0">
+                <a:solidFill>
+                  <a:srgbClr val="E6EDF3"/>
+                </a:solidFill>
+                <a:latin typeface="Menlo"/>
+              </a:rPr>
+              <a:t>;</a:t>
             </a:r>
           </a:p>
           <a:p>
@@ -9145,11 +12933,110 @@
             <a:r>
               <a:rPr sz="1350" b="0">
                 <a:solidFill>
-                  <a:srgbClr val="E6EDF3"/>
-                </a:solidFill>
-                <a:latin typeface="Menlo"/>
-              </a:rPr>
-              <a:t>bind Viper.Text.Fmt as Fmt;</a:t>
+                  <a:srgbClr val="FF7B72"/>
+                </a:solidFill>
+                <a:latin typeface="Menlo"/>
+              </a:rPr>
+              <a:t>bind</a:t>
+            </a:r>
+            <a:r>
+              <a:rPr sz="1350" b="0">
+                <a:solidFill>
+                  <a:srgbClr val="E6EDF3"/>
+                </a:solidFill>
+                <a:latin typeface="Menlo"/>
+              </a:rPr>
+              <a:t> </a:t>
+            </a:r>
+            <a:r>
+              <a:rPr sz="1350" b="0">
+                <a:solidFill>
+                  <a:srgbClr val="3FB950"/>
+                </a:solidFill>
+                <a:latin typeface="Menlo"/>
+              </a:rPr>
+              <a:t>Viper</a:t>
+            </a:r>
+            <a:r>
+              <a:rPr sz="1350" b="0">
+                <a:solidFill>
+                  <a:srgbClr val="E6EDF3"/>
+                </a:solidFill>
+                <a:latin typeface="Menlo"/>
+              </a:rPr>
+              <a:t>.</a:t>
+            </a:r>
+            <a:r>
+              <a:rPr sz="1350" b="0">
+                <a:solidFill>
+                  <a:srgbClr val="3FB950"/>
+                </a:solidFill>
+                <a:latin typeface="Menlo"/>
+              </a:rPr>
+              <a:t>Text</a:t>
+            </a:r>
+            <a:r>
+              <a:rPr sz="1350" b="0">
+                <a:solidFill>
+                  <a:srgbClr val="E6EDF3"/>
+                </a:solidFill>
+                <a:latin typeface="Menlo"/>
+              </a:rPr>
+              <a:t>.</a:t>
+            </a:r>
+            <a:r>
+              <a:rPr sz="1350" b="0">
+                <a:solidFill>
+                  <a:srgbClr val="3FB950"/>
+                </a:solidFill>
+                <a:latin typeface="Menlo"/>
+              </a:rPr>
+              <a:t>Fmt</a:t>
+            </a:r>
+            <a:r>
+              <a:rPr sz="1350" b="0">
+                <a:solidFill>
+                  <a:srgbClr val="E6EDF3"/>
+                </a:solidFill>
+                <a:latin typeface="Menlo"/>
+              </a:rPr>
+              <a:t> </a:t>
+            </a:r>
+            <a:r>
+              <a:rPr sz="1350" b="0">
+                <a:solidFill>
+                  <a:srgbClr val="FF7B72"/>
+                </a:solidFill>
+                <a:latin typeface="Menlo"/>
+              </a:rPr>
+              <a:t>as</a:t>
+            </a:r>
+            <a:r>
+              <a:rPr sz="1350" b="0">
+                <a:solidFill>
+                  <a:srgbClr val="E6EDF3"/>
+                </a:solidFill>
+                <a:latin typeface="Menlo"/>
+              </a:rPr>
+              <a:t> </a:t>
+            </a:r>
+            <a:r>
+              <a:rPr sz="1350" b="0">
+                <a:solidFill>
+                  <a:srgbClr val="3FB950"/>
+                </a:solidFill>
+                <a:latin typeface="Menlo"/>
+              </a:rPr>
+              <a:t>Fmt</a:t>
+            </a:r>
+            <a:r>
+              <a:rPr sz="1350" b="0">
+                <a:solidFill>
+                  <a:srgbClr val="E6EDF3"/>
+                </a:solidFill>
+                <a:latin typeface="Menlo"/>
+              </a:rPr>
+              <a:t>;</a:t>
             </a:r>
           </a:p>
           <a:p>
@@ -9189,11 +13076,56 @@
             <a:r>
               <a:rPr sz="1350" b="0">
                 <a:solidFill>
-                  <a:srgbClr val="E6EDF3"/>
-                </a:solidFill>
-                <a:latin typeface="Menlo"/>
-              </a:rPr>
-              <a:t>func start() {</a:t>
+                  <a:srgbClr val="FF7B72"/>
+                </a:solidFill>
+                <a:latin typeface="Menlo"/>
+              </a:rPr>
+              <a:t>func</a:t>
+            </a:r>
+            <a:r>
+              <a:rPr sz="1350" b="0">
+                <a:solidFill>
+                  <a:srgbClr val="E6EDF3"/>
+                </a:solidFill>
+                <a:latin typeface="Menlo"/>
+              </a:rPr>
+              <a:t> </a:t>
+            </a:r>
+            <a:r>
+              <a:rPr sz="1350" b="0">
+                <a:solidFill>
+                  <a:srgbClr val="E6EDF3"/>
+                </a:solidFill>
+                <a:latin typeface="Menlo"/>
+              </a:rPr>
+              <a:t>start</a:t>
+            </a:r>
+            <a:r>
+              <a:rPr sz="1350" b="0">
+                <a:solidFill>
+                  <a:srgbClr val="E6EDF3"/>
+                </a:solidFill>
+                <a:latin typeface="Menlo"/>
+              </a:rPr>
+              <a:t>()</a:t>
+            </a:r>
+            <a:r>
+              <a:rPr sz="1350" b="0">
+                <a:solidFill>
+                  <a:srgbClr val="E6EDF3"/>
+                </a:solidFill>
+                <a:latin typeface="Menlo"/>
+              </a:rPr>
+              <a:t> </a:t>
+            </a:r>
+            <a:r>
+              <a:rPr sz="1350" b="0">
+                <a:solidFill>
+                  <a:srgbClr val="E6EDF3"/>
+                </a:solidFill>
+                <a:latin typeface="Menlo"/>
+              </a:rPr>
+              <a:t>{</a:t>
             </a:r>
           </a:p>
           <a:p>
@@ -9215,7 +13147,115 @@
                 </a:solidFill>
                 <a:latin typeface="Menlo"/>
               </a:rPr>
-              <a:t>    var x = 2 + 3;</a:t>
+              <a:t>    </a:t>
+            </a:r>
+            <a:r>
+              <a:rPr sz="1350" b="0">
+                <a:solidFill>
+                  <a:srgbClr val="FF7B72"/>
+                </a:solidFill>
+                <a:latin typeface="Menlo"/>
+              </a:rPr>
+              <a:t>var</a:t>
+            </a:r>
+            <a:r>
+              <a:rPr sz="1350" b="0">
+                <a:solidFill>
+                  <a:srgbClr val="E6EDF3"/>
+                </a:solidFill>
+                <a:latin typeface="Menlo"/>
+              </a:rPr>
+              <a:t> </a:t>
+            </a:r>
+            <a:r>
+              <a:rPr sz="1350" b="0">
+                <a:solidFill>
+                  <a:srgbClr val="E6EDF3"/>
+                </a:solidFill>
+                <a:latin typeface="Menlo"/>
+              </a:rPr>
+              <a:t>x</a:t>
+            </a:r>
+            <a:r>
+              <a:rPr sz="1350" b="0">
+                <a:solidFill>
+                  <a:srgbClr val="E6EDF3"/>
+                </a:solidFill>
+                <a:latin typeface="Menlo"/>
+              </a:rPr>
+              <a:t> </a:t>
+            </a:r>
+            <a:r>
+              <a:rPr sz="1350" b="0">
+                <a:solidFill>
+                  <a:srgbClr val="FF7B72"/>
+                </a:solidFill>
+                <a:latin typeface="Menlo"/>
+              </a:rPr>
+              <a:t>=</a:t>
+            </a:r>
+            <a:r>
+              <a:rPr sz="1350" b="0">
+                <a:solidFill>
+                  <a:srgbClr val="E6EDF3"/>
+                </a:solidFill>
+                <a:latin typeface="Menlo"/>
+              </a:rPr>
+              <a:t> </a:t>
+            </a:r>
+            <a:r>
+              <a:rPr sz="1350" b="0">
+                <a:solidFill>
+                  <a:srgbClr val="79C0FF"/>
+                </a:solidFill>
+                <a:latin typeface="Menlo"/>
+              </a:rPr>
+              <a:t>2</a:t>
+            </a:r>
+            <a:r>
+              <a:rPr sz="1350" b="0">
+                <a:solidFill>
+                  <a:srgbClr val="E6EDF3"/>
+                </a:solidFill>
+                <a:latin typeface="Menlo"/>
+              </a:rPr>
+              <a:t> </a:t>
+            </a:r>
+            <a:r>
+              <a:rPr sz="1350" b="0">
+                <a:solidFill>
+                  <a:srgbClr val="FF7B72"/>
+                </a:solidFill>
+                <a:latin typeface="Menlo"/>
+              </a:rPr>
+              <a:t>+</a:t>
+            </a:r>
+            <a:r>
+              <a:rPr sz="1350" b="0">
+                <a:solidFill>
+                  <a:srgbClr val="E6EDF3"/>
+                </a:solidFill>
+                <a:latin typeface="Menlo"/>
+              </a:rPr>
+              <a:t> </a:t>
+            </a:r>
+            <a:r>
+              <a:rPr sz="1350" b="0">
+                <a:solidFill>
+                  <a:srgbClr val="79C0FF"/>
+                </a:solidFill>
+                <a:latin typeface="Menlo"/>
+              </a:rPr>
+              <a:t>3</a:t>
+            </a:r>
+            <a:r>
+              <a:rPr sz="1350" b="0">
+                <a:solidFill>
+                  <a:srgbClr val="E6EDF3"/>
+                </a:solidFill>
+                <a:latin typeface="Menlo"/>
+              </a:rPr>
+              <a:t>;</a:t>
             </a:r>
           </a:p>
           <a:p>
@@ -9237,7 +13277,115 @@
                 </a:solidFill>
                 <a:latin typeface="Menlo"/>
               </a:rPr>
-              <a:t>    var y = x * 2;</a:t>
+              <a:t>    </a:t>
+            </a:r>
+            <a:r>
+              <a:rPr sz="1350" b="0">
+                <a:solidFill>
+                  <a:srgbClr val="FF7B72"/>
+                </a:solidFill>
+                <a:latin typeface="Menlo"/>
+              </a:rPr>
+              <a:t>var</a:t>
+            </a:r>
+            <a:r>
+              <a:rPr sz="1350" b="0">
+                <a:solidFill>
+                  <a:srgbClr val="E6EDF3"/>
+                </a:solidFill>
+                <a:latin typeface="Menlo"/>
+              </a:rPr>
+              <a:t> </a:t>
+            </a:r>
+            <a:r>
+              <a:rPr sz="1350" b="0">
+                <a:solidFill>
+                  <a:srgbClr val="E6EDF3"/>
+                </a:solidFill>
+                <a:latin typeface="Menlo"/>
+              </a:rPr>
+              <a:t>y</a:t>
+            </a:r>
+            <a:r>
+              <a:rPr sz="1350" b="0">
+                <a:solidFill>
+                  <a:srgbClr val="E6EDF3"/>
+                </a:solidFill>
+                <a:latin typeface="Menlo"/>
+              </a:rPr>
+              <a:t> </a:t>
+            </a:r>
+            <a:r>
+              <a:rPr sz="1350" b="0">
+                <a:solidFill>
+                  <a:srgbClr val="FF7B72"/>
+                </a:solidFill>
+                <a:latin typeface="Menlo"/>
+              </a:rPr>
+              <a:t>=</a:t>
+            </a:r>
+            <a:r>
+              <a:rPr sz="1350" b="0">
+                <a:solidFill>
+                  <a:srgbClr val="E6EDF3"/>
+                </a:solidFill>
+                <a:latin typeface="Menlo"/>
+              </a:rPr>
+              <a:t> </a:t>
+            </a:r>
+            <a:r>
+              <a:rPr sz="1350" b="0">
+                <a:solidFill>
+                  <a:srgbClr val="E6EDF3"/>
+                </a:solidFill>
+                <a:latin typeface="Menlo"/>
+              </a:rPr>
+              <a:t>x</a:t>
+            </a:r>
+            <a:r>
+              <a:rPr sz="1350" b="0">
+                <a:solidFill>
+                  <a:srgbClr val="E6EDF3"/>
+                </a:solidFill>
+                <a:latin typeface="Menlo"/>
+              </a:rPr>
+              <a:t> </a:t>
+            </a:r>
+            <a:r>
+              <a:rPr sz="1350" b="0">
+                <a:solidFill>
+                  <a:srgbClr val="FF7B72"/>
+                </a:solidFill>
+                <a:latin typeface="Menlo"/>
+              </a:rPr>
+              <a:t>*</a:t>
+            </a:r>
+            <a:r>
+              <a:rPr sz="1350" b="0">
+                <a:solidFill>
+                  <a:srgbClr val="E6EDF3"/>
+                </a:solidFill>
+                <a:latin typeface="Menlo"/>
+              </a:rPr>
+              <a:t> </a:t>
+            </a:r>
+            <a:r>
+              <a:rPr sz="1350" b="0">
+                <a:solidFill>
+                  <a:srgbClr val="79C0FF"/>
+                </a:solidFill>
+                <a:latin typeface="Menlo"/>
+              </a:rPr>
+              <a:t>2</a:t>
+            </a:r>
+            <a:r>
+              <a:rPr sz="1350" b="0">
+                <a:solidFill>
+                  <a:srgbClr val="E6EDF3"/>
+                </a:solidFill>
+                <a:latin typeface="Menlo"/>
+              </a:rPr>
+              <a:t>;</a:t>
             </a:r>
           </a:p>
           <a:p>
@@ -9259,7 +13407,61 @@
                 </a:solidFill>
                 <a:latin typeface="Menlo"/>
               </a:rPr>
-              <a:t>    Terminal.Say("HELLO");</a:t>
+              <a:t>    </a:t>
+            </a:r>
+            <a:r>
+              <a:rPr sz="1350" b="0">
+                <a:solidFill>
+                  <a:srgbClr val="3FB950"/>
+                </a:solidFill>
+                <a:latin typeface="Menlo"/>
+              </a:rPr>
+              <a:t>Terminal</a:t>
+            </a:r>
+            <a:r>
+              <a:rPr sz="1350" b="0">
+                <a:solidFill>
+                  <a:srgbClr val="E6EDF3"/>
+                </a:solidFill>
+                <a:latin typeface="Menlo"/>
+              </a:rPr>
+              <a:t>.</a:t>
+            </a:r>
+            <a:r>
+              <a:rPr sz="1350" b="0">
+                <a:solidFill>
+                  <a:srgbClr val="D2A8FF"/>
+                </a:solidFill>
+                <a:latin typeface="Menlo"/>
+              </a:rPr>
+              <a:t>Say</a:t>
+            </a:r>
+            <a:r>
+              <a:rPr sz="1350" b="0">
+                <a:solidFill>
+                  <a:srgbClr val="E6EDF3"/>
+                </a:solidFill>
+                <a:latin typeface="Menlo"/>
+              </a:rPr>
+              <a:t>(</a:t>
+            </a:r>
+            <a:r>
+              <a:rPr sz="1350" b="0">
+                <a:solidFill>
+                  <a:srgbClr val="A5D6FF"/>
+                </a:solidFill>
+                <a:latin typeface="Menlo"/>
+              </a:rPr>
+              <a:t>"HELLO"</a:t>
+            </a:r>
+            <a:r>
+              <a:rPr sz="1350" b="0">
+                <a:solidFill>
+                  <a:srgbClr val="E6EDF3"/>
+                </a:solidFill>
+                <a:latin typeface="Menlo"/>
+              </a:rPr>
+              <a:t>);</a:t>
             </a:r>
           </a:p>
           <a:p>
@@ -9281,7 +13483,97 @@
                 </a:solidFill>
                 <a:latin typeface="Menlo"/>
               </a:rPr>
-              <a:t>    Terminal.Say(Fmt.Int(y));</a:t>
+              <a:t>    </a:t>
+            </a:r>
+            <a:r>
+              <a:rPr sz="1350" b="0">
+                <a:solidFill>
+                  <a:srgbClr val="3FB950"/>
+                </a:solidFill>
+                <a:latin typeface="Menlo"/>
+              </a:rPr>
+              <a:t>Terminal</a:t>
+            </a:r>
+            <a:r>
+              <a:rPr sz="1350" b="0">
+                <a:solidFill>
+                  <a:srgbClr val="E6EDF3"/>
+                </a:solidFill>
+                <a:latin typeface="Menlo"/>
+              </a:rPr>
+              <a:t>.</a:t>
+            </a:r>
+            <a:r>
+              <a:rPr sz="1350" b="0">
+                <a:solidFill>
+                  <a:srgbClr val="D2A8FF"/>
+                </a:solidFill>
+                <a:latin typeface="Menlo"/>
+              </a:rPr>
+              <a:t>Say</a:t>
+            </a:r>
+            <a:r>
+              <a:rPr sz="1350" b="0">
+                <a:solidFill>
+                  <a:srgbClr val="E6EDF3"/>
+                </a:solidFill>
+                <a:latin typeface="Menlo"/>
+              </a:rPr>
+              <a:t>(</a:t>
+            </a:r>
+            <a:r>
+              <a:rPr sz="1350" b="0">
+                <a:solidFill>
+                  <a:srgbClr val="3FB950"/>
+                </a:solidFill>
+                <a:latin typeface="Menlo"/>
+              </a:rPr>
+              <a:t>Fmt</a:t>
+            </a:r>
+            <a:r>
+              <a:rPr sz="1350" b="0">
+                <a:solidFill>
+                  <a:srgbClr val="E6EDF3"/>
+                </a:solidFill>
+                <a:latin typeface="Menlo"/>
+              </a:rPr>
+              <a:t>.</a:t>
+            </a:r>
+            <a:r>
+              <a:rPr sz="1350" b="0">
+                <a:solidFill>
+                  <a:srgbClr val="D2A8FF"/>
+                </a:solidFill>
+                <a:latin typeface="Menlo"/>
+              </a:rPr>
+              <a:t>Int</a:t>
+            </a:r>
+            <a:r>
+              <a:rPr sz="1350" b="0">
+                <a:solidFill>
+                  <a:srgbClr val="E6EDF3"/>
+                </a:solidFill>
+                <a:latin typeface="Menlo"/>
+              </a:rPr>
+              <a:t>(</a:t>
+            </a:r>
+            <a:r>
+              <a:rPr sz="1350" b="0">
+                <a:solidFill>
+                  <a:srgbClr val="E6EDF3"/>
+                </a:solidFill>
+                <a:latin typeface="Menlo"/>
+              </a:rPr>
+              <a:t>y</a:t>
+            </a:r>
+            <a:r>
+              <a:rPr sz="1350" b="0">
+                <a:solidFill>
+                  <a:srgbClr val="E6EDF3"/>
+                </a:solidFill>
+                <a:latin typeface="Menlo"/>
+              </a:rPr>
+              <a:t>));</a:t>
             </a:r>
           </a:p>
           <a:p>
@@ -9455,11 +13747,65 @@
             <a:r>
               <a:rPr sz="1150" b="0">
                 <a:solidFill>
-                  <a:srgbClr val="E6EDF3"/>
-                </a:solidFill>
-                <a:latin typeface="Menlo"/>
-              </a:rPr>
-              <a:t>il 0.2.0</a:t>
+                  <a:srgbClr val="FF7B72"/>
+                </a:solidFill>
+                <a:latin typeface="Menlo"/>
+              </a:rPr>
+              <a:t>il</a:t>
+            </a:r>
+            <a:r>
+              <a:rPr sz="1150" b="0">
+                <a:solidFill>
+                  <a:srgbClr val="E6EDF3"/>
+                </a:solidFill>
+                <a:latin typeface="Menlo"/>
+              </a:rPr>
+              <a:t> </a:t>
+            </a:r>
+            <a:r>
+              <a:rPr sz="1150" b="0">
+                <a:solidFill>
+                  <a:srgbClr val="79C0FF"/>
+                </a:solidFill>
+                <a:latin typeface="Menlo"/>
+              </a:rPr>
+              <a:t>0</a:t>
+            </a:r>
+            <a:r>
+              <a:rPr sz="1150" b="0">
+                <a:solidFill>
+                  <a:srgbClr val="E6EDF3"/>
+                </a:solidFill>
+                <a:latin typeface="Menlo"/>
+              </a:rPr>
+              <a:t>.</a:t>
+            </a:r>
+            <a:r>
+              <a:rPr sz="1150" b="0">
+                <a:solidFill>
+                  <a:srgbClr val="79C0FF"/>
+                </a:solidFill>
+                <a:latin typeface="Menlo"/>
+              </a:rPr>
+              <a:t>2</a:t>
+            </a:r>
+            <a:r>
+              <a:rPr sz="1150" b="0">
+                <a:solidFill>
+                  <a:srgbClr val="E6EDF3"/>
+                </a:solidFill>
+                <a:latin typeface="Menlo"/>
+              </a:rPr>
+              <a:t>.</a:t>
+            </a:r>
+            <a:r>
+              <a:rPr sz="1150" b="0">
+                <a:solidFill>
+                  <a:srgbClr val="79C0FF"/>
+                </a:solidFill>
+                <a:latin typeface="Menlo"/>
+              </a:rPr>
+              <a:t>0</a:t>
             </a:r>
           </a:p>
           <a:p>
@@ -9477,11 +13823,110 @@
             <a:r>
               <a:rPr sz="1150" b="0">
                 <a:solidFill>
-                  <a:srgbClr val="E6EDF3"/>
-                </a:solidFill>
-                <a:latin typeface="Menlo"/>
-              </a:rPr>
-              <a:t>global const str @.L0 = "HELLO"</a:t>
+                  <a:srgbClr val="FF7B72"/>
+                </a:solidFill>
+                <a:latin typeface="Menlo"/>
+              </a:rPr>
+              <a:t>global</a:t>
+            </a:r>
+            <a:r>
+              <a:rPr sz="1150" b="0">
+                <a:solidFill>
+                  <a:srgbClr val="E6EDF3"/>
+                </a:solidFill>
+                <a:latin typeface="Menlo"/>
+              </a:rPr>
+              <a:t> </a:t>
+            </a:r>
+            <a:r>
+              <a:rPr sz="1150" b="0">
+                <a:solidFill>
+                  <a:srgbClr val="FF7B72"/>
+                </a:solidFill>
+                <a:latin typeface="Menlo"/>
+              </a:rPr>
+              <a:t>const</a:t>
+            </a:r>
+            <a:r>
+              <a:rPr sz="1150" b="0">
+                <a:solidFill>
+                  <a:srgbClr val="E6EDF3"/>
+                </a:solidFill>
+                <a:latin typeface="Menlo"/>
+              </a:rPr>
+              <a:t> </a:t>
+            </a:r>
+            <a:r>
+              <a:rPr sz="1150" b="0">
+                <a:solidFill>
+                  <a:srgbClr val="FF7B72"/>
+                </a:solidFill>
+                <a:latin typeface="Menlo"/>
+              </a:rPr>
+              <a:t>str</a:t>
+            </a:r>
+            <a:r>
+              <a:rPr sz="1150" b="0">
+                <a:solidFill>
+                  <a:srgbClr val="E6EDF3"/>
+                </a:solidFill>
+                <a:latin typeface="Menlo"/>
+              </a:rPr>
+              <a:t> </a:t>
+            </a:r>
+            <a:r>
+              <a:rPr sz="1150" b="0">
+                <a:solidFill>
+                  <a:srgbClr val="E6EDF3"/>
+                </a:solidFill>
+                <a:latin typeface="Menlo"/>
+              </a:rPr>
+              <a:t>@.</a:t>
+            </a:r>
+            <a:r>
+              <a:rPr sz="1150" b="0">
+                <a:solidFill>
+                  <a:srgbClr val="E6EDF3"/>
+                </a:solidFill>
+                <a:latin typeface="Menlo"/>
+              </a:rPr>
+              <a:t>L0</a:t>
+            </a:r>
+            <a:r>
+              <a:rPr sz="1150" b="0">
+                <a:solidFill>
+                  <a:srgbClr val="E6EDF3"/>
+                </a:solidFill>
+                <a:latin typeface="Menlo"/>
+              </a:rPr>
+              <a:t> </a:t>
+            </a:r>
+            <a:r>
+              <a:rPr sz="1150" b="0">
+                <a:solidFill>
+                  <a:srgbClr val="FF7B72"/>
+                </a:solidFill>
+                <a:latin typeface="Menlo"/>
+              </a:rPr>
+              <a:t>=</a:t>
+            </a:r>
+            <a:r>
+              <a:rPr sz="1150" b="0">
+                <a:solidFill>
+                  <a:srgbClr val="E6EDF3"/>
+                </a:solidFill>
+                <a:latin typeface="Menlo"/>
+              </a:rPr>
+              <a:t> </a:t>
+            </a:r>
+            <a:r>
+              <a:rPr sz="1150" b="0">
+                <a:solidFill>
+                  <a:srgbClr val="A5D6FF"/>
+                </a:solidFill>
+                <a:latin typeface="Menlo"/>
+              </a:rPr>
+              <a:t>"HELLO"</a:t>
             </a:r>
           </a:p>
           <a:p>
@@ -9499,11 +13944,101 @@
             <a:r>
               <a:rPr sz="1150" b="0">
                 <a:solidFill>
-                  <a:srgbClr val="E6EDF3"/>
-                </a:solidFill>
-                <a:latin typeface="Menlo"/>
-              </a:rPr>
-              <a:t>func @main() -&gt; void {</a:t>
+                  <a:srgbClr val="FF7B72"/>
+                </a:solidFill>
+                <a:latin typeface="Menlo"/>
+              </a:rPr>
+              <a:t>func</a:t>
+            </a:r>
+            <a:r>
+              <a:rPr sz="1150" b="0">
+                <a:solidFill>
+                  <a:srgbClr val="E6EDF3"/>
+                </a:solidFill>
+                <a:latin typeface="Menlo"/>
+              </a:rPr>
+              <a:t> </a:t>
+            </a:r>
+            <a:r>
+              <a:rPr sz="1150" b="0">
+                <a:solidFill>
+                  <a:srgbClr val="E6EDF3"/>
+                </a:solidFill>
+                <a:latin typeface="Menlo"/>
+              </a:rPr>
+              <a:t>@</a:t>
+            </a:r>
+            <a:r>
+              <a:rPr sz="1150" b="0">
+                <a:solidFill>
+                  <a:srgbClr val="E6EDF3"/>
+                </a:solidFill>
+                <a:latin typeface="Menlo"/>
+              </a:rPr>
+              <a:t>main</a:t>
+            </a:r>
+            <a:r>
+              <a:rPr sz="1150" b="0">
+                <a:solidFill>
+                  <a:srgbClr val="E6EDF3"/>
+                </a:solidFill>
+                <a:latin typeface="Menlo"/>
+              </a:rPr>
+              <a:t>()</a:t>
+            </a:r>
+            <a:r>
+              <a:rPr sz="1150" b="0">
+                <a:solidFill>
+                  <a:srgbClr val="E6EDF3"/>
+                </a:solidFill>
+                <a:latin typeface="Menlo"/>
+              </a:rPr>
+              <a:t> </a:t>
+            </a:r>
+            <a:r>
+              <a:rPr sz="1150" b="0">
+                <a:solidFill>
+                  <a:srgbClr val="FF7B72"/>
+                </a:solidFill>
+                <a:latin typeface="Menlo"/>
+              </a:rPr>
+              <a:t>-&gt;</a:t>
+            </a:r>
+            <a:r>
+              <a:rPr sz="1150" b="0">
+                <a:solidFill>
+                  <a:srgbClr val="E6EDF3"/>
+                </a:solidFill>
+                <a:latin typeface="Menlo"/>
+              </a:rPr>
+              <a:t> </a:t>
+            </a:r>
+            <a:r>
+              <a:rPr sz="1150" b="0">
+                <a:solidFill>
+                  <a:srgbClr val="FF7B72"/>
+                </a:solidFill>
+                <a:latin typeface="Menlo"/>
+              </a:rPr>
+              <a:t>void</a:t>
+            </a:r>
+            <a:r>
+              <a:rPr sz="1150" b="0">
+                <a:solidFill>
+                  <a:srgbClr val="E6EDF3"/>
+                </a:solidFill>
+                <a:latin typeface="Menlo"/>
+              </a:rPr>
+              <a:t> </a:t>
+            </a:r>
+            <a:r>
+              <a:rPr sz="1150" b="0">
+                <a:solidFill>
+                  <a:srgbClr val="E6EDF3"/>
+                </a:solidFill>
+                <a:latin typeface="Menlo"/>
+              </a:rPr>
+              <a:t>{</a:t>
             </a:r>
           </a:p>
           <a:p>
@@ -9521,11 +14056,20 @@
             <a:r>
               <a:rPr sz="1150" b="0">
                 <a:solidFill>
-                  <a:srgbClr val="E6EDF3"/>
-                </a:solidFill>
-                <a:latin typeface="Menlo"/>
-              </a:rPr>
-              <a:t>entry_0:</a:t>
+                  <a:srgbClr val="FF7B72"/>
+                </a:solidFill>
+                <a:latin typeface="Menlo"/>
+              </a:rPr>
+              <a:t>entry_0</a:t>
+            </a:r>
+            <a:r>
+              <a:rPr sz="1150" b="0">
+                <a:solidFill>
+                  <a:srgbClr val="E6EDF3"/>
+                </a:solidFill>
+                <a:latin typeface="Menlo"/>
+              </a:rPr>
+              <a:t>:</a:t>
             </a:r>
           </a:p>
           <a:p>
@@ -9547,7 +14091,124 @@
                 </a:solidFill>
                 <a:latin typeface="Menlo"/>
               </a:rPr>
-              <a:t>  %t0 = iadd.ovf 2, 3</a:t>
+              <a:t>  </a:t>
+            </a:r>
+            <a:r>
+              <a:rPr sz="1150" b="0">
+                <a:solidFill>
+                  <a:srgbClr val="FF7B72"/>
+                </a:solidFill>
+                <a:latin typeface="Menlo"/>
+              </a:rPr>
+              <a:t>%</a:t>
+            </a:r>
+            <a:r>
+              <a:rPr sz="1150" b="0">
+                <a:solidFill>
+                  <a:srgbClr val="E6EDF3"/>
+                </a:solidFill>
+                <a:latin typeface="Menlo"/>
+              </a:rPr>
+              <a:t>t0</a:t>
+            </a:r>
+            <a:r>
+              <a:rPr sz="1150" b="0">
+                <a:solidFill>
+                  <a:srgbClr val="E6EDF3"/>
+                </a:solidFill>
+                <a:latin typeface="Menlo"/>
+              </a:rPr>
+              <a:t> </a:t>
+            </a:r>
+            <a:r>
+              <a:rPr sz="1150" b="0">
+                <a:solidFill>
+                  <a:srgbClr val="FF7B72"/>
+                </a:solidFill>
+                <a:latin typeface="Menlo"/>
+              </a:rPr>
+              <a:t>=</a:t>
+            </a:r>
+            <a:r>
+              <a:rPr sz="1150" b="0">
+                <a:solidFill>
+                  <a:srgbClr val="E6EDF3"/>
+                </a:solidFill>
+                <a:latin typeface="Menlo"/>
+              </a:rPr>
+              <a:t> </a:t>
+            </a:r>
+            <a:r>
+              <a:rPr sz="1150" b="0">
+                <a:solidFill>
+                  <a:srgbClr val="E6EDF3"/>
+                </a:solidFill>
+                <a:latin typeface="Menlo"/>
+              </a:rPr>
+              <a:t>iadd</a:t>
+            </a:r>
+            <a:r>
+              <a:rPr sz="1150" b="0">
+                <a:solidFill>
+                  <a:srgbClr val="E6EDF3"/>
+                </a:solidFill>
+                <a:latin typeface="Menlo"/>
+              </a:rPr>
+              <a:t>.</a:t>
+            </a:r>
+            <a:r>
+              <a:rPr sz="1150" b="0">
+                <a:solidFill>
+                  <a:srgbClr val="E6EDF3"/>
+                </a:solidFill>
+                <a:latin typeface="Menlo"/>
+              </a:rPr>
+              <a:t>ovf</a:t>
+            </a:r>
+            <a:r>
+              <a:rPr sz="1150" b="0">
+                <a:solidFill>
+                  <a:srgbClr val="E6EDF3"/>
+                </a:solidFill>
+                <a:latin typeface="Menlo"/>
+              </a:rPr>
+              <a:t> </a:t>
+            </a:r>
+            <a:r>
+              <a:rPr sz="1150" b="0">
+                <a:solidFill>
+                  <a:srgbClr val="79C0FF"/>
+                </a:solidFill>
+                <a:latin typeface="Menlo"/>
+              </a:rPr>
+              <a:t>2</a:t>
+            </a:r>
+            <a:r>
+              <a:rPr sz="1150" b="0">
+                <a:solidFill>
+                  <a:srgbClr val="E6EDF3"/>
+                </a:solidFill>
+                <a:latin typeface="Menlo"/>
+              </a:rPr>
+              <a:t>,</a:t>
+            </a:r>
+            <a:r>
+              <a:rPr sz="1150" b="0">
+                <a:solidFill>
+                  <a:srgbClr val="E6EDF3"/>
+                </a:solidFill>
+                <a:latin typeface="Menlo"/>
+              </a:rPr>
+              <a:t> </a:t>
+            </a:r>
+            <a:r>
+              <a:rPr sz="1150" b="0">
+                <a:solidFill>
+                  <a:srgbClr val="79C0FF"/>
+                </a:solidFill>
+                <a:latin typeface="Menlo"/>
+              </a:rPr>
+              <a:t>3</a:t>
             </a:r>
           </a:p>
           <a:p>
@@ -9569,7 +14230,79 @@
                 </a:solidFill>
                 <a:latin typeface="Menlo"/>
               </a:rPr>
-              <a:t>  %t1 = alloca 8</a:t>
+              <a:t>  </a:t>
+            </a:r>
+            <a:r>
+              <a:rPr sz="1150" b="0">
+                <a:solidFill>
+                  <a:srgbClr val="FF7B72"/>
+                </a:solidFill>
+                <a:latin typeface="Menlo"/>
+              </a:rPr>
+              <a:t>%</a:t>
+            </a:r>
+            <a:r>
+              <a:rPr sz="1150" b="0">
+                <a:solidFill>
+                  <a:srgbClr val="E6EDF3"/>
+                </a:solidFill>
+                <a:latin typeface="Menlo"/>
+              </a:rPr>
+              <a:t>t1</a:t>
+            </a:r>
+            <a:r>
+              <a:rPr sz="1150" b="0">
+                <a:solidFill>
+                  <a:srgbClr val="E6EDF3"/>
+                </a:solidFill>
+                <a:latin typeface="Menlo"/>
+              </a:rPr>
+              <a:t> </a:t>
+            </a:r>
+            <a:r>
+              <a:rPr sz="1150" b="0">
+                <a:solidFill>
+                  <a:srgbClr val="FF7B72"/>
+                </a:solidFill>
+                <a:latin typeface="Menlo"/>
+              </a:rPr>
+              <a:t>=</a:t>
+            </a:r>
+            <a:r>
+              <a:rPr sz="1150" b="0">
+                <a:solidFill>
+                  <a:srgbClr val="E6EDF3"/>
+                </a:solidFill>
+                <a:latin typeface="Menlo"/>
+              </a:rPr>
+              <a:t> </a:t>
+            </a:r>
+            <a:r>
+              <a:rPr sz="1150" b="0">
+                <a:solidFill>
+                  <a:srgbClr val="FF7B72"/>
+                </a:solidFill>
+                <a:latin typeface="Menlo"/>
+              </a:rPr>
+              <a:t>alloca</a:t>
+            </a:r>
+            <a:r>
+              <a:rPr sz="1150" b="0">
+                <a:solidFill>
+                  <a:srgbClr val="E6EDF3"/>
+                </a:solidFill>
+                <a:latin typeface="Menlo"/>
+              </a:rPr>
+              <a:t> </a:t>
+            </a:r>
+            <a:r>
+              <a:rPr sz="1150" b="0">
+                <a:solidFill>
+                  <a:srgbClr val="79C0FF"/>
+                </a:solidFill>
+                <a:latin typeface="Menlo"/>
+              </a:rPr>
+              <a:t>8</a:t>
             </a:r>
           </a:p>
           <a:p>
@@ -9591,7 +14324,106 @@
                 </a:solidFill>
                 <a:latin typeface="Menlo"/>
               </a:rPr>
-              <a:t>  store i64, %t1, %t0</a:t>
+              <a:t>  </a:t>
+            </a:r>
+            <a:r>
+              <a:rPr sz="1150" b="0">
+                <a:solidFill>
+                  <a:srgbClr val="FF7B72"/>
+                </a:solidFill>
+                <a:latin typeface="Menlo"/>
+              </a:rPr>
+              <a:t>store</a:t>
+            </a:r>
+            <a:r>
+              <a:rPr sz="1150" b="0">
+                <a:solidFill>
+                  <a:srgbClr val="E6EDF3"/>
+                </a:solidFill>
+                <a:latin typeface="Menlo"/>
+              </a:rPr>
+              <a:t> </a:t>
+            </a:r>
+            <a:r>
+              <a:rPr sz="1150" b="0">
+                <a:solidFill>
+                  <a:srgbClr val="E6EDF3"/>
+                </a:solidFill>
+                <a:latin typeface="Menlo"/>
+              </a:rPr>
+              <a:t>i64</a:t>
+            </a:r>
+            <a:r>
+              <a:rPr sz="1150" b="0">
+                <a:solidFill>
+                  <a:srgbClr val="E6EDF3"/>
+                </a:solidFill>
+                <a:latin typeface="Menlo"/>
+              </a:rPr>
+              <a:t>,</a:t>
+            </a:r>
+            <a:r>
+              <a:rPr sz="1150" b="0">
+                <a:solidFill>
+                  <a:srgbClr val="E6EDF3"/>
+                </a:solidFill>
+                <a:latin typeface="Menlo"/>
+              </a:rPr>
+              <a:t> </a:t>
+            </a:r>
+            <a:r>
+              <a:rPr sz="1150" b="0">
+                <a:solidFill>
+                  <a:srgbClr val="FF7B72"/>
+                </a:solidFill>
+                <a:latin typeface="Menlo"/>
+              </a:rPr>
+              <a:t>%</a:t>
+            </a:r>
+            <a:r>
+              <a:rPr sz="1150" b="0">
+                <a:solidFill>
+                  <a:srgbClr val="E6EDF3"/>
+                </a:solidFill>
+                <a:latin typeface="Menlo"/>
+              </a:rPr>
+              <a:t>t1</a:t>
+            </a:r>
+            <a:r>
+              <a:rPr sz="1150" b="0">
+                <a:solidFill>
+                  <a:srgbClr val="E6EDF3"/>
+                </a:solidFill>
+                <a:latin typeface="Menlo"/>
+              </a:rPr>
+              <a:t>,</a:t>
+            </a:r>
+            <a:r>
+              <a:rPr sz="1150" b="0">
+                <a:solidFill>
+                  <a:srgbClr val="E6EDF3"/>
+                </a:solidFill>
+                <a:latin typeface="Menlo"/>
+              </a:rPr>
+              <a:t> </a:t>
+            </a:r>
+            <a:r>
+              <a:rPr sz="1150" b="0">
+                <a:solidFill>
+                  <a:srgbClr val="FF7B72"/>
+                </a:solidFill>
+                <a:latin typeface="Menlo"/>
+              </a:rPr>
+              <a:t>%</a:t>
+            </a:r>
+            <a:r>
+              <a:rPr sz="1150" b="0">
+                <a:solidFill>
+                  <a:srgbClr val="E6EDF3"/>
+                </a:solidFill>
+                <a:latin typeface="Menlo"/>
+              </a:rPr>
+              <a:t>t0</a:t>
             </a:r>
           </a:p>
           <a:p>
@@ -9613,7 +14445,115 @@
                 </a:solidFill>
                 <a:latin typeface="Menlo"/>
               </a:rPr>
-              <a:t>  %t2 = load i64, %t1</a:t>
+              <a:t>  </a:t>
+            </a:r>
+            <a:r>
+              <a:rPr sz="1150" b="0">
+                <a:solidFill>
+                  <a:srgbClr val="FF7B72"/>
+                </a:solidFill>
+                <a:latin typeface="Menlo"/>
+              </a:rPr>
+              <a:t>%</a:t>
+            </a:r>
+            <a:r>
+              <a:rPr sz="1150" b="0">
+                <a:solidFill>
+                  <a:srgbClr val="E6EDF3"/>
+                </a:solidFill>
+                <a:latin typeface="Menlo"/>
+              </a:rPr>
+              <a:t>t2</a:t>
+            </a:r>
+            <a:r>
+              <a:rPr sz="1150" b="0">
+                <a:solidFill>
+                  <a:srgbClr val="E6EDF3"/>
+                </a:solidFill>
+                <a:latin typeface="Menlo"/>
+              </a:rPr>
+              <a:t> </a:t>
+            </a:r>
+            <a:r>
+              <a:rPr sz="1150" b="0">
+                <a:solidFill>
+                  <a:srgbClr val="FF7B72"/>
+                </a:solidFill>
+                <a:latin typeface="Menlo"/>
+              </a:rPr>
+              <a:t>=</a:t>
+            </a:r>
+            <a:r>
+              <a:rPr sz="1150" b="0">
+                <a:solidFill>
+                  <a:srgbClr val="E6EDF3"/>
+                </a:solidFill>
+                <a:latin typeface="Menlo"/>
+              </a:rPr>
+              <a:t> </a:t>
+            </a:r>
+            <a:r>
+              <a:rPr sz="1150" b="0">
+                <a:solidFill>
+                  <a:srgbClr val="FF7B72"/>
+                </a:solidFill>
+                <a:latin typeface="Menlo"/>
+              </a:rPr>
+              <a:t>load</a:t>
+            </a:r>
+            <a:r>
+              <a:rPr sz="1150" b="0">
+                <a:solidFill>
+                  <a:srgbClr val="E6EDF3"/>
+                </a:solidFill>
+                <a:latin typeface="Menlo"/>
+              </a:rPr>
+              <a:t> </a:t>
+            </a:r>
+            <a:r>
+              <a:rPr sz="1150" b="0">
+                <a:solidFill>
+                  <a:srgbClr val="E6EDF3"/>
+                </a:solidFill>
+                <a:latin typeface="Menlo"/>
+              </a:rPr>
+              <a:t>i64</a:t>
+            </a:r>
+            <a:r>
+              <a:rPr sz="1150" b="0">
+                <a:solidFill>
+                  <a:srgbClr val="E6EDF3"/>
+                </a:solidFill>
+                <a:latin typeface="Menlo"/>
+              </a:rPr>
+              <a:t>,</a:t>
+            </a:r>
+            <a:r>
+              <a:rPr sz="1150" b="0">
+                <a:solidFill>
+                  <a:srgbClr val="E6EDF3"/>
+                </a:solidFill>
+                <a:latin typeface="Menlo"/>
+              </a:rPr>
+              <a:t> </a:t>
+            </a:r>
+            <a:r>
+              <a:rPr sz="1150" b="0">
+                <a:solidFill>
+                  <a:srgbClr val="FF7B72"/>
+                </a:solidFill>
+                <a:latin typeface="Menlo"/>
+              </a:rPr>
+              <a:t>%</a:t>
+            </a:r>
+            <a:r>
+              <a:rPr sz="1150" b="0">
+                <a:solidFill>
+                  <a:srgbClr val="E6EDF3"/>
+                </a:solidFill>
+                <a:latin typeface="Menlo"/>
+              </a:rPr>
+              <a:t>t1</a:t>
             </a:r>
           </a:p>
           <a:p>
@@ -9635,7 +14575,133 @@
                 </a:solidFill>
                 <a:latin typeface="Menlo"/>
               </a:rPr>
-              <a:t>  %t3 = imul.ovf %t2, 2</a:t>
+              <a:t>  </a:t>
+            </a:r>
+            <a:r>
+              <a:rPr sz="1150" b="0">
+                <a:solidFill>
+                  <a:srgbClr val="FF7B72"/>
+                </a:solidFill>
+                <a:latin typeface="Menlo"/>
+              </a:rPr>
+              <a:t>%</a:t>
+            </a:r>
+            <a:r>
+              <a:rPr sz="1150" b="0">
+                <a:solidFill>
+                  <a:srgbClr val="E6EDF3"/>
+                </a:solidFill>
+                <a:latin typeface="Menlo"/>
+              </a:rPr>
+              <a:t>t3</a:t>
+            </a:r>
+            <a:r>
+              <a:rPr sz="1150" b="0">
+                <a:solidFill>
+                  <a:srgbClr val="E6EDF3"/>
+                </a:solidFill>
+                <a:latin typeface="Menlo"/>
+              </a:rPr>
+              <a:t> </a:t>
+            </a:r>
+            <a:r>
+              <a:rPr sz="1150" b="0">
+                <a:solidFill>
+                  <a:srgbClr val="FF7B72"/>
+                </a:solidFill>
+                <a:latin typeface="Menlo"/>
+              </a:rPr>
+              <a:t>=</a:t>
+            </a:r>
+            <a:r>
+              <a:rPr sz="1150" b="0">
+                <a:solidFill>
+                  <a:srgbClr val="E6EDF3"/>
+                </a:solidFill>
+                <a:latin typeface="Menlo"/>
+              </a:rPr>
+              <a:t> </a:t>
+            </a:r>
+            <a:r>
+              <a:rPr sz="1150" b="0">
+                <a:solidFill>
+                  <a:srgbClr val="E6EDF3"/>
+                </a:solidFill>
+                <a:latin typeface="Menlo"/>
+              </a:rPr>
+              <a:t>imul</a:t>
+            </a:r>
+            <a:r>
+              <a:rPr sz="1150" b="0">
+                <a:solidFill>
+                  <a:srgbClr val="E6EDF3"/>
+                </a:solidFill>
+                <a:latin typeface="Menlo"/>
+              </a:rPr>
+              <a:t>.</a:t>
+            </a:r>
+            <a:r>
+              <a:rPr sz="1150" b="0">
+                <a:solidFill>
+                  <a:srgbClr val="E6EDF3"/>
+                </a:solidFill>
+                <a:latin typeface="Menlo"/>
+              </a:rPr>
+              <a:t>ovf</a:t>
+            </a:r>
+            <a:r>
+              <a:rPr sz="1150" b="0">
+                <a:solidFill>
+                  <a:srgbClr val="E6EDF3"/>
+                </a:solidFill>
+                <a:latin typeface="Menlo"/>
+              </a:rPr>
+              <a:t> </a:t>
+            </a:r>
+            <a:r>
+              <a:rPr sz="1150" b="0">
+                <a:solidFill>
+                  <a:srgbClr val="FF7B72"/>
+                </a:solidFill>
+                <a:latin typeface="Menlo"/>
+              </a:rPr>
+              <a:t>%</a:t>
+            </a:r>
+            <a:r>
+              <a:rPr sz="1150" b="0">
+                <a:solidFill>
+                  <a:srgbClr val="E6EDF3"/>
+                </a:solidFill>
+                <a:latin typeface="Menlo"/>
+              </a:rPr>
+              <a:t>t2</a:t>
+            </a:r>
+            <a:r>
+              <a:rPr sz="1150" b="0">
+                <a:solidFill>
+                  <a:srgbClr val="E6EDF3"/>
+                </a:solidFill>
+                <a:latin typeface="Menlo"/>
+              </a:rPr>
+              <a:t>,</a:t>
+            </a:r>
+            <a:r>
+              <a:rPr sz="1150" b="0">
+                <a:solidFill>
+                  <a:srgbClr val="E6EDF3"/>
+                </a:solidFill>
+                <a:latin typeface="Menlo"/>
+              </a:rPr>
+              <a:t> </a:t>
+            </a:r>
+            <a:r>
+              <a:rPr sz="1150" b="0">
+                <a:solidFill>
+                  <a:srgbClr val="79C0FF"/>
+                </a:solidFill>
+                <a:latin typeface="Menlo"/>
+              </a:rPr>
+              <a:t>2</a:t>
             </a:r>
           </a:p>
           <a:p>
@@ -9657,7 +14723,79 @@
                 </a:solidFill>
                 <a:latin typeface="Menlo"/>
               </a:rPr>
-              <a:t>  %t4 = alloca 8</a:t>
+              <a:t>  </a:t>
+            </a:r>
+            <a:r>
+              <a:rPr sz="1150" b="0">
+                <a:solidFill>
+                  <a:srgbClr val="FF7B72"/>
+                </a:solidFill>
+                <a:latin typeface="Menlo"/>
+              </a:rPr>
+              <a:t>%</a:t>
+            </a:r>
+            <a:r>
+              <a:rPr sz="1150" b="0">
+                <a:solidFill>
+                  <a:srgbClr val="E6EDF3"/>
+                </a:solidFill>
+                <a:latin typeface="Menlo"/>
+              </a:rPr>
+              <a:t>t4</a:t>
+            </a:r>
+            <a:r>
+              <a:rPr sz="1150" b="0">
+                <a:solidFill>
+                  <a:srgbClr val="E6EDF3"/>
+                </a:solidFill>
+                <a:latin typeface="Menlo"/>
+              </a:rPr>
+              <a:t> </a:t>
+            </a:r>
+            <a:r>
+              <a:rPr sz="1150" b="0">
+                <a:solidFill>
+                  <a:srgbClr val="FF7B72"/>
+                </a:solidFill>
+                <a:latin typeface="Menlo"/>
+              </a:rPr>
+              <a:t>=</a:t>
+            </a:r>
+            <a:r>
+              <a:rPr sz="1150" b="0">
+                <a:solidFill>
+                  <a:srgbClr val="E6EDF3"/>
+                </a:solidFill>
+                <a:latin typeface="Menlo"/>
+              </a:rPr>
+              <a:t> </a:t>
+            </a:r>
+            <a:r>
+              <a:rPr sz="1150" b="0">
+                <a:solidFill>
+                  <a:srgbClr val="FF7B72"/>
+                </a:solidFill>
+                <a:latin typeface="Menlo"/>
+              </a:rPr>
+              <a:t>alloca</a:t>
+            </a:r>
+            <a:r>
+              <a:rPr sz="1150" b="0">
+                <a:solidFill>
+                  <a:srgbClr val="E6EDF3"/>
+                </a:solidFill>
+                <a:latin typeface="Menlo"/>
+              </a:rPr>
+              <a:t> </a:t>
+            </a:r>
+            <a:r>
+              <a:rPr sz="1150" b="0">
+                <a:solidFill>
+                  <a:srgbClr val="79C0FF"/>
+                </a:solidFill>
+                <a:latin typeface="Menlo"/>
+              </a:rPr>
+              <a:t>8</a:t>
             </a:r>
           </a:p>
           <a:p>
@@ -9679,7 +14817,106 @@
                 </a:solidFill>
                 <a:latin typeface="Menlo"/>
               </a:rPr>
-              <a:t>  store i64, %t4, %t3</a:t>
+              <a:t>  </a:t>
+            </a:r>
+            <a:r>
+              <a:rPr sz="1150" b="0">
+                <a:solidFill>
+                  <a:srgbClr val="FF7B72"/>
+                </a:solidFill>
+                <a:latin typeface="Menlo"/>
+              </a:rPr>
+              <a:t>store</a:t>
+            </a:r>
+            <a:r>
+              <a:rPr sz="1150" b="0">
+                <a:solidFill>
+                  <a:srgbClr val="E6EDF3"/>
+                </a:solidFill>
+                <a:latin typeface="Menlo"/>
+              </a:rPr>
+              <a:t> </a:t>
+            </a:r>
+            <a:r>
+              <a:rPr sz="1150" b="0">
+                <a:solidFill>
+                  <a:srgbClr val="E6EDF3"/>
+                </a:solidFill>
+                <a:latin typeface="Menlo"/>
+              </a:rPr>
+              <a:t>i64</a:t>
+            </a:r>
+            <a:r>
+              <a:rPr sz="1150" b="0">
+                <a:solidFill>
+                  <a:srgbClr val="E6EDF3"/>
+                </a:solidFill>
+                <a:latin typeface="Menlo"/>
+              </a:rPr>
+              <a:t>,</a:t>
+            </a:r>
+            <a:r>
+              <a:rPr sz="1150" b="0">
+                <a:solidFill>
+                  <a:srgbClr val="E6EDF3"/>
+                </a:solidFill>
+                <a:latin typeface="Menlo"/>
+              </a:rPr>
+              <a:t> </a:t>
+            </a:r>
+            <a:r>
+              <a:rPr sz="1150" b="0">
+                <a:solidFill>
+                  <a:srgbClr val="FF7B72"/>
+                </a:solidFill>
+                <a:latin typeface="Menlo"/>
+              </a:rPr>
+              <a:t>%</a:t>
+            </a:r>
+            <a:r>
+              <a:rPr sz="1150" b="0">
+                <a:solidFill>
+                  <a:srgbClr val="E6EDF3"/>
+                </a:solidFill>
+                <a:latin typeface="Menlo"/>
+              </a:rPr>
+              <a:t>t4</a:t>
+            </a:r>
+            <a:r>
+              <a:rPr sz="1150" b="0">
+                <a:solidFill>
+                  <a:srgbClr val="E6EDF3"/>
+                </a:solidFill>
+                <a:latin typeface="Menlo"/>
+              </a:rPr>
+              <a:t>,</a:t>
+            </a:r>
+            <a:r>
+              <a:rPr sz="1150" b="0">
+                <a:solidFill>
+                  <a:srgbClr val="E6EDF3"/>
+                </a:solidFill>
+                <a:latin typeface="Menlo"/>
+              </a:rPr>
+              <a:t> </a:t>
+            </a:r>
+            <a:r>
+              <a:rPr sz="1150" b="0">
+                <a:solidFill>
+                  <a:srgbClr val="FF7B72"/>
+                </a:solidFill>
+                <a:latin typeface="Menlo"/>
+              </a:rPr>
+              <a:t>%</a:t>
+            </a:r>
+            <a:r>
+              <a:rPr sz="1150" b="0">
+                <a:solidFill>
+                  <a:srgbClr val="E6EDF3"/>
+                </a:solidFill>
+                <a:latin typeface="Menlo"/>
+              </a:rPr>
+              <a:t>t3</a:t>
             </a:r>
           </a:p>
           <a:p>
@@ -9701,7 +14938,88 @@
                 </a:solidFill>
                 <a:latin typeface="Menlo"/>
               </a:rPr>
-              <a:t>  %t5 = const_str @.L0</a:t>
+              <a:t>  </a:t>
+            </a:r>
+            <a:r>
+              <a:rPr sz="1150" b="0">
+                <a:solidFill>
+                  <a:srgbClr val="FF7B72"/>
+                </a:solidFill>
+                <a:latin typeface="Menlo"/>
+              </a:rPr>
+              <a:t>%</a:t>
+            </a:r>
+            <a:r>
+              <a:rPr sz="1150" b="0">
+                <a:solidFill>
+                  <a:srgbClr val="E6EDF3"/>
+                </a:solidFill>
+                <a:latin typeface="Menlo"/>
+              </a:rPr>
+              <a:t>t5</a:t>
+            </a:r>
+            <a:r>
+              <a:rPr sz="1150" b="0">
+                <a:solidFill>
+                  <a:srgbClr val="E6EDF3"/>
+                </a:solidFill>
+                <a:latin typeface="Menlo"/>
+              </a:rPr>
+              <a:t> </a:t>
+            </a:r>
+            <a:r>
+              <a:rPr sz="1150" b="0">
+                <a:solidFill>
+                  <a:srgbClr val="FF7B72"/>
+                </a:solidFill>
+                <a:latin typeface="Menlo"/>
+              </a:rPr>
+              <a:t>=</a:t>
+            </a:r>
+            <a:r>
+              <a:rPr sz="1150" b="0">
+                <a:solidFill>
+                  <a:srgbClr val="E6EDF3"/>
+                </a:solidFill>
+                <a:latin typeface="Menlo"/>
+              </a:rPr>
+              <a:t> </a:t>
+            </a:r>
+            <a:r>
+              <a:rPr sz="1150" b="0">
+                <a:solidFill>
+                  <a:srgbClr val="E6EDF3"/>
+                </a:solidFill>
+                <a:latin typeface="Menlo"/>
+              </a:rPr>
+              <a:t>const_str</a:t>
+            </a:r>
+            <a:r>
+              <a:rPr sz="1150" b="0">
+                <a:solidFill>
+                  <a:srgbClr val="E6EDF3"/>
+                </a:solidFill>
+                <a:latin typeface="Menlo"/>
+              </a:rPr>
+              <a:t> </a:t>
+            </a:r>
+            <a:r>
+              <a:rPr sz="1150" b="0">
+                <a:solidFill>
+                  <a:srgbClr val="E6EDF3"/>
+                </a:solidFill>
+                <a:latin typeface="Menlo"/>
+              </a:rPr>
+              <a:t>@.</a:t>
+            </a:r>
+            <a:r>
+              <a:rPr sz="1150" b="0">
+                <a:solidFill>
+                  <a:srgbClr val="E6EDF3"/>
+                </a:solidFill>
+                <a:latin typeface="Menlo"/>
+              </a:rPr>
+              <a:t>L0</a:t>
             </a:r>
           </a:p>
           <a:p>
@@ -9723,7 +15041,115 @@
                 </a:solidFill>
                 <a:latin typeface="Menlo"/>
               </a:rPr>
-              <a:t>  call @Viper.Terminal.Say(%t5)</a:t>
+              <a:t>  </a:t>
+            </a:r>
+            <a:r>
+              <a:rPr sz="1150" b="0">
+                <a:solidFill>
+                  <a:srgbClr val="FF7B72"/>
+                </a:solidFill>
+                <a:latin typeface="Menlo"/>
+              </a:rPr>
+              <a:t>call</a:t>
+            </a:r>
+            <a:r>
+              <a:rPr sz="1150" b="0">
+                <a:solidFill>
+                  <a:srgbClr val="E6EDF3"/>
+                </a:solidFill>
+                <a:latin typeface="Menlo"/>
+              </a:rPr>
+              <a:t> </a:t>
+            </a:r>
+            <a:r>
+              <a:rPr sz="1150" b="0">
+                <a:solidFill>
+                  <a:srgbClr val="E6EDF3"/>
+                </a:solidFill>
+                <a:latin typeface="Menlo"/>
+              </a:rPr>
+              <a:t>@</a:t>
+            </a:r>
+            <a:r>
+              <a:rPr sz="1150" b="0">
+                <a:solidFill>
+                  <a:srgbClr val="3FB950"/>
+                </a:solidFill>
+                <a:latin typeface="Menlo"/>
+              </a:rPr>
+              <a:t>Viper</a:t>
+            </a:r>
+            <a:r>
+              <a:rPr sz="1150" b="0">
+                <a:solidFill>
+                  <a:srgbClr val="E6EDF3"/>
+                </a:solidFill>
+                <a:latin typeface="Menlo"/>
+              </a:rPr>
+              <a:t>.</a:t>
+            </a:r>
+            <a:r>
+              <a:rPr sz="1150" b="0">
+                <a:solidFill>
+                  <a:srgbClr val="3FB950"/>
+                </a:solidFill>
+                <a:latin typeface="Menlo"/>
+              </a:rPr>
+              <a:t>Terminal</a:t>
+            </a:r>
+            <a:r>
+              <a:rPr sz="1150" b="0">
+                <a:solidFill>
+                  <a:srgbClr val="E6EDF3"/>
+                </a:solidFill>
+                <a:latin typeface="Menlo"/>
+              </a:rPr>
+              <a:t>.</a:t>
+            </a:r>
+            <a:r>
+              <a:rPr sz="1150" b="0">
+                <a:solidFill>
+                  <a:srgbClr val="D2A8FF"/>
+                </a:solidFill>
+                <a:latin typeface="Menlo"/>
+              </a:rPr>
+              <a:t>Say</a:t>
+            </a:r>
+            <a:r>
+              <a:rPr sz="1150" b="0">
+                <a:solidFill>
+                  <a:srgbClr val="E6EDF3"/>
+                </a:solidFill>
+                <a:latin typeface="Menlo"/>
+              </a:rPr>
+              <a:t>(</a:t>
+            </a:r>
+            <a:r>
+              <a:rPr sz="1150" b="0">
+                <a:solidFill>
+                  <a:srgbClr val="FF7B72"/>
+                </a:solidFill>
+                <a:latin typeface="Menlo"/>
+              </a:rPr>
+              <a:t>%</a:t>
+            </a:r>
+            <a:r>
+              <a:rPr sz="1150" b="0">
+                <a:solidFill>
+                  <a:srgbClr val="E6EDF3"/>
+                </a:solidFill>
+                <a:latin typeface="Menlo"/>
+              </a:rPr>
+              <a:t>t5</a:t>
+            </a:r>
+            <a:r>
+              <a:rPr sz="1150" b="0">
+                <a:solidFill>
+                  <a:srgbClr val="E6EDF3"/>
+                </a:solidFill>
+                <a:latin typeface="Menlo"/>
+              </a:rPr>
+              <a:t>)</a:t>
             </a:r>
           </a:p>
           <a:p>
@@ -9745,7 +15171,115 @@
                 </a:solidFill>
                 <a:latin typeface="Menlo"/>
               </a:rPr>
-              <a:t>  %t6 = load i64, %t4</a:t>
+              <a:t>  </a:t>
+            </a:r>
+            <a:r>
+              <a:rPr sz="1150" b="0">
+                <a:solidFill>
+                  <a:srgbClr val="FF7B72"/>
+                </a:solidFill>
+                <a:latin typeface="Menlo"/>
+              </a:rPr>
+              <a:t>%</a:t>
+            </a:r>
+            <a:r>
+              <a:rPr sz="1150" b="0">
+                <a:solidFill>
+                  <a:srgbClr val="E6EDF3"/>
+                </a:solidFill>
+                <a:latin typeface="Menlo"/>
+              </a:rPr>
+              <a:t>t6</a:t>
+            </a:r>
+            <a:r>
+              <a:rPr sz="1150" b="0">
+                <a:solidFill>
+                  <a:srgbClr val="E6EDF3"/>
+                </a:solidFill>
+                <a:latin typeface="Menlo"/>
+              </a:rPr>
+              <a:t> </a:t>
+            </a:r>
+            <a:r>
+              <a:rPr sz="1150" b="0">
+                <a:solidFill>
+                  <a:srgbClr val="FF7B72"/>
+                </a:solidFill>
+                <a:latin typeface="Menlo"/>
+              </a:rPr>
+              <a:t>=</a:t>
+            </a:r>
+            <a:r>
+              <a:rPr sz="1150" b="0">
+                <a:solidFill>
+                  <a:srgbClr val="E6EDF3"/>
+                </a:solidFill>
+                <a:latin typeface="Menlo"/>
+              </a:rPr>
+              <a:t> </a:t>
+            </a:r>
+            <a:r>
+              <a:rPr sz="1150" b="0">
+                <a:solidFill>
+                  <a:srgbClr val="FF7B72"/>
+                </a:solidFill>
+                <a:latin typeface="Menlo"/>
+              </a:rPr>
+              <a:t>load</a:t>
+            </a:r>
+            <a:r>
+              <a:rPr sz="1150" b="0">
+                <a:solidFill>
+                  <a:srgbClr val="E6EDF3"/>
+                </a:solidFill>
+                <a:latin typeface="Menlo"/>
+              </a:rPr>
+              <a:t> </a:t>
+            </a:r>
+            <a:r>
+              <a:rPr sz="1150" b="0">
+                <a:solidFill>
+                  <a:srgbClr val="E6EDF3"/>
+                </a:solidFill>
+                <a:latin typeface="Menlo"/>
+              </a:rPr>
+              <a:t>i64</a:t>
+            </a:r>
+            <a:r>
+              <a:rPr sz="1150" b="0">
+                <a:solidFill>
+                  <a:srgbClr val="E6EDF3"/>
+                </a:solidFill>
+                <a:latin typeface="Menlo"/>
+              </a:rPr>
+              <a:t>,</a:t>
+            </a:r>
+            <a:r>
+              <a:rPr sz="1150" b="0">
+                <a:solidFill>
+                  <a:srgbClr val="E6EDF3"/>
+                </a:solidFill>
+                <a:latin typeface="Menlo"/>
+              </a:rPr>
+              <a:t> </a:t>
+            </a:r>
+            <a:r>
+              <a:rPr sz="1150" b="0">
+                <a:solidFill>
+                  <a:srgbClr val="FF7B72"/>
+                </a:solidFill>
+                <a:latin typeface="Menlo"/>
+              </a:rPr>
+              <a:t>%</a:t>
+            </a:r>
+            <a:r>
+              <a:rPr sz="1150" b="0">
+                <a:solidFill>
+                  <a:srgbClr val="E6EDF3"/>
+                </a:solidFill>
+                <a:latin typeface="Menlo"/>
+              </a:rPr>
+              <a:t>t4</a:t>
             </a:r>
           </a:p>
           <a:p>
@@ -9767,7 +15301,178 @@
                 </a:solidFill>
                 <a:latin typeface="Menlo"/>
               </a:rPr>
-              <a:t>  %t7 = call @Viper.Text.Fmt.Int(%t6)</a:t>
+              <a:t>  </a:t>
+            </a:r>
+            <a:r>
+              <a:rPr sz="1150" b="0">
+                <a:solidFill>
+                  <a:srgbClr val="FF7B72"/>
+                </a:solidFill>
+                <a:latin typeface="Menlo"/>
+              </a:rPr>
+              <a:t>%</a:t>
+            </a:r>
+            <a:r>
+              <a:rPr sz="1150" b="0">
+                <a:solidFill>
+                  <a:srgbClr val="E6EDF3"/>
+                </a:solidFill>
+                <a:latin typeface="Menlo"/>
+              </a:rPr>
+              <a:t>t7</a:t>
+            </a:r>
+            <a:r>
+              <a:rPr sz="1150" b="0">
+                <a:solidFill>
+                  <a:srgbClr val="E6EDF3"/>
+                </a:solidFill>
+                <a:latin typeface="Menlo"/>
+              </a:rPr>
+              <a:t> </a:t>
+            </a:r>
+            <a:r>
+              <a:rPr sz="1150" b="0">
+                <a:solidFill>
+                  <a:srgbClr val="FF7B72"/>
+                </a:solidFill>
+                <a:latin typeface="Menlo"/>
+              </a:rPr>
+              <a:t>=</a:t>
+            </a:r>
+            <a:r>
+              <a:rPr sz="1150" b="0">
+                <a:solidFill>
+                  <a:srgbClr val="E6EDF3"/>
+                </a:solidFill>
+                <a:latin typeface="Menlo"/>
+              </a:rPr>
+              <a:t> </a:t>
+            </a:r>
+            <a:r>
+              <a:rPr sz="1150" b="0">
+                <a:solidFill>
+                  <a:srgbClr val="FF7B72"/>
+                </a:solidFill>
+                <a:latin typeface="Menlo"/>
+              </a:rPr>
+              <a:t>call</a:t>
+            </a:r>
+            <a:r>
+              <a:rPr sz="1150" b="0">
+                <a:solidFill>
+                  <a:srgbClr val="E6EDF3"/>
+                </a:solidFill>
+                <a:latin typeface="Menlo"/>
+              </a:rPr>
+              <a:t> </a:t>
+            </a:r>
+            <a:r>
+              <a:rPr sz="1150" b="0">
+                <a:solidFill>
+                  <a:srgbClr val="E6EDF3"/>
+                </a:solidFill>
+                <a:latin typeface="Menlo"/>
+              </a:rPr>
+              <a:t>@</a:t>
+            </a:r>
+            <a:r>
+              <a:rPr sz="1150" b="0">
+                <a:solidFill>
+                  <a:srgbClr val="3FB950"/>
+                </a:solidFill>
+                <a:latin typeface="Menlo"/>
+              </a:rPr>
+              <a:t>Viper</a:t>
+            </a:r>
+            <a:r>
+              <a:rPr sz="1150" b="0">
+                <a:solidFill>
+                  <a:srgbClr val="E6EDF3"/>
+                </a:solidFill>
+                <a:latin typeface="Menlo"/>
+              </a:rPr>
+              <a:t>.</a:t>
+            </a:r>
+            <a:r>
+              <a:rPr sz="1150" b="0">
+                <a:solidFill>
+                  <a:srgbClr val="3FB950"/>
+                </a:solidFill>
+                <a:latin typeface="Menlo"/>
+              </a:rPr>
+              <a:t>Text</a:t>
+            </a:r>
+            <a:r>
+              <a:rPr sz="1150" b="0">
+                <a:solidFill>
+                  <a:srgbClr val="E6EDF3"/>
+                </a:solidFill>
+                <a:latin typeface="Menlo"/>
+              </a:rPr>
+              <a:t>.</a:t>
+            </a:r>
+            <a:r>
+              <a:rPr sz="1150" b="0">
+                <a:solidFill>
+                  <a:srgbClr val="3FB950"/>
+                </a:solidFill>
+                <a:latin typeface="Menlo"/>
+              </a:rPr>
+              <a:t>Fmt</a:t>
+            </a:r>
+            <a:r>
+              <a:rPr sz="1150" b="0">
+                <a:solidFill>
+                  <a:srgbClr val="E6EDF3"/>
+                </a:solidFill>
+                <a:latin typeface="Menlo"/>
+              </a:rPr>
+              <a:t>.</a:t>
+            </a:r>
+            <a:r>
+              <a:rPr sz="1150" b="0">
+                <a:solidFill>
+                  <a:srgbClr val="D2A8FF"/>
+                </a:solidFill>
+                <a:latin typeface="Menlo"/>
+              </a:rPr>
+              <a:t>Int</a:t>
+            </a:r>
+            <a:r>
+              <a:rPr sz="1150" b="0">
+                <a:solidFill>
+                  <a:srgbClr val="E6EDF3"/>
+                </a:solidFill>
+                <a:latin typeface="Menlo"/>
+              </a:rPr>
+              <a:t>(</a:t>
+            </a:r>
+            <a:r>
+              <a:rPr sz="1150" b="0">
+                <a:solidFill>
+                  <a:srgbClr val="FF7B72"/>
+                </a:solidFill>
+                <a:latin typeface="Menlo"/>
+              </a:rPr>
+              <a:t>%</a:t>
+            </a:r>
+            <a:r>
+              <a:rPr sz="1150" b="0">
+                <a:solidFill>
+                  <a:srgbClr val="E6EDF3"/>
+                </a:solidFill>
+                <a:latin typeface="Menlo"/>
+              </a:rPr>
+              <a:t>t6</a:t>
+            </a:r>
+            <a:r>
+              <a:rPr sz="1150" b="0">
+                <a:solidFill>
+                  <a:srgbClr val="E6EDF3"/>
+                </a:solidFill>
+                <a:latin typeface="Menlo"/>
+              </a:rPr>
+              <a:t>)</a:t>
             </a:r>
           </a:p>
           <a:p>
@@ -9789,7 +15494,115 @@
                 </a:solidFill>
                 <a:latin typeface="Menlo"/>
               </a:rPr>
-              <a:t>  call @Viper.Terminal.Say(%t7)</a:t>
+              <a:t>  </a:t>
+            </a:r>
+            <a:r>
+              <a:rPr sz="1150" b="0">
+                <a:solidFill>
+                  <a:srgbClr val="FF7B72"/>
+                </a:solidFill>
+                <a:latin typeface="Menlo"/>
+              </a:rPr>
+              <a:t>call</a:t>
+            </a:r>
+            <a:r>
+              <a:rPr sz="1150" b="0">
+                <a:solidFill>
+                  <a:srgbClr val="E6EDF3"/>
+                </a:solidFill>
+                <a:latin typeface="Menlo"/>
+              </a:rPr>
+              <a:t> </a:t>
+            </a:r>
+            <a:r>
+              <a:rPr sz="1150" b="0">
+                <a:solidFill>
+                  <a:srgbClr val="E6EDF3"/>
+                </a:solidFill>
+                <a:latin typeface="Menlo"/>
+              </a:rPr>
+              <a:t>@</a:t>
+            </a:r>
+            <a:r>
+              <a:rPr sz="1150" b="0">
+                <a:solidFill>
+                  <a:srgbClr val="3FB950"/>
+                </a:solidFill>
+                <a:latin typeface="Menlo"/>
+              </a:rPr>
+              <a:t>Viper</a:t>
+            </a:r>
+            <a:r>
+              <a:rPr sz="1150" b="0">
+                <a:solidFill>
+                  <a:srgbClr val="E6EDF3"/>
+                </a:solidFill>
+                <a:latin typeface="Menlo"/>
+              </a:rPr>
+              <a:t>.</a:t>
+            </a:r>
+            <a:r>
+              <a:rPr sz="1150" b="0">
+                <a:solidFill>
+                  <a:srgbClr val="3FB950"/>
+                </a:solidFill>
+                <a:latin typeface="Menlo"/>
+              </a:rPr>
+              <a:t>Terminal</a:t>
+            </a:r>
+            <a:r>
+              <a:rPr sz="1150" b="0">
+                <a:solidFill>
+                  <a:srgbClr val="E6EDF3"/>
+                </a:solidFill>
+                <a:latin typeface="Menlo"/>
+              </a:rPr>
+              <a:t>.</a:t>
+            </a:r>
+            <a:r>
+              <a:rPr sz="1150" b="0">
+                <a:solidFill>
+                  <a:srgbClr val="D2A8FF"/>
+                </a:solidFill>
+                <a:latin typeface="Menlo"/>
+              </a:rPr>
+              <a:t>Say</a:t>
+            </a:r>
+            <a:r>
+              <a:rPr sz="1150" b="0">
+                <a:solidFill>
+                  <a:srgbClr val="E6EDF3"/>
+                </a:solidFill>
+                <a:latin typeface="Menlo"/>
+              </a:rPr>
+              <a:t>(</a:t>
+            </a:r>
+            <a:r>
+              <a:rPr sz="1150" b="0">
+                <a:solidFill>
+                  <a:srgbClr val="FF7B72"/>
+                </a:solidFill>
+                <a:latin typeface="Menlo"/>
+              </a:rPr>
+              <a:t>%</a:t>
+            </a:r>
+            <a:r>
+              <a:rPr sz="1150" b="0">
+                <a:solidFill>
+                  <a:srgbClr val="E6EDF3"/>
+                </a:solidFill>
+                <a:latin typeface="Menlo"/>
+              </a:rPr>
+              <a:t>t7</a:t>
+            </a:r>
+            <a:r>
+              <a:rPr sz="1150" b="0">
+                <a:solidFill>
+                  <a:srgbClr val="E6EDF3"/>
+                </a:solidFill>
+                <a:latin typeface="Menlo"/>
+              </a:rPr>
+              <a:t>)</a:t>
             </a:r>
           </a:p>
           <a:p>
@@ -9811,7 +15624,16 @@
                 </a:solidFill>
                 <a:latin typeface="Menlo"/>
               </a:rPr>
-              <a:t>  ret</a:t>
+              <a:t>  </a:t>
+            </a:r>
+            <a:r>
+              <a:rPr sz="1150" b="0">
+                <a:solidFill>
+                  <a:srgbClr val="FF7B72"/>
+                </a:solidFill>
+                <a:latin typeface="Menlo"/>
+              </a:rPr>
+              <a:t>ret</a:t>
             </a:r>
           </a:p>
           <a:p>
@@ -9950,7 +15772,7 @@
                 </a:solidFill>
                 <a:latin typeface="Avenir Next"/>
               </a:rPr>
-              <a:t>05 / 12</a:t>
+              <a:t>08 / 17</a:t>
             </a:r>
           </a:p>
         </p:txBody>
@@ -10159,7 +15981,7 @@
         </p:nvSpPr>
         <p:spPr>
           <a:xfrm>
-            <a:off x="3535984" y="1371600"/>
+            <a:off x="3535984" y="1541600"/>
             <a:ext cx="5120640" cy="749808"/>
           </a:xfrm>
           <a:prstGeom prst="roundRect">
@@ -10248,7 +16070,7 @@
         </p:nvSpPr>
         <p:spPr>
           <a:xfrm>
-            <a:off x="5968288" y="2194560"/>
+            <a:off x="5968288" y="2364560"/>
             <a:ext cx="256032" cy="237744"/>
           </a:xfrm>
           <a:prstGeom prst="downArrow">
@@ -10292,7 +16114,7 @@
         </p:nvSpPr>
         <p:spPr>
           <a:xfrm>
-            <a:off x="3535984" y="2414016"/>
+            <a:off x="3535984" y="2584016"/>
             <a:ext cx="5120640" cy="749808"/>
           </a:xfrm>
           <a:prstGeom prst="roundRect">
@@ -10381,7 +16203,7 @@
         </p:nvSpPr>
         <p:spPr>
           <a:xfrm>
-            <a:off x="5968288" y="3236976"/>
+            <a:off x="5968288" y="3406976"/>
             <a:ext cx="256032" cy="237744"/>
           </a:xfrm>
           <a:prstGeom prst="downArrow">
@@ -10425,7 +16247,7 @@
         </p:nvSpPr>
         <p:spPr>
           <a:xfrm>
-            <a:off x="3078784" y="3456432"/>
+            <a:off x="3078784" y="3626432"/>
             <a:ext cx="6035040" cy="804672"/>
           </a:xfrm>
           <a:prstGeom prst="roundRect">
@@ -10514,7 +16336,7 @@
         </p:nvSpPr>
         <p:spPr>
           <a:xfrm>
-            <a:off x="3502152" y="4334256"/>
+            <a:off x="3502152" y="4504256"/>
             <a:ext cx="256032" cy="237744"/>
           </a:xfrm>
           <a:prstGeom prst="downArrow">
@@ -10558,7 +16380,7 @@
         </p:nvSpPr>
         <p:spPr>
           <a:xfrm>
-            <a:off x="8430767" y="4334256"/>
+            <a:off x="8430767" y="4504256"/>
             <a:ext cx="256032" cy="237744"/>
           </a:xfrm>
           <a:prstGeom prst="downArrow">
@@ -10602,7 +16424,7 @@
         </p:nvSpPr>
         <p:spPr>
           <a:xfrm>
-            <a:off x="1554480" y="4553712"/>
+            <a:off x="1554480" y="4723712"/>
             <a:ext cx="4160520" cy="859536"/>
           </a:xfrm>
           <a:prstGeom prst="roundRect">
@@ -10691,7 +16513,7 @@
         </p:nvSpPr>
         <p:spPr>
           <a:xfrm>
-            <a:off x="6473952" y="4553712"/>
+            <a:off x="6473952" y="4723712"/>
             <a:ext cx="4160520" cy="859536"/>
           </a:xfrm>
           <a:prstGeom prst="roundRect">
@@ -10780,7 +16602,7 @@
         </p:nvSpPr>
         <p:spPr>
           <a:xfrm>
-            <a:off x="3502152" y="5449824"/>
+            <a:off x="3502152" y="5619824"/>
             <a:ext cx="256032" cy="237744"/>
           </a:xfrm>
           <a:prstGeom prst="downArrow">
@@ -10824,7 +16646,7 @@
         </p:nvSpPr>
         <p:spPr>
           <a:xfrm>
-            <a:off x="8430767" y="5449824"/>
+            <a:off x="8430767" y="5619824"/>
             <a:ext cx="256032" cy="237744"/>
           </a:xfrm>
           <a:prstGeom prst="downArrow">
@@ -10868,7 +16690,7 @@
         </p:nvSpPr>
         <p:spPr>
           <a:xfrm>
-            <a:off x="3078784" y="5687568"/>
+            <a:off x="3078784" y="5857568"/>
             <a:ext cx="6035040" cy="749808"/>
           </a:xfrm>
           <a:prstGeom prst="roundRect">
@@ -10989,7 +16811,7 @@
                 </a:solidFill>
                 <a:latin typeface="Avenir Next"/>
               </a:rPr>
-              <a:t>06 / 12</a:t>
+              <a:t>09 / 17</a:t>
             </a:r>
           </a:p>
         </p:txBody>
@@ -11185,7 +17007,7 @@
                 </a:solidFill>
                 <a:latin typeface="Avenir Next"/>
               </a:rPr>
-              <a:t>Run instantly on the VM</a:t>
+              <a:t>Fast iteration on the VM</a:t>
             </a:r>
           </a:p>
           <a:p>
@@ -11506,15 +17328,78 @@
             <a:r>
               <a:rPr sz="1300" b="0">
                 <a:solidFill>
-                  <a:srgbClr val="E6EDF3"/>
-                </a:solidFill>
-                <a:latin typeface="Menlo"/>
-              </a:rPr>
-              <a:t>$ viper run game.zia      </a:t>
+                  <a:srgbClr val="8B949E"/>
+                </a:solidFill>
+                <a:latin typeface="Menlo"/>
+              </a:rPr>
+              <a:t>$</a:t>
             </a:r>
             <a:r>
               <a:rPr sz="1300" b="0">
                 <a:solidFill>
+                  <a:srgbClr val="E6EDF3"/>
+                </a:solidFill>
+                <a:latin typeface="Menlo"/>
+              </a:rPr>
+              <a:t> </a:t>
+            </a:r>
+            <a:r>
+              <a:rPr sz="1300" b="0">
+                <a:solidFill>
+                  <a:srgbClr val="D2A8FF"/>
+                </a:solidFill>
+                <a:latin typeface="Menlo"/>
+              </a:rPr>
+              <a:t>viper</a:t>
+            </a:r>
+            <a:r>
+              <a:rPr sz="1300" b="0">
+                <a:solidFill>
+                  <a:srgbClr val="E6EDF3"/>
+                </a:solidFill>
+                <a:latin typeface="Menlo"/>
+              </a:rPr>
+              <a:t> </a:t>
+            </a:r>
+            <a:r>
+              <a:rPr sz="1300" b="0">
+                <a:solidFill>
+                  <a:srgbClr val="D2A8FF"/>
+                </a:solidFill>
+                <a:latin typeface="Menlo"/>
+              </a:rPr>
+              <a:t>run</a:t>
+            </a:r>
+            <a:r>
+              <a:rPr sz="1300" b="0">
+                <a:solidFill>
+                  <a:srgbClr val="E6EDF3"/>
+                </a:solidFill>
+                <a:latin typeface="Menlo"/>
+              </a:rPr>
+              <a:t> </a:t>
+            </a:r>
+            <a:r>
+              <a:rPr sz="1300" b="0">
+                <a:solidFill>
+                  <a:srgbClr val="A5D6FF"/>
+                </a:solidFill>
+                <a:latin typeface="Menlo"/>
+              </a:rPr>
+              <a:t>game.zia</a:t>
+            </a:r>
+            <a:r>
+              <a:rPr sz="1300" b="0">
+                <a:solidFill>
+                  <a:srgbClr val="E6EDF3"/>
+                </a:solidFill>
+                <a:latin typeface="Menlo"/>
+              </a:rPr>
+              <a:t>      </a:t>
+            </a:r>
+            <a:r>
+              <a:rPr sz="1300" b="0">
+                <a:solidFill>
                   <a:srgbClr val="6E966E"/>
                 </a:solidFill>
                 <a:latin typeface="Menlo"/>
@@ -11537,15 +17422,60 @@
             <a:r>
               <a:rPr sz="1300" b="0">
                 <a:solidFill>
-                  <a:srgbClr val="E6EDF3"/>
-                </a:solidFill>
-                <a:latin typeface="Menlo"/>
-              </a:rPr>
-              <a:t>$ viper repl              </a:t>
+                  <a:srgbClr val="8B949E"/>
+                </a:solidFill>
+                <a:latin typeface="Menlo"/>
+              </a:rPr>
+              <a:t>$</a:t>
             </a:r>
             <a:r>
               <a:rPr sz="1300" b="0">
                 <a:solidFill>
+                  <a:srgbClr val="E6EDF3"/>
+                </a:solidFill>
+                <a:latin typeface="Menlo"/>
+              </a:rPr>
+              <a:t> </a:t>
+            </a:r>
+            <a:r>
+              <a:rPr sz="1300" b="0">
+                <a:solidFill>
+                  <a:srgbClr val="D2A8FF"/>
+                </a:solidFill>
+                <a:latin typeface="Menlo"/>
+              </a:rPr>
+              <a:t>viper</a:t>
+            </a:r>
+            <a:r>
+              <a:rPr sz="1300" b="0">
+                <a:solidFill>
+                  <a:srgbClr val="E6EDF3"/>
+                </a:solidFill>
+                <a:latin typeface="Menlo"/>
+              </a:rPr>
+              <a:t> </a:t>
+            </a:r>
+            <a:r>
+              <a:rPr sz="1300" b="0">
+                <a:solidFill>
+                  <a:srgbClr val="D2A8FF"/>
+                </a:solidFill>
+                <a:latin typeface="Menlo"/>
+              </a:rPr>
+              <a:t>repl</a:t>
+            </a:r>
+            <a:r>
+              <a:rPr sz="1300" b="0">
+                <a:solidFill>
+                  <a:srgbClr val="E6EDF3"/>
+                </a:solidFill>
+                <a:latin typeface="Menlo"/>
+              </a:rPr>
+              <a:t>              </a:t>
+            </a:r>
+            <a:r>
+              <a:rPr sz="1300" b="0">
+                <a:solidFill>
                   <a:srgbClr val="6E966E"/>
                 </a:solidFill>
                 <a:latin typeface="Menlo"/>
@@ -11568,11 +17498,56 @@
             <a:r>
               <a:rPr sz="1300" b="0">
                 <a:solidFill>
-                  <a:srgbClr val="E6EDF3"/>
-                </a:solidFill>
-                <a:latin typeface="Menlo"/>
-              </a:rPr>
-              <a:t>zia&gt; Say("hello")</a:t>
+                  <a:srgbClr val="8B949E"/>
+                </a:solidFill>
+                <a:latin typeface="Menlo"/>
+              </a:rPr>
+              <a:t>zia&gt;</a:t>
+            </a:r>
+            <a:r>
+              <a:rPr sz="1300" b="0">
+                <a:solidFill>
+                  <a:srgbClr val="E6EDF3"/>
+                </a:solidFill>
+                <a:latin typeface="Menlo"/>
+              </a:rPr>
+              <a:t> </a:t>
+            </a:r>
+            <a:r>
+              <a:rPr sz="1300" b="0">
+                <a:solidFill>
+                  <a:srgbClr val="D2A8FF"/>
+                </a:solidFill>
+                <a:latin typeface="Menlo"/>
+              </a:rPr>
+              <a:t>Say</a:t>
+            </a:r>
+            <a:r>
+              <a:rPr sz="1300" b="0">
+                <a:solidFill>
+                  <a:srgbClr val="E6EDF3"/>
+                </a:solidFill>
+                <a:latin typeface="Menlo"/>
+              </a:rPr>
+              <a:t>(</a:t>
+            </a:r>
+            <a:r>
+              <a:rPr sz="1300" b="0">
+                <a:solidFill>
+                  <a:srgbClr val="A5D6FF"/>
+                </a:solidFill>
+                <a:latin typeface="Menlo"/>
+              </a:rPr>
+              <a:t>"hello"</a:t>
+            </a:r>
+            <a:r>
+              <a:rPr sz="1300" b="0">
+                <a:solidFill>
+                  <a:srgbClr val="E6EDF3"/>
+                </a:solidFill>
+                <a:latin typeface="Menlo"/>
+              </a:rPr>
+              <a:t>)</a:t>
             </a:r>
           </a:p>
           <a:p>
@@ -11612,11 +17587,83 @@
             <a:r>
               <a:rPr sz="1300" b="0">
                 <a:solidFill>
-                  <a:srgbClr val="E6EDF3"/>
-                </a:solidFill>
-                <a:latin typeface="Menlo"/>
-              </a:rPr>
-              <a:t>zia&gt; Say(Fmt.Int(2 + 3))</a:t>
+                  <a:srgbClr val="8B949E"/>
+                </a:solidFill>
+                <a:latin typeface="Menlo"/>
+              </a:rPr>
+              <a:t>zia&gt;</a:t>
+            </a:r>
+            <a:r>
+              <a:rPr sz="1300" b="0">
+                <a:solidFill>
+                  <a:srgbClr val="E6EDF3"/>
+                </a:solidFill>
+                <a:latin typeface="Menlo"/>
+              </a:rPr>
+              <a:t> </a:t>
+            </a:r>
+            <a:r>
+              <a:rPr sz="1300" b="0">
+                <a:solidFill>
+                  <a:srgbClr val="D2A8FF"/>
+                </a:solidFill>
+                <a:latin typeface="Menlo"/>
+              </a:rPr>
+              <a:t>Say</a:t>
+            </a:r>
+            <a:r>
+              <a:rPr sz="1300" b="0">
+                <a:solidFill>
+                  <a:srgbClr val="E6EDF3"/>
+                </a:solidFill>
+                <a:latin typeface="Menlo"/>
+              </a:rPr>
+              <a:t>(Fmt.Int(</a:t>
+            </a:r>
+            <a:r>
+              <a:rPr sz="1300" b="0">
+                <a:solidFill>
+                  <a:srgbClr val="79C0FF"/>
+                </a:solidFill>
+                <a:latin typeface="Menlo"/>
+              </a:rPr>
+              <a:t>2</a:t>
+            </a:r>
+            <a:r>
+              <a:rPr sz="1300" b="0">
+                <a:solidFill>
+                  <a:srgbClr val="E6EDF3"/>
+                </a:solidFill>
+                <a:latin typeface="Menlo"/>
+              </a:rPr>
+              <a:t> </a:t>
+            </a:r>
+            <a:r>
+              <a:rPr sz="1300" b="0">
+                <a:solidFill>
+                  <a:srgbClr val="E6EDF3"/>
+                </a:solidFill>
+                <a:latin typeface="Menlo"/>
+              </a:rPr>
+              <a:t>+</a:t>
+            </a:r>
+            <a:r>
+              <a:rPr sz="1300" b="0">
+                <a:solidFill>
+                  <a:srgbClr val="E6EDF3"/>
+                </a:solidFill>
+                <a:latin typeface="Menlo"/>
+              </a:rPr>
+              <a:t> </a:t>
+            </a:r>
+            <a:r>
+              <a:rPr sz="1300" b="0">
+                <a:solidFill>
+                  <a:srgbClr val="E6EDF3"/>
+                </a:solidFill>
+                <a:latin typeface="Menlo"/>
+              </a:rPr>
+              <a:t>3))</a:t>
             </a:r>
           </a:p>
           <a:p>
@@ -11634,7 +17681,7 @@
             <a:r>
               <a:rPr sz="1300" b="0">
                 <a:solidFill>
-                  <a:srgbClr val="E6EDF3"/>
+                  <a:srgbClr val="79C0FF"/>
                 </a:solidFill>
                 <a:latin typeface="Menlo"/>
               </a:rPr>
@@ -11692,7 +17739,7 @@
                 </a:solidFill>
                 <a:latin typeface="Avenir Next"/>
               </a:rPr>
-              <a:t> — see results immediately, then ship the very same IL as a native binary.</a:t>
+              <a:t> — see results right away, then build the same IL as a native binary.</a:t>
             </a:r>
           </a:p>
         </p:txBody>
@@ -11737,7 +17784,7 @@
                 </a:solidFill>
                 <a:latin typeface="Avenir Next"/>
               </a:rPr>
-              <a:t>07 / 12</a:t>
+              <a:t>10 / 17</a:t>
             </a:r>
           </a:p>
         </p:txBody>
@@ -12053,7 +18100,7 @@
                 </a:solidFill>
                 <a:latin typeface="Avenir Next"/>
               </a:rPr>
-              <a:t>AArch64 · x86-64 — Apple Silicon, Windows, Linux</a:t>
+              <a:t>AArch64 and x86-64 targets for macOS, Windows, and Linux</a:t>
             </a:r>
           </a:p>
           <a:p>
@@ -12373,7 +18420,7 @@
                 </a:solidFill>
                 <a:latin typeface="Avenir Next"/>
               </a:rPr>
-              <a:t>08 / 12</a:t>
+              <a:t>11 / 17</a:t>
             </a:r>
           </a:p>
         </p:txBody>
@@ -14267,7 +20314,7 @@
                 </a:solidFill>
                 <a:latin typeface="Avenir Next"/>
               </a:rPr>
-              <a:t>09 / 12</a:t>
+              <a:t>12 / 17</a:t>
             </a:r>
           </a:p>
         </p:txBody>
